--- a/MO2_PPT.pptx
+++ b/MO2_PPT.pptx
@@ -2,29 +2,30 @@
 <file path=ppt/presentation.xml><?xml version="1.0" encoding="utf-8"?>
 <p:presentation xmlns:a="http://schemas.openxmlformats.org/drawingml/2006/main" xmlns:r="http://schemas.openxmlformats.org/officeDocument/2006/relationships" xmlns:p="http://schemas.openxmlformats.org/presentationml/2006/main" saveSubsetFonts="1">
   <p:sldMasterIdLst>
-    <p:sldMasterId id="2147483684" r:id="rId1"/>
+    <p:sldMasterId id="2147483684" r:id="rId4"/>
   </p:sldMasterIdLst>
   <p:notesMasterIdLst>
-    <p:notesMasterId r:id="rId19"/>
+    <p:notesMasterId r:id="rId23"/>
   </p:notesMasterIdLst>
   <p:sldIdLst>
-    <p:sldId id="256" r:id="rId2"/>
-    <p:sldId id="288" r:id="rId3"/>
-    <p:sldId id="302" r:id="rId4"/>
-    <p:sldId id="289" r:id="rId5"/>
-    <p:sldId id="301" r:id="rId6"/>
-    <p:sldId id="290" r:id="rId7"/>
-    <p:sldId id="292" r:id="rId8"/>
-    <p:sldId id="293" r:id="rId9"/>
-    <p:sldId id="291" r:id="rId10"/>
-    <p:sldId id="294" r:id="rId11"/>
-    <p:sldId id="295" r:id="rId12"/>
-    <p:sldId id="296" r:id="rId13"/>
-    <p:sldId id="297" r:id="rId14"/>
-    <p:sldId id="298" r:id="rId15"/>
-    <p:sldId id="299" r:id="rId16"/>
-    <p:sldId id="300" r:id="rId17"/>
-    <p:sldId id="280" r:id="rId18"/>
+    <p:sldId id="256" r:id="rId5"/>
+    <p:sldId id="288" r:id="rId6"/>
+    <p:sldId id="302" r:id="rId7"/>
+    <p:sldId id="306" r:id="rId8"/>
+    <p:sldId id="292" r:id="rId9"/>
+    <p:sldId id="293" r:id="rId10"/>
+    <p:sldId id="291" r:id="rId11"/>
+    <p:sldId id="294" r:id="rId12"/>
+    <p:sldId id="295" r:id="rId13"/>
+    <p:sldId id="296" r:id="rId14"/>
+    <p:sldId id="297" r:id="rId15"/>
+    <p:sldId id="298" r:id="rId16"/>
+    <p:sldId id="299" r:id="rId17"/>
+    <p:sldId id="300" r:id="rId18"/>
+    <p:sldId id="305" r:id="rId19"/>
+    <p:sldId id="308" r:id="rId20"/>
+    <p:sldId id="304" r:id="rId21"/>
+    <p:sldId id="280" r:id="rId22"/>
   </p:sldIdLst>
   <p:sldSz cx="12192000" cy="6858000"/>
   <p:notesSz cx="6858000" cy="9144000"/>
@@ -131,1909 +132,14 @@
 </p:presentation>
 </file>
 
-<file path=ppt/changesInfos/changesInfo1.xml><?xml version="1.0" encoding="utf-8"?>
-<pc:chgInfo xmlns:a="http://schemas.openxmlformats.org/drawingml/2006/main" xmlns:r="http://schemas.openxmlformats.org/officeDocument/2006/relationships" xmlns:ac="http://schemas.microsoft.com/office/drawing/2013/main/command" xmlns:pc="http://schemas.microsoft.com/office/powerpoint/2013/main/command">
-  <pc:docChgLst>
-    <pc:chgData name="Neil Patrick  A. Del Gallego" userId="9fccce03-204c-489b-ae7d-5aeb7f0c6bb7" providerId="ADAL" clId="{81196433-19FA-4C2B-981A-52BB8C0969A7}"/>
-    <pc:docChg chg="custSel modMainMaster">
-      <pc:chgData name="Neil Patrick  A. Del Gallego" userId="9fccce03-204c-489b-ae7d-5aeb7f0c6bb7" providerId="ADAL" clId="{81196433-19FA-4C2B-981A-52BB8C0969A7}" dt="2024-05-13T13:20:09.564" v="0" actId="478"/>
-      <pc:docMkLst>
-        <pc:docMk/>
-      </pc:docMkLst>
-      <pc:sldMasterChg chg="delSp mod">
-        <pc:chgData name="Neil Patrick  A. Del Gallego" userId="9fccce03-204c-489b-ae7d-5aeb7f0c6bb7" providerId="ADAL" clId="{81196433-19FA-4C2B-981A-52BB8C0969A7}" dt="2024-05-13T13:20:09.564" v="0" actId="478"/>
-        <pc:sldMasterMkLst>
-          <pc:docMk/>
-          <pc:sldMasterMk cId="2644797524" sldId="2147483684"/>
-        </pc:sldMasterMkLst>
-        <pc:picChg chg="del">
-          <ac:chgData name="Neil Patrick  A. Del Gallego" userId="9fccce03-204c-489b-ae7d-5aeb7f0c6bb7" providerId="ADAL" clId="{81196433-19FA-4C2B-981A-52BB8C0969A7}" dt="2024-05-13T13:20:09.564" v="0" actId="478"/>
-          <ac:picMkLst>
-            <pc:docMk/>
-            <pc:sldMasterMk cId="2644797524" sldId="2147483684"/>
-            <ac:picMk id="8" creationId="{826DC515-5005-E090-FDD6-DC92BB630040}"/>
-          </ac:picMkLst>
-        </pc:picChg>
-      </pc:sldMasterChg>
-    </pc:docChg>
-  </pc:docChgLst>
-  <pc:docChgLst>
-    <pc:chgData name="Neil Patrick  A. Del Gallego" userId="9fccce03-204c-489b-ae7d-5aeb7f0c6bb7" providerId="ADAL" clId="{8848EE55-73C6-42EA-A8D0-92868DB3740C}"/>
-    <pc:docChg chg="delSld modSld">
-      <pc:chgData name="Neil Patrick  A. Del Gallego" userId="9fccce03-204c-489b-ae7d-5aeb7f0c6bb7" providerId="ADAL" clId="{8848EE55-73C6-42EA-A8D0-92868DB3740C}" dt="2024-05-12T14:00:40.675" v="35" actId="47"/>
-      <pc:docMkLst>
-        <pc:docMk/>
-      </pc:docMkLst>
-      <pc:sldChg chg="modSp mod">
-        <pc:chgData name="Neil Patrick  A. Del Gallego" userId="9fccce03-204c-489b-ae7d-5aeb7f0c6bb7" providerId="ADAL" clId="{8848EE55-73C6-42EA-A8D0-92868DB3740C}" dt="2024-05-12T14:00:38.978" v="34" actId="20577"/>
-        <pc:sldMkLst>
-          <pc:docMk/>
-          <pc:sldMk cId="964464367" sldId="256"/>
-        </pc:sldMkLst>
-        <pc:spChg chg="mod">
-          <ac:chgData name="Neil Patrick  A. Del Gallego" userId="9fccce03-204c-489b-ae7d-5aeb7f0c6bb7" providerId="ADAL" clId="{8848EE55-73C6-42EA-A8D0-92868DB3740C}" dt="2024-05-12T14:00:38.978" v="34" actId="20577"/>
-          <ac:spMkLst>
-            <pc:docMk/>
-            <pc:sldMk cId="964464367" sldId="256"/>
-            <ac:spMk id="3" creationId="{00000000-0000-0000-0000-000000000000}"/>
-          </ac:spMkLst>
-        </pc:spChg>
-      </pc:sldChg>
-      <pc:sldChg chg="del">
-        <pc:chgData name="Neil Patrick  A. Del Gallego" userId="9fccce03-204c-489b-ae7d-5aeb7f0c6bb7" providerId="ADAL" clId="{8848EE55-73C6-42EA-A8D0-92868DB3740C}" dt="2024-05-12T14:00:40.675" v="35" actId="47"/>
-        <pc:sldMkLst>
-          <pc:docMk/>
-          <pc:sldMk cId="1111371222" sldId="297"/>
-        </pc:sldMkLst>
-      </pc:sldChg>
-    </pc:docChg>
-  </pc:docChgLst>
-  <pc:docChgLst>
-    <pc:chgData name="Neil Patrick  A. Del Gallego" userId="9fccce03-204c-489b-ae7d-5aeb7f0c6bb7" providerId="ADAL" clId="{098A67B0-652E-49C7-B9DE-0FF45FE6026A}"/>
-    <pc:docChg chg="undo custSel delSld modSld">
-      <pc:chgData name="Neil Patrick  A. Del Gallego" userId="9fccce03-204c-489b-ae7d-5aeb7f0c6bb7" providerId="ADAL" clId="{098A67B0-652E-49C7-B9DE-0FF45FE6026A}" dt="2023-10-04T02:34:39.659" v="57" actId="14100"/>
-      <pc:docMkLst>
-        <pc:docMk/>
-      </pc:docMkLst>
-      <pc:sldChg chg="modSp mod">
-        <pc:chgData name="Neil Patrick  A. Del Gallego" userId="9fccce03-204c-489b-ae7d-5aeb7f0c6bb7" providerId="ADAL" clId="{098A67B0-652E-49C7-B9DE-0FF45FE6026A}" dt="2023-10-04T02:34:06.273" v="19" actId="20577"/>
-        <pc:sldMkLst>
-          <pc:docMk/>
-          <pc:sldMk cId="964464367" sldId="256"/>
-        </pc:sldMkLst>
-        <pc:spChg chg="mod">
-          <ac:chgData name="Neil Patrick  A. Del Gallego" userId="9fccce03-204c-489b-ae7d-5aeb7f0c6bb7" providerId="ADAL" clId="{098A67B0-652E-49C7-B9DE-0FF45FE6026A}" dt="2023-10-04T02:34:03.630" v="11" actId="20577"/>
-          <ac:spMkLst>
-            <pc:docMk/>
-            <pc:sldMk cId="964464367" sldId="256"/>
-            <ac:spMk id="2" creationId="{00000000-0000-0000-0000-000000000000}"/>
-          </ac:spMkLst>
-        </pc:spChg>
-        <pc:spChg chg="mod">
-          <ac:chgData name="Neil Patrick  A. Del Gallego" userId="9fccce03-204c-489b-ae7d-5aeb7f0c6bb7" providerId="ADAL" clId="{098A67B0-652E-49C7-B9DE-0FF45FE6026A}" dt="2023-10-04T02:34:06.273" v="19" actId="20577"/>
-          <ac:spMkLst>
-            <pc:docMk/>
-            <pc:sldMk cId="964464367" sldId="256"/>
-            <ac:spMk id="4" creationId="{425D84B8-5341-4045-90F7-0378F7D789DE}"/>
-          </ac:spMkLst>
-        </pc:spChg>
-      </pc:sldChg>
-      <pc:sldChg chg="delSp modSp mod">
-        <pc:chgData name="Neil Patrick  A. Del Gallego" userId="9fccce03-204c-489b-ae7d-5aeb7f0c6bb7" providerId="ADAL" clId="{098A67B0-652E-49C7-B9DE-0FF45FE6026A}" dt="2023-10-04T02:34:39.659" v="57" actId="14100"/>
-        <pc:sldMkLst>
-          <pc:docMk/>
-          <pc:sldMk cId="4238617233" sldId="280"/>
-        </pc:sldMkLst>
-        <pc:spChg chg="mod">
-          <ac:chgData name="Neil Patrick  A. Del Gallego" userId="9fccce03-204c-489b-ae7d-5aeb7f0c6bb7" providerId="ADAL" clId="{098A67B0-652E-49C7-B9DE-0FF45FE6026A}" dt="2023-10-04T02:34:39.659" v="57" actId="14100"/>
-          <ac:spMkLst>
-            <pc:docMk/>
-            <pc:sldMk cId="4238617233" sldId="280"/>
-            <ac:spMk id="2" creationId="{8CC353A4-95E0-46A3-BF0C-110F7F7790C7}"/>
-          </ac:spMkLst>
-        </pc:spChg>
-        <pc:picChg chg="del">
-          <ac:chgData name="Neil Patrick  A. Del Gallego" userId="9fccce03-204c-489b-ae7d-5aeb7f0c6bb7" providerId="ADAL" clId="{098A67B0-652E-49C7-B9DE-0FF45FE6026A}" dt="2023-10-04T02:34:37.342" v="56" actId="478"/>
-          <ac:picMkLst>
-            <pc:docMk/>
-            <pc:sldMk cId="4238617233" sldId="280"/>
-            <ac:picMk id="11" creationId="{E0787B8B-C180-49EC-B9DF-76FD7929E7CB}"/>
-          </ac:picMkLst>
-        </pc:picChg>
-      </pc:sldChg>
-      <pc:sldChg chg="del">
-        <pc:chgData name="Neil Patrick  A. Del Gallego" userId="9fccce03-204c-489b-ae7d-5aeb7f0c6bb7" providerId="ADAL" clId="{098A67B0-652E-49C7-B9DE-0FF45FE6026A}" dt="2023-10-04T02:34:27.400" v="55" actId="47"/>
-        <pc:sldMkLst>
-          <pc:docMk/>
-          <pc:sldMk cId="3868103168" sldId="287"/>
-        </pc:sldMkLst>
-      </pc:sldChg>
-      <pc:sldChg chg="delSp modSp mod">
-        <pc:chgData name="Neil Patrick  A. Del Gallego" userId="9fccce03-204c-489b-ae7d-5aeb7f0c6bb7" providerId="ADAL" clId="{098A67B0-652E-49C7-B9DE-0FF45FE6026A}" dt="2023-10-04T02:34:23.092" v="54" actId="478"/>
-        <pc:sldMkLst>
-          <pc:docMk/>
-          <pc:sldMk cId="4237367364" sldId="288"/>
-        </pc:sldMkLst>
-        <pc:spChg chg="mod">
-          <ac:chgData name="Neil Patrick  A. Del Gallego" userId="9fccce03-204c-489b-ae7d-5aeb7f0c6bb7" providerId="ADAL" clId="{098A67B0-652E-49C7-B9DE-0FF45FE6026A}" dt="2023-10-04T02:34:19.424" v="48" actId="20577"/>
-          <ac:spMkLst>
-            <pc:docMk/>
-            <pc:sldMk cId="4237367364" sldId="288"/>
-            <ac:spMk id="2" creationId="{D0FAFE88-3BB3-4A37-8738-A7A760A9234D}"/>
-          </ac:spMkLst>
-        </pc:spChg>
-        <pc:spChg chg="mod">
-          <ac:chgData name="Neil Patrick  A. Del Gallego" userId="9fccce03-204c-489b-ae7d-5aeb7f0c6bb7" providerId="ADAL" clId="{098A67B0-652E-49C7-B9DE-0FF45FE6026A}" dt="2023-10-04T02:34:21.338" v="52" actId="20577"/>
-          <ac:spMkLst>
-            <pc:docMk/>
-            <pc:sldMk cId="4237367364" sldId="288"/>
-            <ac:spMk id="4" creationId="{900A3B5E-0D88-40D3-ADEE-967AB121DC82}"/>
-          </ac:spMkLst>
-        </pc:spChg>
-        <pc:picChg chg="del">
-          <ac:chgData name="Neil Patrick  A. Del Gallego" userId="9fccce03-204c-489b-ae7d-5aeb7f0c6bb7" providerId="ADAL" clId="{098A67B0-652E-49C7-B9DE-0FF45FE6026A}" dt="2023-10-04T02:34:22.779" v="53" actId="478"/>
-          <ac:picMkLst>
-            <pc:docMk/>
-            <pc:sldMk cId="4237367364" sldId="288"/>
-            <ac:picMk id="3" creationId="{7BB071FA-CF70-9B9F-4909-B92842281BE8}"/>
-          </ac:picMkLst>
-        </pc:picChg>
-        <pc:picChg chg="del">
-          <ac:chgData name="Neil Patrick  A. Del Gallego" userId="9fccce03-204c-489b-ae7d-5aeb7f0c6bb7" providerId="ADAL" clId="{098A67B0-652E-49C7-B9DE-0FF45FE6026A}" dt="2023-10-04T02:34:23.092" v="54" actId="478"/>
-          <ac:picMkLst>
-            <pc:docMk/>
-            <pc:sldMk cId="4237367364" sldId="288"/>
-            <ac:picMk id="6" creationId="{1F63C46D-C221-BA44-53D2-63138C53A24B}"/>
-          </ac:picMkLst>
-        </pc:picChg>
-      </pc:sldChg>
-      <pc:sldChg chg="del">
-        <pc:chgData name="Neil Patrick  A. Del Gallego" userId="9fccce03-204c-489b-ae7d-5aeb7f0c6bb7" providerId="ADAL" clId="{098A67B0-652E-49C7-B9DE-0FF45FE6026A}" dt="2023-10-04T02:34:27.400" v="55" actId="47"/>
-        <pc:sldMkLst>
-          <pc:docMk/>
-          <pc:sldMk cId="3532252714" sldId="289"/>
-        </pc:sldMkLst>
-      </pc:sldChg>
-      <pc:sldChg chg="del">
-        <pc:chgData name="Neil Patrick  A. Del Gallego" userId="9fccce03-204c-489b-ae7d-5aeb7f0c6bb7" providerId="ADAL" clId="{098A67B0-652E-49C7-B9DE-0FF45FE6026A}" dt="2023-10-04T02:34:27.400" v="55" actId="47"/>
-        <pc:sldMkLst>
-          <pc:docMk/>
-          <pc:sldMk cId="922805357" sldId="290"/>
-        </pc:sldMkLst>
-      </pc:sldChg>
-      <pc:sldChg chg="del">
-        <pc:chgData name="Neil Patrick  A. Del Gallego" userId="9fccce03-204c-489b-ae7d-5aeb7f0c6bb7" providerId="ADAL" clId="{098A67B0-652E-49C7-B9DE-0FF45FE6026A}" dt="2023-10-04T02:34:27.400" v="55" actId="47"/>
-        <pc:sldMkLst>
-          <pc:docMk/>
-          <pc:sldMk cId="392016377" sldId="291"/>
-        </pc:sldMkLst>
-      </pc:sldChg>
-      <pc:sldChg chg="del">
-        <pc:chgData name="Neil Patrick  A. Del Gallego" userId="9fccce03-204c-489b-ae7d-5aeb7f0c6bb7" providerId="ADAL" clId="{098A67B0-652E-49C7-B9DE-0FF45FE6026A}" dt="2023-10-04T02:34:27.400" v="55" actId="47"/>
-        <pc:sldMkLst>
-          <pc:docMk/>
-          <pc:sldMk cId="3058687720" sldId="293"/>
-        </pc:sldMkLst>
-      </pc:sldChg>
-      <pc:sldChg chg="del">
-        <pc:chgData name="Neil Patrick  A. Del Gallego" userId="9fccce03-204c-489b-ae7d-5aeb7f0c6bb7" providerId="ADAL" clId="{098A67B0-652E-49C7-B9DE-0FF45FE6026A}" dt="2023-10-04T02:34:27.400" v="55" actId="47"/>
-        <pc:sldMkLst>
-          <pc:docMk/>
-          <pc:sldMk cId="3918923197" sldId="294"/>
-        </pc:sldMkLst>
-      </pc:sldChg>
-      <pc:sldChg chg="del">
-        <pc:chgData name="Neil Patrick  A. Del Gallego" userId="9fccce03-204c-489b-ae7d-5aeb7f0c6bb7" providerId="ADAL" clId="{098A67B0-652E-49C7-B9DE-0FF45FE6026A}" dt="2023-10-04T02:34:27.400" v="55" actId="47"/>
-        <pc:sldMkLst>
-          <pc:docMk/>
-          <pc:sldMk cId="916308430" sldId="295"/>
-        </pc:sldMkLst>
-      </pc:sldChg>
-      <pc:sldChg chg="del">
-        <pc:chgData name="Neil Patrick  A. Del Gallego" userId="9fccce03-204c-489b-ae7d-5aeb7f0c6bb7" providerId="ADAL" clId="{098A67B0-652E-49C7-B9DE-0FF45FE6026A}" dt="2023-10-04T02:34:27.400" v="55" actId="47"/>
-        <pc:sldMkLst>
-          <pc:docMk/>
-          <pc:sldMk cId="929676779" sldId="296"/>
-        </pc:sldMkLst>
-      </pc:sldChg>
-      <pc:sldChg chg="del">
-        <pc:chgData name="Neil Patrick  A. Del Gallego" userId="9fccce03-204c-489b-ae7d-5aeb7f0c6bb7" providerId="ADAL" clId="{098A67B0-652E-49C7-B9DE-0FF45FE6026A}" dt="2023-10-04T02:34:27.400" v="55" actId="47"/>
-        <pc:sldMkLst>
-          <pc:docMk/>
-          <pc:sldMk cId="626469240" sldId="298"/>
-        </pc:sldMkLst>
-      </pc:sldChg>
-      <pc:sldChg chg="del">
-        <pc:chgData name="Neil Patrick  A. Del Gallego" userId="9fccce03-204c-489b-ae7d-5aeb7f0c6bb7" providerId="ADAL" clId="{098A67B0-652E-49C7-B9DE-0FF45FE6026A}" dt="2023-10-04T02:34:27.400" v="55" actId="47"/>
-        <pc:sldMkLst>
-          <pc:docMk/>
-          <pc:sldMk cId="4118828501" sldId="333"/>
-        </pc:sldMkLst>
-      </pc:sldChg>
-      <pc:sldChg chg="del">
-        <pc:chgData name="Neil Patrick  A. Del Gallego" userId="9fccce03-204c-489b-ae7d-5aeb7f0c6bb7" providerId="ADAL" clId="{098A67B0-652E-49C7-B9DE-0FF45FE6026A}" dt="2023-10-04T02:34:27.400" v="55" actId="47"/>
-        <pc:sldMkLst>
-          <pc:docMk/>
-          <pc:sldMk cId="3776419982" sldId="334"/>
-        </pc:sldMkLst>
-      </pc:sldChg>
-      <pc:sldChg chg="del">
-        <pc:chgData name="Neil Patrick  A. Del Gallego" userId="9fccce03-204c-489b-ae7d-5aeb7f0c6bb7" providerId="ADAL" clId="{098A67B0-652E-49C7-B9DE-0FF45FE6026A}" dt="2023-10-04T02:34:27.400" v="55" actId="47"/>
-        <pc:sldMkLst>
-          <pc:docMk/>
-          <pc:sldMk cId="33468046" sldId="335"/>
-        </pc:sldMkLst>
-      </pc:sldChg>
-      <pc:sldChg chg="del">
-        <pc:chgData name="Neil Patrick  A. Del Gallego" userId="9fccce03-204c-489b-ae7d-5aeb7f0c6bb7" providerId="ADAL" clId="{098A67B0-652E-49C7-B9DE-0FF45FE6026A}" dt="2023-10-04T02:34:27.400" v="55" actId="47"/>
-        <pc:sldMkLst>
-          <pc:docMk/>
-          <pc:sldMk cId="2610385816" sldId="336"/>
-        </pc:sldMkLst>
-      </pc:sldChg>
-      <pc:sldChg chg="del">
-        <pc:chgData name="Neil Patrick  A. Del Gallego" userId="9fccce03-204c-489b-ae7d-5aeb7f0c6bb7" providerId="ADAL" clId="{098A67B0-652E-49C7-B9DE-0FF45FE6026A}" dt="2023-10-04T02:34:27.400" v="55" actId="47"/>
-        <pc:sldMkLst>
-          <pc:docMk/>
-          <pc:sldMk cId="3741554735" sldId="337"/>
-        </pc:sldMkLst>
-      </pc:sldChg>
-      <pc:sldChg chg="del">
-        <pc:chgData name="Neil Patrick  A. Del Gallego" userId="9fccce03-204c-489b-ae7d-5aeb7f0c6bb7" providerId="ADAL" clId="{098A67B0-652E-49C7-B9DE-0FF45FE6026A}" dt="2023-10-04T02:34:27.400" v="55" actId="47"/>
-        <pc:sldMkLst>
-          <pc:docMk/>
-          <pc:sldMk cId="2490844624" sldId="338"/>
-        </pc:sldMkLst>
-      </pc:sldChg>
-      <pc:sldChg chg="del">
-        <pc:chgData name="Neil Patrick  A. Del Gallego" userId="9fccce03-204c-489b-ae7d-5aeb7f0c6bb7" providerId="ADAL" clId="{098A67B0-652E-49C7-B9DE-0FF45FE6026A}" dt="2023-10-04T02:34:27.400" v="55" actId="47"/>
-        <pc:sldMkLst>
-          <pc:docMk/>
-          <pc:sldMk cId="2820338251" sldId="339"/>
-        </pc:sldMkLst>
-      </pc:sldChg>
-      <pc:sldChg chg="del">
-        <pc:chgData name="Neil Patrick  A. Del Gallego" userId="9fccce03-204c-489b-ae7d-5aeb7f0c6bb7" providerId="ADAL" clId="{098A67B0-652E-49C7-B9DE-0FF45FE6026A}" dt="2023-10-04T02:34:27.400" v="55" actId="47"/>
-        <pc:sldMkLst>
-          <pc:docMk/>
-          <pc:sldMk cId="1787033067" sldId="340"/>
-        </pc:sldMkLst>
-      </pc:sldChg>
-    </pc:docChg>
-  </pc:docChgLst>
-  <pc:docChgLst>
-    <pc:chgData name="Neil Patrick  A. Del Gallego" userId="9fccce03-204c-489b-ae7d-5aeb7f0c6bb7" providerId="ADAL" clId="{6A1F3EF7-90F3-4287-8EFD-9DD7C6C2096F}"/>
-    <pc:docChg chg="undo redo custSel addSld delSld modSld sldOrd modMainMaster">
-      <pc:chgData name="Neil Patrick  A. Del Gallego" userId="9fccce03-204c-489b-ae7d-5aeb7f0c6bb7" providerId="ADAL" clId="{6A1F3EF7-90F3-4287-8EFD-9DD7C6C2096F}" dt="2023-10-02T11:58:15.413" v="7773" actId="20577"/>
-      <pc:docMkLst>
-        <pc:docMk/>
-      </pc:docMkLst>
-      <pc:sldChg chg="modSp mod">
-        <pc:chgData name="Neil Patrick  A. Del Gallego" userId="9fccce03-204c-489b-ae7d-5aeb7f0c6bb7" providerId="ADAL" clId="{6A1F3EF7-90F3-4287-8EFD-9DD7C6C2096F}" dt="2023-10-02T06:39:59.448" v="4649" actId="20577"/>
-        <pc:sldMkLst>
-          <pc:docMk/>
-          <pc:sldMk cId="964464367" sldId="256"/>
-        </pc:sldMkLst>
-        <pc:spChg chg="mod">
-          <ac:chgData name="Neil Patrick  A. Del Gallego" userId="9fccce03-204c-489b-ae7d-5aeb7f0c6bb7" providerId="ADAL" clId="{6A1F3EF7-90F3-4287-8EFD-9DD7C6C2096F}" dt="2023-10-02T06:10:46.950" v="3032" actId="20577"/>
-          <ac:spMkLst>
-            <pc:docMk/>
-            <pc:sldMk cId="964464367" sldId="256"/>
-            <ac:spMk id="2" creationId="{00000000-0000-0000-0000-000000000000}"/>
-          </ac:spMkLst>
-        </pc:spChg>
-        <pc:spChg chg="mod">
-          <ac:chgData name="Neil Patrick  A. Del Gallego" userId="9fccce03-204c-489b-ae7d-5aeb7f0c6bb7" providerId="ADAL" clId="{6A1F3EF7-90F3-4287-8EFD-9DD7C6C2096F}" dt="2023-10-02T06:39:59.448" v="4649" actId="20577"/>
-          <ac:spMkLst>
-            <pc:docMk/>
-            <pc:sldMk cId="964464367" sldId="256"/>
-            <ac:spMk id="3" creationId="{00000000-0000-0000-0000-000000000000}"/>
-          </ac:spMkLst>
-        </pc:spChg>
-        <pc:spChg chg="mod">
-          <ac:chgData name="Neil Patrick  A. Del Gallego" userId="9fccce03-204c-489b-ae7d-5aeb7f0c6bb7" providerId="ADAL" clId="{6A1F3EF7-90F3-4287-8EFD-9DD7C6C2096F}" dt="2023-10-02T05:08:44.494" v="105" actId="20577"/>
-          <ac:spMkLst>
-            <pc:docMk/>
-            <pc:sldMk cId="964464367" sldId="256"/>
-            <ac:spMk id="4" creationId="{425D84B8-5341-4045-90F7-0378F7D789DE}"/>
-          </ac:spMkLst>
-        </pc:spChg>
-      </pc:sldChg>
-      <pc:sldChg chg="delSp mod">
-        <pc:chgData name="Neil Patrick  A. Del Gallego" userId="9fccce03-204c-489b-ae7d-5aeb7f0c6bb7" providerId="ADAL" clId="{6A1F3EF7-90F3-4287-8EFD-9DD7C6C2096F}" dt="2023-10-02T11:03:03.054" v="5202" actId="478"/>
-        <pc:sldMkLst>
-          <pc:docMk/>
-          <pc:sldMk cId="4238617233" sldId="280"/>
-        </pc:sldMkLst>
-        <pc:picChg chg="del">
-          <ac:chgData name="Neil Patrick  A. Del Gallego" userId="9fccce03-204c-489b-ae7d-5aeb7f0c6bb7" providerId="ADAL" clId="{6A1F3EF7-90F3-4287-8EFD-9DD7C6C2096F}" dt="2023-10-02T11:03:03.054" v="5202" actId="478"/>
-          <ac:picMkLst>
-            <pc:docMk/>
-            <pc:sldMk cId="4238617233" sldId="280"/>
-            <ac:picMk id="6" creationId="{06FA0C90-1A3C-43C8-B383-5ED1177F015F}"/>
-          </ac:picMkLst>
-        </pc:picChg>
-      </pc:sldChg>
-      <pc:sldChg chg="addSp delSp modSp mod">
-        <pc:chgData name="Neil Patrick  A. Del Gallego" userId="9fccce03-204c-489b-ae7d-5aeb7f0c6bb7" providerId="ADAL" clId="{6A1F3EF7-90F3-4287-8EFD-9DD7C6C2096F}" dt="2023-10-02T05:59:06.258" v="2674" actId="14100"/>
-        <pc:sldMkLst>
-          <pc:docMk/>
-          <pc:sldMk cId="3868103168" sldId="287"/>
-        </pc:sldMkLst>
-        <pc:spChg chg="mod">
-          <ac:chgData name="Neil Patrick  A. Del Gallego" userId="9fccce03-204c-489b-ae7d-5aeb7f0c6bb7" providerId="ADAL" clId="{6A1F3EF7-90F3-4287-8EFD-9DD7C6C2096F}" dt="2023-10-02T05:59:01.514" v="2672" actId="14100"/>
-          <ac:spMkLst>
-            <pc:docMk/>
-            <pc:sldMk cId="3868103168" sldId="287"/>
-            <ac:spMk id="2" creationId="{D0FAFE88-3BB3-4A37-8738-A7A760A9234D}"/>
-          </ac:spMkLst>
-        </pc:spChg>
-        <pc:spChg chg="mod">
-          <ac:chgData name="Neil Patrick  A. Del Gallego" userId="9fccce03-204c-489b-ae7d-5aeb7f0c6bb7" providerId="ADAL" clId="{6A1F3EF7-90F3-4287-8EFD-9DD7C6C2096F}" dt="2023-10-02T05:59:06.258" v="2674" actId="14100"/>
-          <ac:spMkLst>
-            <pc:docMk/>
-            <pc:sldMk cId="3868103168" sldId="287"/>
-            <ac:spMk id="4" creationId="{900A3B5E-0D88-40D3-ADEE-967AB121DC82}"/>
-          </ac:spMkLst>
-        </pc:spChg>
-        <pc:picChg chg="add mod">
-          <ac:chgData name="Neil Patrick  A. Del Gallego" userId="9fccce03-204c-489b-ae7d-5aeb7f0c6bb7" providerId="ADAL" clId="{6A1F3EF7-90F3-4287-8EFD-9DD7C6C2096F}" dt="2023-10-02T05:18:29.709" v="603" actId="1076"/>
-          <ac:picMkLst>
-            <pc:docMk/>
-            <pc:sldMk cId="3868103168" sldId="287"/>
-            <ac:picMk id="3" creationId="{AED038CA-6BAA-730B-002F-E764BE0377BF}"/>
-          </ac:picMkLst>
-        </pc:picChg>
-        <pc:picChg chg="del">
-          <ac:chgData name="Neil Patrick  A. Del Gallego" userId="9fccce03-204c-489b-ae7d-5aeb7f0c6bb7" providerId="ADAL" clId="{6A1F3EF7-90F3-4287-8EFD-9DD7C6C2096F}" dt="2023-10-02T05:15:37.474" v="402" actId="478"/>
-          <ac:picMkLst>
-            <pc:docMk/>
-            <pc:sldMk cId="3868103168" sldId="287"/>
-            <ac:picMk id="1026" creationId="{F144BEC2-5560-1DBB-066D-049FA9B843CF}"/>
-          </ac:picMkLst>
-        </pc:picChg>
-      </pc:sldChg>
-      <pc:sldChg chg="addSp delSp modSp mod delAnim">
-        <pc:chgData name="Neil Patrick  A. Del Gallego" userId="9fccce03-204c-489b-ae7d-5aeb7f0c6bb7" providerId="ADAL" clId="{6A1F3EF7-90F3-4287-8EFD-9DD7C6C2096F}" dt="2023-10-02T05:58:55.967" v="2671" actId="1076"/>
-        <pc:sldMkLst>
-          <pc:docMk/>
-          <pc:sldMk cId="4237367364" sldId="288"/>
-        </pc:sldMkLst>
-        <pc:spChg chg="mod">
-          <ac:chgData name="Neil Patrick  A. Del Gallego" userId="9fccce03-204c-489b-ae7d-5aeb7f0c6bb7" providerId="ADAL" clId="{6A1F3EF7-90F3-4287-8EFD-9DD7C6C2096F}" dt="2023-10-02T05:56:23.415" v="2635"/>
-          <ac:spMkLst>
-            <pc:docMk/>
-            <pc:sldMk cId="4237367364" sldId="288"/>
-            <ac:spMk id="2" creationId="{D0FAFE88-3BB3-4A37-8738-A7A760A9234D}"/>
-          </ac:spMkLst>
-        </pc:spChg>
-        <pc:spChg chg="mod">
-          <ac:chgData name="Neil Patrick  A. Del Gallego" userId="9fccce03-204c-489b-ae7d-5aeb7f0c6bb7" providerId="ADAL" clId="{6A1F3EF7-90F3-4287-8EFD-9DD7C6C2096F}" dt="2023-10-02T05:58:53.890" v="2670" actId="14100"/>
-          <ac:spMkLst>
-            <pc:docMk/>
-            <pc:sldMk cId="4237367364" sldId="288"/>
-            <ac:spMk id="4" creationId="{900A3B5E-0D88-40D3-ADEE-967AB121DC82}"/>
-          </ac:spMkLst>
-        </pc:spChg>
-        <pc:picChg chg="add mod">
-          <ac:chgData name="Neil Patrick  A. Del Gallego" userId="9fccce03-204c-489b-ae7d-5aeb7f0c6bb7" providerId="ADAL" clId="{6A1F3EF7-90F3-4287-8EFD-9DD7C6C2096F}" dt="2023-10-02T05:58:50.676" v="2669" actId="1076"/>
-          <ac:picMkLst>
-            <pc:docMk/>
-            <pc:sldMk cId="4237367364" sldId="288"/>
-            <ac:picMk id="3" creationId="{7BB071FA-CF70-9B9F-4909-B92842281BE8}"/>
-          </ac:picMkLst>
-        </pc:picChg>
-        <pc:picChg chg="del">
-          <ac:chgData name="Neil Patrick  A. Del Gallego" userId="9fccce03-204c-489b-ae7d-5aeb7f0c6bb7" providerId="ADAL" clId="{6A1F3EF7-90F3-4287-8EFD-9DD7C6C2096F}" dt="2023-10-02T05:09:09.195" v="106" actId="478"/>
-          <ac:picMkLst>
-            <pc:docMk/>
-            <pc:sldMk cId="4237367364" sldId="288"/>
-            <ac:picMk id="5" creationId="{6F2A15E5-AF8E-4246-5788-E7A76AC8F77F}"/>
-          </ac:picMkLst>
-        </pc:picChg>
-        <pc:picChg chg="add mod">
-          <ac:chgData name="Neil Patrick  A. Del Gallego" userId="9fccce03-204c-489b-ae7d-5aeb7f0c6bb7" providerId="ADAL" clId="{6A1F3EF7-90F3-4287-8EFD-9DD7C6C2096F}" dt="2023-10-02T05:58:55.967" v="2671" actId="1076"/>
-          <ac:picMkLst>
-            <pc:docMk/>
-            <pc:sldMk cId="4237367364" sldId="288"/>
-            <ac:picMk id="6" creationId="{1F63C46D-C221-BA44-53D2-63138C53A24B}"/>
-          </ac:picMkLst>
-        </pc:picChg>
-      </pc:sldChg>
-      <pc:sldChg chg="addSp delSp modSp add del mod">
-        <pc:chgData name="Neil Patrick  A. Del Gallego" userId="9fccce03-204c-489b-ae7d-5aeb7f0c6bb7" providerId="ADAL" clId="{6A1F3EF7-90F3-4287-8EFD-9DD7C6C2096F}" dt="2023-10-02T06:00:18.390" v="2742" actId="478"/>
-        <pc:sldMkLst>
-          <pc:docMk/>
-          <pc:sldMk cId="3532252714" sldId="289"/>
-        </pc:sldMkLst>
-        <pc:spChg chg="mod">
-          <ac:chgData name="Neil Patrick  A. Del Gallego" userId="9fccce03-204c-489b-ae7d-5aeb7f0c6bb7" providerId="ADAL" clId="{6A1F3EF7-90F3-4287-8EFD-9DD7C6C2096F}" dt="2023-10-02T06:00:06.731" v="2738" actId="14100"/>
-          <ac:spMkLst>
-            <pc:docMk/>
-            <pc:sldMk cId="3532252714" sldId="289"/>
-            <ac:spMk id="2" creationId="{D0FAFE88-3BB3-4A37-8738-A7A760A9234D}"/>
-          </ac:spMkLst>
-        </pc:spChg>
-        <pc:spChg chg="mod">
-          <ac:chgData name="Neil Patrick  A. Del Gallego" userId="9fccce03-204c-489b-ae7d-5aeb7f0c6bb7" providerId="ADAL" clId="{6A1F3EF7-90F3-4287-8EFD-9DD7C6C2096F}" dt="2023-10-02T06:00:11.894" v="2739" actId="255"/>
-          <ac:spMkLst>
-            <pc:docMk/>
-            <pc:sldMk cId="3532252714" sldId="289"/>
-            <ac:spMk id="4" creationId="{900A3B5E-0D88-40D3-ADEE-967AB121DC82}"/>
-          </ac:spMkLst>
-        </pc:spChg>
-        <pc:picChg chg="add mod">
-          <ac:chgData name="Neil Patrick  A. Del Gallego" userId="9fccce03-204c-489b-ae7d-5aeb7f0c6bb7" providerId="ADAL" clId="{6A1F3EF7-90F3-4287-8EFD-9DD7C6C2096F}" dt="2023-10-02T06:00:13.941" v="2740" actId="1076"/>
-          <ac:picMkLst>
-            <pc:docMk/>
-            <pc:sldMk cId="3532252714" sldId="289"/>
-            <ac:picMk id="5" creationId="{6F7F23A1-55FF-2AD1-823D-14B4CDCA14E5}"/>
-          </ac:picMkLst>
-        </pc:picChg>
-        <pc:picChg chg="add del mod">
-          <ac:chgData name="Neil Patrick  A. Del Gallego" userId="9fccce03-204c-489b-ae7d-5aeb7f0c6bb7" providerId="ADAL" clId="{6A1F3EF7-90F3-4287-8EFD-9DD7C6C2096F}" dt="2023-10-02T05:29:44.649" v="1503"/>
-          <ac:picMkLst>
-            <pc:docMk/>
-            <pc:sldMk cId="3532252714" sldId="289"/>
-            <ac:picMk id="6" creationId="{0B9E2339-F6D1-3CDD-9E0A-10F7767C619C}"/>
-          </ac:picMkLst>
-        </pc:picChg>
-        <pc:picChg chg="add mod">
-          <ac:chgData name="Neil Patrick  A. Del Gallego" userId="9fccce03-204c-489b-ae7d-5aeb7f0c6bb7" providerId="ADAL" clId="{6A1F3EF7-90F3-4287-8EFD-9DD7C6C2096F}" dt="2023-10-02T06:00:15.268" v="2741" actId="571"/>
-          <ac:picMkLst>
-            <pc:docMk/>
-            <pc:sldMk cId="3532252714" sldId="289"/>
-            <ac:picMk id="7" creationId="{31005B7D-211A-5DB1-8E1A-85A06F2EE2AB}"/>
-          </ac:picMkLst>
-        </pc:picChg>
-        <pc:picChg chg="del">
-          <ac:chgData name="Neil Patrick  A. Del Gallego" userId="9fccce03-204c-489b-ae7d-5aeb7f0c6bb7" providerId="ADAL" clId="{6A1F3EF7-90F3-4287-8EFD-9DD7C6C2096F}" dt="2023-10-02T05:27:01.852" v="1265" actId="478"/>
-          <ac:picMkLst>
-            <pc:docMk/>
-            <pc:sldMk cId="3532252714" sldId="289"/>
-            <ac:picMk id="2050" creationId="{6A415619-7448-E1F8-DBBD-CC7F39FBD343}"/>
-          </ac:picMkLst>
-        </pc:picChg>
-        <pc:picChg chg="add del mod">
-          <ac:chgData name="Neil Patrick  A. Del Gallego" userId="9fccce03-204c-489b-ae7d-5aeb7f0c6bb7" providerId="ADAL" clId="{6A1F3EF7-90F3-4287-8EFD-9DD7C6C2096F}" dt="2023-10-02T06:00:18.390" v="2742" actId="478"/>
-          <ac:picMkLst>
-            <pc:docMk/>
-            <pc:sldMk cId="3532252714" sldId="289"/>
-            <ac:picMk id="2052" creationId="{CDD867C9-F4A6-25EA-B1DD-3685F4220B22}"/>
-          </ac:picMkLst>
-        </pc:picChg>
-      </pc:sldChg>
-      <pc:sldChg chg="addSp delSp modSp mod ord modAnim">
-        <pc:chgData name="Neil Patrick  A. Del Gallego" userId="9fccce03-204c-489b-ae7d-5aeb7f0c6bb7" providerId="ADAL" clId="{6A1F3EF7-90F3-4287-8EFD-9DD7C6C2096F}" dt="2023-10-02T11:26:13.663" v="6958" actId="113"/>
-        <pc:sldMkLst>
-          <pc:docMk/>
-          <pc:sldMk cId="922805357" sldId="290"/>
-        </pc:sldMkLst>
-        <pc:spChg chg="mod">
-          <ac:chgData name="Neil Patrick  A. Del Gallego" userId="9fccce03-204c-489b-ae7d-5aeb7f0c6bb7" providerId="ADAL" clId="{6A1F3EF7-90F3-4287-8EFD-9DD7C6C2096F}" dt="2023-10-02T05:59:10.078" v="2675" actId="14100"/>
-          <ac:spMkLst>
-            <pc:docMk/>
-            <pc:sldMk cId="922805357" sldId="290"/>
-            <ac:spMk id="2" creationId="{D0FAFE88-3BB3-4A37-8738-A7A760A9234D}"/>
-          </ac:spMkLst>
-        </pc:spChg>
-        <pc:spChg chg="add mod">
-          <ac:chgData name="Neil Patrick  A. Del Gallego" userId="9fccce03-204c-489b-ae7d-5aeb7f0c6bb7" providerId="ADAL" clId="{6A1F3EF7-90F3-4287-8EFD-9DD7C6C2096F}" dt="2023-10-02T05:59:24.904" v="2705" actId="1036"/>
-          <ac:spMkLst>
-            <pc:docMk/>
-            <pc:sldMk cId="922805357" sldId="290"/>
-            <ac:spMk id="3" creationId="{20080723-4D94-FEB5-CFDD-0D20DB0BA6C1}"/>
-          </ac:spMkLst>
-        </pc:spChg>
-        <pc:spChg chg="mod">
-          <ac:chgData name="Neil Patrick  A. Del Gallego" userId="9fccce03-204c-489b-ae7d-5aeb7f0c6bb7" providerId="ADAL" clId="{6A1F3EF7-90F3-4287-8EFD-9DD7C6C2096F}" dt="2023-10-02T05:59:12.352" v="2676" actId="14100"/>
-          <ac:spMkLst>
-            <pc:docMk/>
-            <pc:sldMk cId="922805357" sldId="290"/>
-            <ac:spMk id="4" creationId="{900A3B5E-0D88-40D3-ADEE-967AB121DC82}"/>
-          </ac:spMkLst>
-        </pc:spChg>
-        <pc:spChg chg="add mod">
-          <ac:chgData name="Neil Patrick  A. Del Gallego" userId="9fccce03-204c-489b-ae7d-5aeb7f0c6bb7" providerId="ADAL" clId="{6A1F3EF7-90F3-4287-8EFD-9DD7C6C2096F}" dt="2023-10-02T05:59:24.904" v="2705" actId="1036"/>
-          <ac:spMkLst>
-            <pc:docMk/>
-            <pc:sldMk cId="922805357" sldId="290"/>
-            <ac:spMk id="5" creationId="{FD58F786-1133-6907-8D97-E2356B7DAEEE}"/>
-          </ac:spMkLst>
-        </pc:spChg>
-        <pc:spChg chg="add mod">
-          <ac:chgData name="Neil Patrick  A. Del Gallego" userId="9fccce03-204c-489b-ae7d-5aeb7f0c6bb7" providerId="ADAL" clId="{6A1F3EF7-90F3-4287-8EFD-9DD7C6C2096F}" dt="2023-10-02T11:26:13.663" v="6958" actId="113"/>
-          <ac:spMkLst>
-            <pc:docMk/>
-            <pc:sldMk cId="922805357" sldId="290"/>
-            <ac:spMk id="6" creationId="{EFD54B37-3E74-2413-D58B-49B11E292D35}"/>
-          </ac:spMkLst>
-        </pc:spChg>
-        <pc:picChg chg="add mod">
-          <ac:chgData name="Neil Patrick  A. Del Gallego" userId="9fccce03-204c-489b-ae7d-5aeb7f0c6bb7" providerId="ADAL" clId="{6A1F3EF7-90F3-4287-8EFD-9DD7C6C2096F}" dt="2023-10-02T05:59:24.904" v="2705" actId="1036"/>
-          <ac:picMkLst>
-            <pc:docMk/>
-            <pc:sldMk cId="922805357" sldId="290"/>
-            <ac:picMk id="8" creationId="{AD60B429-1C0E-F6DA-9D2B-0D328F2FA7EE}"/>
-          </ac:picMkLst>
-        </pc:picChg>
-        <pc:picChg chg="add del mod">
-          <ac:chgData name="Neil Patrick  A. Del Gallego" userId="9fccce03-204c-489b-ae7d-5aeb7f0c6bb7" providerId="ADAL" clId="{6A1F3EF7-90F3-4287-8EFD-9DD7C6C2096F}" dt="2023-10-02T05:43:37.852" v="2340" actId="478"/>
-          <ac:picMkLst>
-            <pc:docMk/>
-            <pc:sldMk cId="922805357" sldId="290"/>
-            <ac:picMk id="10" creationId="{EA9FE73B-31DE-DCED-0240-A8A8CB47BA5B}"/>
-          </ac:picMkLst>
-        </pc:picChg>
-        <pc:picChg chg="add mod">
-          <ac:chgData name="Neil Patrick  A. Del Gallego" userId="9fccce03-204c-489b-ae7d-5aeb7f0c6bb7" providerId="ADAL" clId="{6A1F3EF7-90F3-4287-8EFD-9DD7C6C2096F}" dt="2023-10-02T05:59:24.904" v="2705" actId="1036"/>
-          <ac:picMkLst>
-            <pc:docMk/>
-            <pc:sldMk cId="922805357" sldId="290"/>
-            <ac:picMk id="12" creationId="{8AD0ABEB-B31B-FAC9-A0AB-D8311B3CF5E8}"/>
-          </ac:picMkLst>
-        </pc:picChg>
-        <pc:picChg chg="add mod">
-          <ac:chgData name="Neil Patrick  A. Del Gallego" userId="9fccce03-204c-489b-ae7d-5aeb7f0c6bb7" providerId="ADAL" clId="{6A1F3EF7-90F3-4287-8EFD-9DD7C6C2096F}" dt="2023-10-02T05:59:24.904" v="2705" actId="1036"/>
-          <ac:picMkLst>
-            <pc:docMk/>
-            <pc:sldMk cId="922805357" sldId="290"/>
-            <ac:picMk id="14" creationId="{FC5B813F-BC63-821C-39A9-A819B861E9EA}"/>
-          </ac:picMkLst>
-        </pc:picChg>
-        <pc:picChg chg="mod">
-          <ac:chgData name="Neil Patrick  A. Del Gallego" userId="9fccce03-204c-489b-ae7d-5aeb7f0c6bb7" providerId="ADAL" clId="{6A1F3EF7-90F3-4287-8EFD-9DD7C6C2096F}" dt="2023-10-02T05:41:17.649" v="2329" actId="1076"/>
-          <ac:picMkLst>
-            <pc:docMk/>
-            <pc:sldMk cId="922805357" sldId="290"/>
-            <ac:picMk id="3074" creationId="{08E1C284-E5F3-6105-019E-ED33F3A2FDB6}"/>
-          </ac:picMkLst>
-        </pc:picChg>
-      </pc:sldChg>
-      <pc:sldChg chg="modSp add del mod ord modAnim">
-        <pc:chgData name="Neil Patrick  A. Del Gallego" userId="9fccce03-204c-489b-ae7d-5aeb7f0c6bb7" providerId="ADAL" clId="{6A1F3EF7-90F3-4287-8EFD-9DD7C6C2096F}" dt="2023-10-02T05:59:32.365" v="2730" actId="1036"/>
-        <pc:sldMkLst>
-          <pc:docMk/>
-          <pc:sldMk cId="392016377" sldId="291"/>
-        </pc:sldMkLst>
-        <pc:spChg chg="mod">
-          <ac:chgData name="Neil Patrick  A. Del Gallego" userId="9fccce03-204c-489b-ae7d-5aeb7f0c6bb7" providerId="ADAL" clId="{6A1F3EF7-90F3-4287-8EFD-9DD7C6C2096F}" dt="2023-10-02T05:56:23.415" v="2635"/>
-          <ac:spMkLst>
-            <pc:docMk/>
-            <pc:sldMk cId="392016377" sldId="291"/>
-            <ac:spMk id="2" creationId="{D0FAFE88-3BB3-4A37-8738-A7A760A9234D}"/>
-          </ac:spMkLst>
-        </pc:spChg>
-        <pc:spChg chg="mod">
-          <ac:chgData name="Neil Patrick  A. Del Gallego" userId="9fccce03-204c-489b-ae7d-5aeb7f0c6bb7" providerId="ADAL" clId="{6A1F3EF7-90F3-4287-8EFD-9DD7C6C2096F}" dt="2023-10-02T05:56:23.415" v="2635"/>
-          <ac:spMkLst>
-            <pc:docMk/>
-            <pc:sldMk cId="392016377" sldId="291"/>
-            <ac:spMk id="4" creationId="{900A3B5E-0D88-40D3-ADEE-967AB121DC82}"/>
-          </ac:spMkLst>
-        </pc:spChg>
-        <pc:graphicFrameChg chg="mod modGraphic">
-          <ac:chgData name="Neil Patrick  A. Del Gallego" userId="9fccce03-204c-489b-ae7d-5aeb7f0c6bb7" providerId="ADAL" clId="{6A1F3EF7-90F3-4287-8EFD-9DD7C6C2096F}" dt="2023-10-02T05:59:32.365" v="2730" actId="1036"/>
-          <ac:graphicFrameMkLst>
-            <pc:docMk/>
-            <pc:sldMk cId="392016377" sldId="291"/>
-            <ac:graphicFrameMk id="3" creationId="{7901E4F3-CD06-AEE0-0E62-3B6647C77351}"/>
-          </ac:graphicFrameMkLst>
-        </pc:graphicFrameChg>
-        <pc:picChg chg="mod">
-          <ac:chgData name="Neil Patrick  A. Del Gallego" userId="9fccce03-204c-489b-ae7d-5aeb7f0c6bb7" providerId="ADAL" clId="{6A1F3EF7-90F3-4287-8EFD-9DD7C6C2096F}" dt="2023-10-02T05:59:32.365" v="2730" actId="1036"/>
-          <ac:picMkLst>
-            <pc:docMk/>
-            <pc:sldMk cId="392016377" sldId="291"/>
-            <ac:picMk id="4098" creationId="{3EFD3EC0-EF05-2EE0-059C-A1124C087EF3}"/>
-          </ac:picMkLst>
-        </pc:picChg>
-        <pc:picChg chg="mod">
-          <ac:chgData name="Neil Patrick  A. Del Gallego" userId="9fccce03-204c-489b-ae7d-5aeb7f0c6bb7" providerId="ADAL" clId="{6A1F3EF7-90F3-4287-8EFD-9DD7C6C2096F}" dt="2023-10-02T05:59:32.365" v="2730" actId="1036"/>
-          <ac:picMkLst>
-            <pc:docMk/>
-            <pc:sldMk cId="392016377" sldId="291"/>
-            <ac:picMk id="4100" creationId="{31696C5B-E21C-78B8-CB86-B5493D160939}"/>
-          </ac:picMkLst>
-        </pc:picChg>
-      </pc:sldChg>
-      <pc:sldChg chg="modSp del mod">
-        <pc:chgData name="Neil Patrick  A. Del Gallego" userId="9fccce03-204c-489b-ae7d-5aeb7f0c6bb7" providerId="ADAL" clId="{6A1F3EF7-90F3-4287-8EFD-9DD7C6C2096F}" dt="2023-10-02T06:33:49.695" v="4325" actId="47"/>
-        <pc:sldMkLst>
-          <pc:docMk/>
-          <pc:sldMk cId="439602531" sldId="292"/>
-        </pc:sldMkLst>
-        <pc:spChg chg="mod">
-          <ac:chgData name="Neil Patrick  A. Del Gallego" userId="9fccce03-204c-489b-ae7d-5aeb7f0c6bb7" providerId="ADAL" clId="{6A1F3EF7-90F3-4287-8EFD-9DD7C6C2096F}" dt="2023-10-02T05:56:23.415" v="2635"/>
-          <ac:spMkLst>
-            <pc:docMk/>
-            <pc:sldMk cId="439602531" sldId="292"/>
-            <ac:spMk id="2" creationId="{D0FAFE88-3BB3-4A37-8738-A7A760A9234D}"/>
-          </ac:spMkLst>
-        </pc:spChg>
-        <pc:spChg chg="mod">
-          <ac:chgData name="Neil Patrick  A. Del Gallego" userId="9fccce03-204c-489b-ae7d-5aeb7f0c6bb7" providerId="ADAL" clId="{6A1F3EF7-90F3-4287-8EFD-9DD7C6C2096F}" dt="2023-10-02T05:56:23.415" v="2635"/>
-          <ac:spMkLst>
-            <pc:docMk/>
-            <pc:sldMk cId="439602531" sldId="292"/>
-            <ac:spMk id="4" creationId="{900A3B5E-0D88-40D3-ADEE-967AB121DC82}"/>
-          </ac:spMkLst>
-        </pc:spChg>
-      </pc:sldChg>
-      <pc:sldChg chg="addSp modSp mod modAnim">
-        <pc:chgData name="Neil Patrick  A. Del Gallego" userId="9fccce03-204c-489b-ae7d-5aeb7f0c6bb7" providerId="ADAL" clId="{6A1F3EF7-90F3-4287-8EFD-9DD7C6C2096F}" dt="2023-10-02T06:39:18.906" v="4630" actId="14100"/>
-        <pc:sldMkLst>
-          <pc:docMk/>
-          <pc:sldMk cId="3058687720" sldId="293"/>
-        </pc:sldMkLst>
-        <pc:spChg chg="mod">
-          <ac:chgData name="Neil Patrick  A. Del Gallego" userId="9fccce03-204c-489b-ae7d-5aeb7f0c6bb7" providerId="ADAL" clId="{6A1F3EF7-90F3-4287-8EFD-9DD7C6C2096F}" dt="2023-10-02T06:39:18.906" v="4630" actId="14100"/>
-          <ac:spMkLst>
-            <pc:docMk/>
-            <pc:sldMk cId="3058687720" sldId="293"/>
-            <ac:spMk id="2" creationId="{D0FAFE88-3BB3-4A37-8738-A7A760A9234D}"/>
-          </ac:spMkLst>
-        </pc:spChg>
-        <pc:spChg chg="add mod">
-          <ac:chgData name="Neil Patrick  A. Del Gallego" userId="9fccce03-204c-489b-ae7d-5aeb7f0c6bb7" providerId="ADAL" clId="{6A1F3EF7-90F3-4287-8EFD-9DD7C6C2096F}" dt="2023-10-02T06:38:49.980" v="4622" actId="14100"/>
-          <ac:spMkLst>
-            <pc:docMk/>
-            <pc:sldMk cId="3058687720" sldId="293"/>
-            <ac:spMk id="3" creationId="{A4A1AB07-D9C1-58F6-9B2A-6F3605B18E86}"/>
-          </ac:spMkLst>
-        </pc:spChg>
-        <pc:spChg chg="mod">
-          <ac:chgData name="Neil Patrick  A. Del Gallego" userId="9fccce03-204c-489b-ae7d-5aeb7f0c6bb7" providerId="ADAL" clId="{6A1F3EF7-90F3-4287-8EFD-9DD7C6C2096F}" dt="2023-10-02T06:37:35.210" v="4578" actId="6549"/>
-          <ac:spMkLst>
-            <pc:docMk/>
-            <pc:sldMk cId="3058687720" sldId="293"/>
-            <ac:spMk id="4" creationId="{900A3B5E-0D88-40D3-ADEE-967AB121DC82}"/>
-          </ac:spMkLst>
-        </pc:spChg>
-        <pc:spChg chg="add mod">
-          <ac:chgData name="Neil Patrick  A. Del Gallego" userId="9fccce03-204c-489b-ae7d-5aeb7f0c6bb7" providerId="ADAL" clId="{6A1F3EF7-90F3-4287-8EFD-9DD7C6C2096F}" dt="2023-10-02T06:38:52.780" v="4623" actId="1076"/>
-          <ac:spMkLst>
-            <pc:docMk/>
-            <pc:sldMk cId="3058687720" sldId="293"/>
-            <ac:spMk id="5" creationId="{381400F5-D9BA-00D9-B3D7-4FF9A2E240AA}"/>
-          </ac:spMkLst>
-        </pc:spChg>
-        <pc:spChg chg="add mod">
-          <ac:chgData name="Neil Patrick  A. Del Gallego" userId="9fccce03-204c-489b-ae7d-5aeb7f0c6bb7" providerId="ADAL" clId="{6A1F3EF7-90F3-4287-8EFD-9DD7C6C2096F}" dt="2023-10-02T06:38:55.109" v="4624" actId="1076"/>
-          <ac:spMkLst>
-            <pc:docMk/>
-            <pc:sldMk cId="3058687720" sldId="293"/>
-            <ac:spMk id="6" creationId="{BBBEE9B8-8A4D-CBBD-B10B-CDDC28182C70}"/>
-          </ac:spMkLst>
-        </pc:spChg>
-        <pc:spChg chg="add mod">
-          <ac:chgData name="Neil Patrick  A. Del Gallego" userId="9fccce03-204c-489b-ae7d-5aeb7f0c6bb7" providerId="ADAL" clId="{6A1F3EF7-90F3-4287-8EFD-9DD7C6C2096F}" dt="2023-10-02T06:39:05.162" v="4627" actId="13822"/>
-          <ac:spMkLst>
-            <pc:docMk/>
-            <pc:sldMk cId="3058687720" sldId="293"/>
-            <ac:spMk id="7" creationId="{3319F67C-81E9-79EE-354F-603BFD99E909}"/>
-          </ac:spMkLst>
-        </pc:spChg>
-        <pc:spChg chg="add mod">
-          <ac:chgData name="Neil Patrick  A. Del Gallego" userId="9fccce03-204c-489b-ae7d-5aeb7f0c6bb7" providerId="ADAL" clId="{6A1F3EF7-90F3-4287-8EFD-9DD7C6C2096F}" dt="2023-10-02T06:39:09.324" v="4629" actId="1076"/>
-          <ac:spMkLst>
-            <pc:docMk/>
-            <pc:sldMk cId="3058687720" sldId="293"/>
-            <ac:spMk id="8" creationId="{3AB8F22E-19F3-3E02-2A9B-B3D7B1CEC598}"/>
-          </ac:spMkLst>
-        </pc:spChg>
-      </pc:sldChg>
-      <pc:sldChg chg="addSp delSp modSp mod modAnim">
-        <pc:chgData name="Neil Patrick  A. Del Gallego" userId="9fccce03-204c-489b-ae7d-5aeb7f0c6bb7" providerId="ADAL" clId="{6A1F3EF7-90F3-4287-8EFD-9DD7C6C2096F}" dt="2023-10-02T11:56:12.100" v="7632" actId="20577"/>
-        <pc:sldMkLst>
-          <pc:docMk/>
-          <pc:sldMk cId="3918923197" sldId="294"/>
-        </pc:sldMkLst>
-        <pc:spChg chg="mod">
-          <ac:chgData name="Neil Patrick  A. Del Gallego" userId="9fccce03-204c-489b-ae7d-5aeb7f0c6bb7" providerId="ADAL" clId="{6A1F3EF7-90F3-4287-8EFD-9DD7C6C2096F}" dt="2023-10-02T11:56:12.100" v="7632" actId="20577"/>
-          <ac:spMkLst>
-            <pc:docMk/>
-            <pc:sldMk cId="3918923197" sldId="294"/>
-            <ac:spMk id="2" creationId="{D0FAFE88-3BB3-4A37-8738-A7A760A9234D}"/>
-          </ac:spMkLst>
-        </pc:spChg>
-        <pc:spChg chg="mod">
-          <ac:chgData name="Neil Patrick  A. Del Gallego" userId="9fccce03-204c-489b-ae7d-5aeb7f0c6bb7" providerId="ADAL" clId="{6A1F3EF7-90F3-4287-8EFD-9DD7C6C2096F}" dt="2023-10-02T06:27:41.427" v="4074" actId="20577"/>
-          <ac:spMkLst>
-            <pc:docMk/>
-            <pc:sldMk cId="3918923197" sldId="294"/>
-            <ac:spMk id="3" creationId="{5F9A190F-0DF1-4278-4358-645DD4AEF39D}"/>
-          </ac:spMkLst>
-        </pc:spChg>
-        <pc:spChg chg="mod topLvl">
-          <ac:chgData name="Neil Patrick  A. Del Gallego" userId="9fccce03-204c-489b-ae7d-5aeb7f0c6bb7" providerId="ADAL" clId="{6A1F3EF7-90F3-4287-8EFD-9DD7C6C2096F}" dt="2023-10-02T06:28:13.352" v="4091" actId="20577"/>
-          <ac:spMkLst>
-            <pc:docMk/>
-            <pc:sldMk cId="3918923197" sldId="294"/>
-            <ac:spMk id="5" creationId="{B627F1C3-DEB1-AB20-3FDB-4C265CC1C62D}"/>
-          </ac:spMkLst>
-        </pc:spChg>
-        <pc:spChg chg="add del">
-          <ac:chgData name="Neil Patrick  A. Del Gallego" userId="9fccce03-204c-489b-ae7d-5aeb7f0c6bb7" providerId="ADAL" clId="{6A1F3EF7-90F3-4287-8EFD-9DD7C6C2096F}" dt="2023-10-02T06:27:46.623" v="4076" actId="22"/>
-          <ac:spMkLst>
-            <pc:docMk/>
-            <pc:sldMk cId="3918923197" sldId="294"/>
-            <ac:spMk id="6" creationId="{1851BCF3-FEFB-AD5B-ECDE-F45590121494}"/>
-          </ac:spMkLst>
-        </pc:spChg>
-        <pc:spChg chg="add mod">
-          <ac:chgData name="Neil Patrick  A. Del Gallego" userId="9fccce03-204c-489b-ae7d-5aeb7f0c6bb7" providerId="ADAL" clId="{6A1F3EF7-90F3-4287-8EFD-9DD7C6C2096F}" dt="2023-10-02T06:29:11.426" v="4149" actId="20577"/>
-          <ac:spMkLst>
-            <pc:docMk/>
-            <pc:sldMk cId="3918923197" sldId="294"/>
-            <ac:spMk id="13" creationId="{BDB982B1-6E4D-B0BE-091D-1C97FE5A5906}"/>
-          </ac:spMkLst>
-        </pc:spChg>
-        <pc:grpChg chg="del mod">
-          <ac:chgData name="Neil Patrick  A. Del Gallego" userId="9fccce03-204c-489b-ae7d-5aeb7f0c6bb7" providerId="ADAL" clId="{6A1F3EF7-90F3-4287-8EFD-9DD7C6C2096F}" dt="2023-10-02T06:28:02.584" v="4081" actId="165"/>
-          <ac:grpSpMkLst>
-            <pc:docMk/>
-            <pc:sldMk cId="3918923197" sldId="294"/>
-            <ac:grpSpMk id="9" creationId="{C542D764-2BEA-6CF8-B9EF-CFCF5E5B66E6}"/>
-          </ac:grpSpMkLst>
-        </pc:grpChg>
-        <pc:picChg chg="mod topLvl">
-          <ac:chgData name="Neil Patrick  A. Del Gallego" userId="9fccce03-204c-489b-ae7d-5aeb7f0c6bb7" providerId="ADAL" clId="{6A1F3EF7-90F3-4287-8EFD-9DD7C6C2096F}" dt="2023-10-02T06:28:30.057" v="4101" actId="1076"/>
-          <ac:picMkLst>
-            <pc:docMk/>
-            <pc:sldMk cId="3918923197" sldId="294"/>
-            <ac:picMk id="7" creationId="{AC340BD2-DD45-600D-1087-D3A380B3B5BD}"/>
-          </ac:picMkLst>
-        </pc:picChg>
-        <pc:picChg chg="add mod">
-          <ac:chgData name="Neil Patrick  A. Del Gallego" userId="9fccce03-204c-489b-ae7d-5aeb7f0c6bb7" providerId="ADAL" clId="{6A1F3EF7-90F3-4287-8EFD-9DD7C6C2096F}" dt="2023-10-02T06:28:27.350" v="4100" actId="1440"/>
-          <ac:picMkLst>
-            <pc:docMk/>
-            <pc:sldMk cId="3918923197" sldId="294"/>
-            <ac:picMk id="11" creationId="{101A3199-381A-958B-A1C5-58490D5AAE59}"/>
-          </ac:picMkLst>
-        </pc:picChg>
-      </pc:sldChg>
-      <pc:sldChg chg="modSp mod">
-        <pc:chgData name="Neil Patrick  A. Del Gallego" userId="9fccce03-204c-489b-ae7d-5aeb7f0c6bb7" providerId="ADAL" clId="{6A1F3EF7-90F3-4287-8EFD-9DD7C6C2096F}" dt="2023-10-02T06:39:26.127" v="4632" actId="14100"/>
-        <pc:sldMkLst>
-          <pc:docMk/>
-          <pc:sldMk cId="916308430" sldId="295"/>
-        </pc:sldMkLst>
-        <pc:spChg chg="mod">
-          <ac:chgData name="Neil Patrick  A. Del Gallego" userId="9fccce03-204c-489b-ae7d-5aeb7f0c6bb7" providerId="ADAL" clId="{6A1F3EF7-90F3-4287-8EFD-9DD7C6C2096F}" dt="2023-10-02T06:39:23.938" v="4631" actId="14100"/>
-          <ac:spMkLst>
-            <pc:docMk/>
-            <pc:sldMk cId="916308430" sldId="295"/>
-            <ac:spMk id="2" creationId="{D0FAFE88-3BB3-4A37-8738-A7A760A9234D}"/>
-          </ac:spMkLst>
-        </pc:spChg>
-        <pc:spChg chg="mod">
-          <ac:chgData name="Neil Patrick  A. Del Gallego" userId="9fccce03-204c-489b-ae7d-5aeb7f0c6bb7" providerId="ADAL" clId="{6A1F3EF7-90F3-4287-8EFD-9DD7C6C2096F}" dt="2023-10-02T06:39:26.127" v="4632" actId="14100"/>
-          <ac:spMkLst>
-            <pc:docMk/>
-            <pc:sldMk cId="916308430" sldId="295"/>
-            <ac:spMk id="4" creationId="{FEAA0364-74F4-8CFB-FD51-2ADEA47E2C36}"/>
-          </ac:spMkLst>
-        </pc:spChg>
-      </pc:sldChg>
-      <pc:sldChg chg="addSp delSp modSp mod addAnim delAnim modAnim">
-        <pc:chgData name="Neil Patrick  A. Del Gallego" userId="9fccce03-204c-489b-ae7d-5aeb7f0c6bb7" providerId="ADAL" clId="{6A1F3EF7-90F3-4287-8EFD-9DD7C6C2096F}" dt="2023-10-02T11:57:53.383" v="7731" actId="20577"/>
-        <pc:sldMkLst>
-          <pc:docMk/>
-          <pc:sldMk cId="929676779" sldId="296"/>
-        </pc:sldMkLst>
-        <pc:spChg chg="add del mod">
-          <ac:chgData name="Neil Patrick  A. Del Gallego" userId="9fccce03-204c-489b-ae7d-5aeb7f0c6bb7" providerId="ADAL" clId="{6A1F3EF7-90F3-4287-8EFD-9DD7C6C2096F}" dt="2023-10-02T06:39:44.498" v="4639" actId="14100"/>
-          <ac:spMkLst>
-            <pc:docMk/>
-            <pc:sldMk cId="929676779" sldId="296"/>
-            <ac:spMk id="2" creationId="{D0FAFE88-3BB3-4A37-8738-A7A760A9234D}"/>
-          </ac:spMkLst>
-        </pc:spChg>
-        <pc:spChg chg="add del mod">
-          <ac:chgData name="Neil Patrick  A. Del Gallego" userId="9fccce03-204c-489b-ae7d-5aeb7f0c6bb7" providerId="ADAL" clId="{6A1F3EF7-90F3-4287-8EFD-9DD7C6C2096F}" dt="2023-10-02T06:39:41.873" v="4637"/>
-          <ac:spMkLst>
-            <pc:docMk/>
-            <pc:sldMk cId="929676779" sldId="296"/>
-            <ac:spMk id="3" creationId="{52C059DB-5DD5-42DF-4B02-D75EC912A3B9}"/>
-          </ac:spMkLst>
-        </pc:spChg>
-        <pc:spChg chg="mod">
-          <ac:chgData name="Neil Patrick  A. Del Gallego" userId="9fccce03-204c-489b-ae7d-5aeb7f0c6bb7" providerId="ADAL" clId="{6A1F3EF7-90F3-4287-8EFD-9DD7C6C2096F}" dt="2023-10-02T11:57:53.383" v="7731" actId="20577"/>
-          <ac:spMkLst>
-            <pc:docMk/>
-            <pc:sldMk cId="929676779" sldId="296"/>
-            <ac:spMk id="4" creationId="{FEAA0364-74F4-8CFB-FD51-2ADEA47E2C36}"/>
-          </ac:spMkLst>
-        </pc:spChg>
-        <pc:picChg chg="add mod">
-          <ac:chgData name="Neil Patrick  A. Del Gallego" userId="9fccce03-204c-489b-ae7d-5aeb7f0c6bb7" providerId="ADAL" clId="{6A1F3EF7-90F3-4287-8EFD-9DD7C6C2096F}" dt="2023-10-02T10:54:59.618" v="4912"/>
-          <ac:picMkLst>
-            <pc:docMk/>
-            <pc:sldMk cId="929676779" sldId="296"/>
-            <ac:picMk id="1026" creationId="{3B85D893-2430-A229-732E-35105FBAF035}"/>
-          </ac:picMkLst>
-        </pc:picChg>
-        <pc:picChg chg="del">
-          <ac:chgData name="Neil Patrick  A. Del Gallego" userId="9fccce03-204c-489b-ae7d-5aeb7f0c6bb7" providerId="ADAL" clId="{6A1F3EF7-90F3-4287-8EFD-9DD7C6C2096F}" dt="2023-10-02T10:54:46.105" v="4907" actId="478"/>
-          <ac:picMkLst>
-            <pc:docMk/>
-            <pc:sldMk cId="929676779" sldId="296"/>
-            <ac:picMk id="8194" creationId="{807721BB-E8D9-0CFA-3563-19E5D385A6DE}"/>
-          </ac:picMkLst>
-        </pc:picChg>
-      </pc:sldChg>
-      <pc:sldChg chg="modSp mod">
-        <pc:chgData name="Neil Patrick  A. Del Gallego" userId="9fccce03-204c-489b-ae7d-5aeb7f0c6bb7" providerId="ADAL" clId="{6A1F3EF7-90F3-4287-8EFD-9DD7C6C2096F}" dt="2023-10-02T11:02:57.034" v="5201" actId="1076"/>
-        <pc:sldMkLst>
-          <pc:docMk/>
-          <pc:sldMk cId="1111371222" sldId="297"/>
-        </pc:sldMkLst>
-        <pc:spChg chg="mod">
-          <ac:chgData name="Neil Patrick  A. Del Gallego" userId="9fccce03-204c-489b-ae7d-5aeb7f0c6bb7" providerId="ADAL" clId="{6A1F3EF7-90F3-4287-8EFD-9DD7C6C2096F}" dt="2023-10-02T06:39:51.717" v="4641" actId="14100"/>
-          <ac:spMkLst>
-            <pc:docMk/>
-            <pc:sldMk cId="1111371222" sldId="297"/>
-            <ac:spMk id="2" creationId="{D0FAFE88-3BB3-4A37-8738-A7A760A9234D}"/>
-          </ac:spMkLst>
-        </pc:spChg>
-        <pc:picChg chg="mod">
-          <ac:chgData name="Neil Patrick  A. Del Gallego" userId="9fccce03-204c-489b-ae7d-5aeb7f0c6bb7" providerId="ADAL" clId="{6A1F3EF7-90F3-4287-8EFD-9DD7C6C2096F}" dt="2023-10-02T11:02:57.034" v="5201" actId="1076"/>
-          <ac:picMkLst>
-            <pc:docMk/>
-            <pc:sldMk cId="1111371222" sldId="297"/>
-            <ac:picMk id="9218" creationId="{46445AF5-099E-04CB-B5D6-736215B80049}"/>
-          </ac:picMkLst>
-        </pc:picChg>
-      </pc:sldChg>
-      <pc:sldChg chg="addSp delSp modSp mod modAnim">
-        <pc:chgData name="Neil Patrick  A. Del Gallego" userId="9fccce03-204c-489b-ae7d-5aeb7f0c6bb7" providerId="ADAL" clId="{6A1F3EF7-90F3-4287-8EFD-9DD7C6C2096F}" dt="2023-10-02T11:58:15.413" v="7773" actId="20577"/>
-        <pc:sldMkLst>
-          <pc:docMk/>
-          <pc:sldMk cId="626469240" sldId="298"/>
-        </pc:sldMkLst>
-        <pc:spChg chg="mod">
-          <ac:chgData name="Neil Patrick  A. Del Gallego" userId="9fccce03-204c-489b-ae7d-5aeb7f0c6bb7" providerId="ADAL" clId="{6A1F3EF7-90F3-4287-8EFD-9DD7C6C2096F}" dt="2023-10-02T11:58:08.466" v="7767" actId="20577"/>
-          <ac:spMkLst>
-            <pc:docMk/>
-            <pc:sldMk cId="626469240" sldId="298"/>
-            <ac:spMk id="2" creationId="{D0FAFE88-3BB3-4A37-8738-A7A760A9234D}"/>
-          </ac:spMkLst>
-        </pc:spChg>
-        <pc:spChg chg="mod">
-          <ac:chgData name="Neil Patrick  A. Del Gallego" userId="9fccce03-204c-489b-ae7d-5aeb7f0c6bb7" providerId="ADAL" clId="{6A1F3EF7-90F3-4287-8EFD-9DD7C6C2096F}" dt="2023-10-02T11:58:15.413" v="7773" actId="20577"/>
-          <ac:spMkLst>
-            <pc:docMk/>
-            <pc:sldMk cId="626469240" sldId="298"/>
-            <ac:spMk id="4" creationId="{FEAA0364-74F4-8CFB-FD51-2ADEA47E2C36}"/>
-          </ac:spMkLst>
-        </pc:spChg>
-        <pc:picChg chg="add mod">
-          <ac:chgData name="Neil Patrick  A. Del Gallego" userId="9fccce03-204c-489b-ae7d-5aeb7f0c6bb7" providerId="ADAL" clId="{6A1F3EF7-90F3-4287-8EFD-9DD7C6C2096F}" dt="2023-10-02T10:55:24.237" v="4919"/>
-          <ac:picMkLst>
-            <pc:docMk/>
-            <pc:sldMk cId="626469240" sldId="298"/>
-            <ac:picMk id="2050" creationId="{5F3FCF1E-35E7-E667-C488-6A881CD9B83D}"/>
-          </ac:picMkLst>
-        </pc:picChg>
-        <pc:picChg chg="del">
-          <ac:chgData name="Neil Patrick  A. Del Gallego" userId="9fccce03-204c-489b-ae7d-5aeb7f0c6bb7" providerId="ADAL" clId="{6A1F3EF7-90F3-4287-8EFD-9DD7C6C2096F}" dt="2023-10-02T10:55:09.775" v="4913" actId="478"/>
-          <ac:picMkLst>
-            <pc:docMk/>
-            <pc:sldMk cId="626469240" sldId="298"/>
-            <ac:picMk id="8194" creationId="{807721BB-E8D9-0CFA-3563-19E5D385A6DE}"/>
-          </ac:picMkLst>
-        </pc:picChg>
-      </pc:sldChg>
-      <pc:sldChg chg="modSp add mod">
-        <pc:chgData name="Neil Patrick  A. Del Gallego" userId="9fccce03-204c-489b-ae7d-5aeb7f0c6bb7" providerId="ADAL" clId="{6A1F3EF7-90F3-4287-8EFD-9DD7C6C2096F}" dt="2023-10-02T10:51:45.309" v="4828" actId="20577"/>
-        <pc:sldMkLst>
-          <pc:docMk/>
-          <pc:sldMk cId="4118828501" sldId="333"/>
-        </pc:sldMkLst>
-        <pc:spChg chg="mod">
-          <ac:chgData name="Neil Patrick  A. Del Gallego" userId="9fccce03-204c-489b-ae7d-5aeb7f0c6bb7" providerId="ADAL" clId="{6A1F3EF7-90F3-4287-8EFD-9DD7C6C2096F}" dt="2023-10-02T10:51:45.309" v="4828" actId="20577"/>
-          <ac:spMkLst>
-            <pc:docMk/>
-            <pc:sldMk cId="4118828501" sldId="333"/>
-            <ac:spMk id="2" creationId="{EAB58FA5-56DF-488A-8C7B-3BA9928CB70A}"/>
-          </ac:spMkLst>
-        </pc:spChg>
-        <pc:spChg chg="mod">
-          <ac:chgData name="Neil Patrick  A. Del Gallego" userId="9fccce03-204c-489b-ae7d-5aeb7f0c6bb7" providerId="ADAL" clId="{6A1F3EF7-90F3-4287-8EFD-9DD7C6C2096F}" dt="2023-10-02T05:56:23.415" v="2635"/>
-          <ac:spMkLst>
-            <pc:docMk/>
-            <pc:sldMk cId="4118828501" sldId="333"/>
-            <ac:spMk id="3" creationId="{083D152D-EE32-4FBD-BDFF-77739058368C}"/>
-          </ac:spMkLst>
-        </pc:spChg>
-        <pc:spChg chg="mod">
-          <ac:chgData name="Neil Patrick  A. Del Gallego" userId="9fccce03-204c-489b-ae7d-5aeb7f0c6bb7" providerId="ADAL" clId="{6A1F3EF7-90F3-4287-8EFD-9DD7C6C2096F}" dt="2023-10-02T05:56:23.415" v="2635"/>
-          <ac:spMkLst>
-            <pc:docMk/>
-            <pc:sldMk cId="4118828501" sldId="333"/>
-            <ac:spMk id="4" creationId="{B1E7BA67-FBEF-443D-ACC5-A4374AFC99F6}"/>
-          </ac:spMkLst>
-        </pc:spChg>
-        <pc:spChg chg="mod">
-          <ac:chgData name="Neil Patrick  A. Del Gallego" userId="9fccce03-204c-489b-ae7d-5aeb7f0c6bb7" providerId="ADAL" clId="{6A1F3EF7-90F3-4287-8EFD-9DD7C6C2096F}" dt="2023-10-02T05:15:00.395" v="392" actId="1076"/>
-          <ac:spMkLst>
-            <pc:docMk/>
-            <pc:sldMk cId="4118828501" sldId="333"/>
-            <ac:spMk id="14" creationId="{04464470-BCA6-4F7E-BACD-100E129C7C03}"/>
-          </ac:spMkLst>
-        </pc:spChg>
-        <pc:picChg chg="mod">
-          <ac:chgData name="Neil Patrick  A. Del Gallego" userId="9fccce03-204c-489b-ae7d-5aeb7f0c6bb7" providerId="ADAL" clId="{6A1F3EF7-90F3-4287-8EFD-9DD7C6C2096F}" dt="2023-10-02T05:15:00.395" v="392" actId="1076"/>
-          <ac:picMkLst>
-            <pc:docMk/>
-            <pc:sldMk cId="4118828501" sldId="333"/>
-            <ac:picMk id="10" creationId="{DDEBDD60-434F-4D43-AD7B-841CD5414140}"/>
-          </ac:picMkLst>
-        </pc:picChg>
-        <pc:picChg chg="mod">
-          <ac:chgData name="Neil Patrick  A. Del Gallego" userId="9fccce03-204c-489b-ae7d-5aeb7f0c6bb7" providerId="ADAL" clId="{6A1F3EF7-90F3-4287-8EFD-9DD7C6C2096F}" dt="2023-10-02T05:15:00.395" v="392" actId="1076"/>
-          <ac:picMkLst>
-            <pc:docMk/>
-            <pc:sldMk cId="4118828501" sldId="333"/>
-            <ac:picMk id="11" creationId="{EF591614-2E46-4088-B008-3EA33E4172C6}"/>
-          </ac:picMkLst>
-        </pc:picChg>
-        <pc:picChg chg="mod">
-          <ac:chgData name="Neil Patrick  A. Del Gallego" userId="9fccce03-204c-489b-ae7d-5aeb7f0c6bb7" providerId="ADAL" clId="{6A1F3EF7-90F3-4287-8EFD-9DD7C6C2096F}" dt="2023-10-02T05:15:00.395" v="392" actId="1076"/>
-          <ac:picMkLst>
-            <pc:docMk/>
-            <pc:sldMk cId="4118828501" sldId="333"/>
-            <ac:picMk id="12" creationId="{0F53A3BF-B3C7-4E7A-A334-43ACC2258B99}"/>
-          </ac:picMkLst>
-        </pc:picChg>
-        <pc:picChg chg="mod">
-          <ac:chgData name="Neil Patrick  A. Del Gallego" userId="9fccce03-204c-489b-ae7d-5aeb7f0c6bb7" providerId="ADAL" clId="{6A1F3EF7-90F3-4287-8EFD-9DD7C6C2096F}" dt="2023-10-02T05:15:00.395" v="392" actId="1076"/>
-          <ac:picMkLst>
-            <pc:docMk/>
-            <pc:sldMk cId="4118828501" sldId="333"/>
-            <ac:picMk id="13" creationId="{EBED7351-EFF4-4150-8F7B-C83570AFC573}"/>
-          </ac:picMkLst>
-        </pc:picChg>
-        <pc:picChg chg="mod">
-          <ac:chgData name="Neil Patrick  A. Del Gallego" userId="9fccce03-204c-489b-ae7d-5aeb7f0c6bb7" providerId="ADAL" clId="{6A1F3EF7-90F3-4287-8EFD-9DD7C6C2096F}" dt="2023-10-02T05:15:00.395" v="392" actId="1076"/>
-          <ac:picMkLst>
-            <pc:docMk/>
-            <pc:sldMk cId="4118828501" sldId="333"/>
-            <ac:picMk id="3074" creationId="{E3D6A0F4-7EEA-49FC-81E7-51D8C1503D2F}"/>
-          </ac:picMkLst>
-        </pc:picChg>
-        <pc:picChg chg="mod">
-          <ac:chgData name="Neil Patrick  A. Del Gallego" userId="9fccce03-204c-489b-ae7d-5aeb7f0c6bb7" providerId="ADAL" clId="{6A1F3EF7-90F3-4287-8EFD-9DD7C6C2096F}" dt="2023-10-02T05:15:00.395" v="392" actId="1076"/>
-          <ac:picMkLst>
-            <pc:docMk/>
-            <pc:sldMk cId="4118828501" sldId="333"/>
-            <ac:picMk id="4098" creationId="{0A73181D-5E43-4ACC-AB49-4E776DEF3840}"/>
-          </ac:picMkLst>
-        </pc:picChg>
-        <pc:picChg chg="mod">
-          <ac:chgData name="Neil Patrick  A. Del Gallego" userId="9fccce03-204c-489b-ae7d-5aeb7f0c6bb7" providerId="ADAL" clId="{6A1F3EF7-90F3-4287-8EFD-9DD7C6C2096F}" dt="2023-10-02T05:15:00.395" v="392" actId="1076"/>
-          <ac:picMkLst>
-            <pc:docMk/>
-            <pc:sldMk cId="4118828501" sldId="333"/>
-            <ac:picMk id="5122" creationId="{AE5A29C7-6454-4791-9751-CD7A91388AC4}"/>
-          </ac:picMkLst>
-        </pc:picChg>
-        <pc:picChg chg="mod">
-          <ac:chgData name="Neil Patrick  A. Del Gallego" userId="9fccce03-204c-489b-ae7d-5aeb7f0c6bb7" providerId="ADAL" clId="{6A1F3EF7-90F3-4287-8EFD-9DD7C6C2096F}" dt="2023-10-02T05:15:00.395" v="392" actId="1076"/>
-          <ac:picMkLst>
-            <pc:docMk/>
-            <pc:sldMk cId="4118828501" sldId="333"/>
-            <ac:picMk id="6146" creationId="{34AD715F-5B55-446B-9D84-453205ECD6F1}"/>
-          </ac:picMkLst>
-        </pc:picChg>
-      </pc:sldChg>
-      <pc:sldChg chg="modSp add mod modAnim">
-        <pc:chgData name="Neil Patrick  A. Del Gallego" userId="9fccce03-204c-489b-ae7d-5aeb7f0c6bb7" providerId="ADAL" clId="{6A1F3EF7-90F3-4287-8EFD-9DD7C6C2096F}" dt="2023-10-02T11:54:37.941" v="7626"/>
-        <pc:sldMkLst>
-          <pc:docMk/>
-          <pc:sldMk cId="3776419982" sldId="334"/>
-        </pc:sldMkLst>
-        <pc:spChg chg="mod">
-          <ac:chgData name="Neil Patrick  A. Del Gallego" userId="9fccce03-204c-489b-ae7d-5aeb7f0c6bb7" providerId="ADAL" clId="{6A1F3EF7-90F3-4287-8EFD-9DD7C6C2096F}" dt="2023-10-02T05:59:37.305" v="2731" actId="14100"/>
-          <ac:spMkLst>
-            <pc:docMk/>
-            <pc:sldMk cId="3776419982" sldId="334"/>
-            <ac:spMk id="2" creationId="{D0FAFE88-3BB3-4A37-8738-A7A760A9234D}"/>
-          </ac:spMkLst>
-        </pc:spChg>
-        <pc:spChg chg="mod">
-          <ac:chgData name="Neil Patrick  A. Del Gallego" userId="9fccce03-204c-489b-ae7d-5aeb7f0c6bb7" providerId="ADAL" clId="{6A1F3EF7-90F3-4287-8EFD-9DD7C6C2096F}" dt="2023-10-02T11:54:37.941" v="7626"/>
-          <ac:spMkLst>
-            <pc:docMk/>
-            <pc:sldMk cId="3776419982" sldId="334"/>
-            <ac:spMk id="4" creationId="{900A3B5E-0D88-40D3-ADEE-967AB121DC82}"/>
-          </ac:spMkLst>
-        </pc:spChg>
-      </pc:sldChg>
-      <pc:sldChg chg="addSp delSp modSp add mod modAnim">
-        <pc:chgData name="Neil Patrick  A. Del Gallego" userId="9fccce03-204c-489b-ae7d-5aeb7f0c6bb7" providerId="ADAL" clId="{6A1F3EF7-90F3-4287-8EFD-9DD7C6C2096F}" dt="2023-10-02T11:04:37.911" v="5250" actId="1076"/>
-        <pc:sldMkLst>
-          <pc:docMk/>
-          <pc:sldMk cId="33468046" sldId="335"/>
-        </pc:sldMkLst>
-        <pc:spChg chg="mod">
-          <ac:chgData name="Neil Patrick  A. Del Gallego" userId="9fccce03-204c-489b-ae7d-5aeb7f0c6bb7" providerId="ADAL" clId="{6A1F3EF7-90F3-4287-8EFD-9DD7C6C2096F}" dt="2023-10-02T05:59:50.204" v="2733" actId="14100"/>
-          <ac:spMkLst>
-            <pc:docMk/>
-            <pc:sldMk cId="33468046" sldId="335"/>
-            <ac:spMk id="2" creationId="{D0FAFE88-3BB3-4A37-8738-A7A760A9234D}"/>
-          </ac:spMkLst>
-        </pc:spChg>
-        <pc:spChg chg="add mod">
-          <ac:chgData name="Neil Patrick  A. Del Gallego" userId="9fccce03-204c-489b-ae7d-5aeb7f0c6bb7" providerId="ADAL" clId="{6A1F3EF7-90F3-4287-8EFD-9DD7C6C2096F}" dt="2023-10-02T11:04:37.911" v="5250" actId="1076"/>
-          <ac:spMkLst>
-            <pc:docMk/>
-            <pc:sldMk cId="33468046" sldId="335"/>
-            <ac:spMk id="3" creationId="{CD266AA6-590A-3096-8706-8C90599C8B8A}"/>
-          </ac:spMkLst>
-        </pc:spChg>
-        <pc:spChg chg="mod">
-          <ac:chgData name="Neil Patrick  A. Del Gallego" userId="9fccce03-204c-489b-ae7d-5aeb7f0c6bb7" providerId="ADAL" clId="{6A1F3EF7-90F3-4287-8EFD-9DD7C6C2096F}" dt="2023-10-02T05:56:23.415" v="2635"/>
-          <ac:spMkLst>
-            <pc:docMk/>
-            <pc:sldMk cId="33468046" sldId="335"/>
-            <ac:spMk id="4" creationId="{900A3B5E-0D88-40D3-ADEE-967AB121DC82}"/>
-          </ac:spMkLst>
-        </pc:spChg>
-        <pc:picChg chg="del">
-          <ac:chgData name="Neil Patrick  A. Del Gallego" userId="9fccce03-204c-489b-ae7d-5aeb7f0c6bb7" providerId="ADAL" clId="{6A1F3EF7-90F3-4287-8EFD-9DD7C6C2096F}" dt="2023-10-02T05:47:42.292" v="2472" actId="478"/>
-          <ac:picMkLst>
-            <pc:docMk/>
-            <pc:sldMk cId="33468046" sldId="335"/>
-            <ac:picMk id="3" creationId="{AED038CA-6BAA-730B-002F-E764BE0377BF}"/>
-          </ac:picMkLst>
-        </pc:picChg>
-        <pc:picChg chg="add mod">
-          <ac:chgData name="Neil Patrick  A. Del Gallego" userId="9fccce03-204c-489b-ae7d-5aeb7f0c6bb7" providerId="ADAL" clId="{6A1F3EF7-90F3-4287-8EFD-9DD7C6C2096F}" dt="2023-10-02T05:55:05.983" v="2600" actId="1076"/>
-          <ac:picMkLst>
-            <pc:docMk/>
-            <pc:sldMk cId="33468046" sldId="335"/>
-            <ac:picMk id="5" creationId="{C3706064-6DFF-C5EE-AD6C-E8919252A042}"/>
-          </ac:picMkLst>
-        </pc:picChg>
-      </pc:sldChg>
-      <pc:sldChg chg="addSp delSp modSp add mod delAnim modAnim">
-        <pc:chgData name="Neil Patrick  A. Del Gallego" userId="9fccce03-204c-489b-ae7d-5aeb7f0c6bb7" providerId="ADAL" clId="{6A1F3EF7-90F3-4287-8EFD-9DD7C6C2096F}" dt="2023-10-02T11:04:39.222" v="5251"/>
-        <pc:sldMkLst>
-          <pc:docMk/>
-          <pc:sldMk cId="2610385816" sldId="336"/>
-        </pc:sldMkLst>
-        <pc:spChg chg="add mod">
-          <ac:chgData name="Neil Patrick  A. Del Gallego" userId="9fccce03-204c-489b-ae7d-5aeb7f0c6bb7" providerId="ADAL" clId="{6A1F3EF7-90F3-4287-8EFD-9DD7C6C2096F}" dt="2023-10-02T11:04:39.222" v="5251"/>
-          <ac:spMkLst>
-            <pc:docMk/>
-            <pc:sldMk cId="2610385816" sldId="336"/>
-            <ac:spMk id="2" creationId="{AD4F13E0-3004-1EB5-1634-C314F96DBD93}"/>
-          </ac:spMkLst>
-        </pc:spChg>
-        <pc:spChg chg="del mod">
-          <ac:chgData name="Neil Patrick  A. Del Gallego" userId="9fccce03-204c-489b-ae7d-5aeb7f0c6bb7" providerId="ADAL" clId="{6A1F3EF7-90F3-4287-8EFD-9DD7C6C2096F}" dt="2023-10-02T05:59:53.879" v="2734" actId="478"/>
-          <ac:spMkLst>
-            <pc:docMk/>
-            <pc:sldMk cId="2610385816" sldId="336"/>
-            <ac:spMk id="2" creationId="{D0FAFE88-3BB3-4A37-8738-A7A760A9234D}"/>
-          </ac:spMkLst>
-        </pc:spChg>
-        <pc:spChg chg="del mod">
-          <ac:chgData name="Neil Patrick  A. Del Gallego" userId="9fccce03-204c-489b-ae7d-5aeb7f0c6bb7" providerId="ADAL" clId="{6A1F3EF7-90F3-4287-8EFD-9DD7C6C2096F}" dt="2023-10-02T05:55:19.680" v="2605" actId="478"/>
-          <ac:spMkLst>
-            <pc:docMk/>
-            <pc:sldMk cId="2610385816" sldId="336"/>
-            <ac:spMk id="4" creationId="{900A3B5E-0D88-40D3-ADEE-967AB121DC82}"/>
-          </ac:spMkLst>
-        </pc:spChg>
-        <pc:spChg chg="add mod">
-          <ac:chgData name="Neil Patrick  A. Del Gallego" userId="9fccce03-204c-489b-ae7d-5aeb7f0c6bb7" providerId="ADAL" clId="{6A1F3EF7-90F3-4287-8EFD-9DD7C6C2096F}" dt="2023-10-02T05:59:57.518" v="2736" actId="27636"/>
-          <ac:spMkLst>
-            <pc:docMk/>
-            <pc:sldMk cId="2610385816" sldId="336"/>
-            <ac:spMk id="6" creationId="{927B199D-F263-4DB3-8F95-E7B65710254E}"/>
-          </ac:spMkLst>
-        </pc:spChg>
-        <pc:picChg chg="add mod">
-          <ac:chgData name="Neil Patrick  A. Del Gallego" userId="9fccce03-204c-489b-ae7d-5aeb7f0c6bb7" providerId="ADAL" clId="{6A1F3EF7-90F3-4287-8EFD-9DD7C6C2096F}" dt="2023-10-02T05:55:31.418" v="2610" actId="1076"/>
-          <ac:picMkLst>
-            <pc:docMk/>
-            <pc:sldMk cId="2610385816" sldId="336"/>
-            <ac:picMk id="3" creationId="{36376DBE-AE84-9CF5-5254-E014E3454728}"/>
-          </ac:picMkLst>
-        </pc:picChg>
-        <pc:picChg chg="del">
-          <ac:chgData name="Neil Patrick  A. Del Gallego" userId="9fccce03-204c-489b-ae7d-5aeb7f0c6bb7" providerId="ADAL" clId="{6A1F3EF7-90F3-4287-8EFD-9DD7C6C2096F}" dt="2023-10-02T05:55:13.270" v="2603" actId="478"/>
-          <ac:picMkLst>
-            <pc:docMk/>
-            <pc:sldMk cId="2610385816" sldId="336"/>
-            <ac:picMk id="5" creationId="{C3706064-6DFF-C5EE-AD6C-E8919252A042}"/>
-          </ac:picMkLst>
-        </pc:picChg>
-      </pc:sldChg>
-      <pc:sldChg chg="modSp add mod ord modAnim">
-        <pc:chgData name="Neil Patrick  A. Del Gallego" userId="9fccce03-204c-489b-ae7d-5aeb7f0c6bb7" providerId="ADAL" clId="{6A1F3EF7-90F3-4287-8EFD-9DD7C6C2096F}" dt="2023-10-02T11:57:32.575" v="7730" actId="20577"/>
-        <pc:sldMkLst>
-          <pc:docMk/>
-          <pc:sldMk cId="3741554735" sldId="337"/>
-        </pc:sldMkLst>
-        <pc:spChg chg="mod">
-          <ac:chgData name="Neil Patrick  A. Del Gallego" userId="9fccce03-204c-489b-ae7d-5aeb7f0c6bb7" providerId="ADAL" clId="{6A1F3EF7-90F3-4287-8EFD-9DD7C6C2096F}" dt="2023-10-02T06:39:33.529" v="4634" actId="14100"/>
-          <ac:spMkLst>
-            <pc:docMk/>
-            <pc:sldMk cId="3741554735" sldId="337"/>
-            <ac:spMk id="2" creationId="{D0FAFE88-3BB3-4A37-8738-A7A760A9234D}"/>
-          </ac:spMkLst>
-        </pc:spChg>
-        <pc:spChg chg="mod">
-          <ac:chgData name="Neil Patrick  A. Del Gallego" userId="9fccce03-204c-489b-ae7d-5aeb7f0c6bb7" providerId="ADAL" clId="{6A1F3EF7-90F3-4287-8EFD-9DD7C6C2096F}" dt="2023-10-02T11:57:31.611" v="7728" actId="20577"/>
-          <ac:spMkLst>
-            <pc:docMk/>
-            <pc:sldMk cId="3741554735" sldId="337"/>
-            <ac:spMk id="4" creationId="{FEAA0364-74F4-8CFB-FD51-2ADEA47E2C36}"/>
-          </ac:spMkLst>
-        </pc:spChg>
-      </pc:sldChg>
-      <pc:sldChg chg="add del">
-        <pc:chgData name="Neil Patrick  A. Del Gallego" userId="9fccce03-204c-489b-ae7d-5aeb7f0c6bb7" providerId="ADAL" clId="{6A1F3EF7-90F3-4287-8EFD-9DD7C6C2096F}" dt="2023-10-02T06:12:27.890" v="3303"/>
-        <pc:sldMkLst>
-          <pc:docMk/>
-          <pc:sldMk cId="1360440909" sldId="338"/>
-        </pc:sldMkLst>
-      </pc:sldChg>
-      <pc:sldChg chg="addSp delSp modSp add mod modAnim">
-        <pc:chgData name="Neil Patrick  A. Del Gallego" userId="9fccce03-204c-489b-ae7d-5aeb7f0c6bb7" providerId="ADAL" clId="{6A1F3EF7-90F3-4287-8EFD-9DD7C6C2096F}" dt="2023-10-02T06:33:30.609" v="4324" actId="1076"/>
-        <pc:sldMkLst>
-          <pc:docMk/>
-          <pc:sldMk cId="2490844624" sldId="338"/>
-        </pc:sldMkLst>
-        <pc:spChg chg="mod">
-          <ac:chgData name="Neil Patrick  A. Del Gallego" userId="9fccce03-204c-489b-ae7d-5aeb7f0c6bb7" providerId="ADAL" clId="{6A1F3EF7-90F3-4287-8EFD-9DD7C6C2096F}" dt="2023-10-02T06:12:36.340" v="3325" actId="20577"/>
-          <ac:spMkLst>
-            <pc:docMk/>
-            <pc:sldMk cId="2490844624" sldId="338"/>
-            <ac:spMk id="2" creationId="{D0FAFE88-3BB3-4A37-8738-A7A760A9234D}"/>
-          </ac:spMkLst>
-        </pc:spChg>
-        <pc:spChg chg="add mod">
-          <ac:chgData name="Neil Patrick  A. Del Gallego" userId="9fccce03-204c-489b-ae7d-5aeb7f0c6bb7" providerId="ADAL" clId="{6A1F3EF7-90F3-4287-8EFD-9DD7C6C2096F}" dt="2023-10-02T06:32:07.425" v="4319" actId="1076"/>
-          <ac:spMkLst>
-            <pc:docMk/>
-            <pc:sldMk cId="2490844624" sldId="338"/>
-            <ac:spMk id="3" creationId="{9415AE1C-E8EB-C8CA-B392-17E0C5872B99}"/>
-          </ac:spMkLst>
-        </pc:spChg>
-        <pc:spChg chg="del">
-          <ac:chgData name="Neil Patrick  A. Del Gallego" userId="9fccce03-204c-489b-ae7d-5aeb7f0c6bb7" providerId="ADAL" clId="{6A1F3EF7-90F3-4287-8EFD-9DD7C6C2096F}" dt="2023-10-02T06:12:39.253" v="3328" actId="478"/>
-          <ac:spMkLst>
-            <pc:docMk/>
-            <pc:sldMk cId="2490844624" sldId="338"/>
-            <ac:spMk id="4" creationId="{900A3B5E-0D88-40D3-ADEE-967AB121DC82}"/>
-          </ac:spMkLst>
-        </pc:spChg>
-        <pc:spChg chg="add mod">
-          <ac:chgData name="Neil Patrick  A. Del Gallego" userId="9fccce03-204c-489b-ae7d-5aeb7f0c6bb7" providerId="ADAL" clId="{6A1F3EF7-90F3-4287-8EFD-9DD7C6C2096F}" dt="2023-10-02T06:32:07.425" v="4319" actId="1076"/>
-          <ac:spMkLst>
-            <pc:docMk/>
-            <pc:sldMk cId="2490844624" sldId="338"/>
-            <ac:spMk id="6" creationId="{2B26357C-8A08-1C40-3463-9A97CFB657F7}"/>
-          </ac:spMkLst>
-        </pc:spChg>
-        <pc:spChg chg="add mod">
-          <ac:chgData name="Neil Patrick  A. Del Gallego" userId="9fccce03-204c-489b-ae7d-5aeb7f0c6bb7" providerId="ADAL" clId="{6A1F3EF7-90F3-4287-8EFD-9DD7C6C2096F}" dt="2023-10-02T06:13:40.198" v="3348" actId="571"/>
-          <ac:spMkLst>
-            <pc:docMk/>
-            <pc:sldMk cId="2490844624" sldId="338"/>
-            <ac:spMk id="8" creationId="{2156781C-A2D6-3B19-2D28-01A83CF88986}"/>
-          </ac:spMkLst>
-        </pc:spChg>
-        <pc:spChg chg="add del mod">
-          <ac:chgData name="Neil Patrick  A. Del Gallego" userId="9fccce03-204c-489b-ae7d-5aeb7f0c6bb7" providerId="ADAL" clId="{6A1F3EF7-90F3-4287-8EFD-9DD7C6C2096F}" dt="2023-10-02T06:13:39.979" v="3347"/>
-          <ac:spMkLst>
-            <pc:docMk/>
-            <pc:sldMk cId="2490844624" sldId="338"/>
-            <ac:spMk id="9" creationId="{C2804734-1514-0949-2837-E7D3C5BFEEAE}"/>
-          </ac:spMkLst>
-        </pc:spChg>
-        <pc:spChg chg="add mod">
-          <ac:chgData name="Neil Patrick  A. Del Gallego" userId="9fccce03-204c-489b-ae7d-5aeb7f0c6bb7" providerId="ADAL" clId="{6A1F3EF7-90F3-4287-8EFD-9DD7C6C2096F}" dt="2023-10-02T06:32:07.425" v="4319" actId="1076"/>
-          <ac:spMkLst>
-            <pc:docMk/>
-            <pc:sldMk cId="2490844624" sldId="338"/>
-            <ac:spMk id="10" creationId="{30345EC3-7E7A-B450-8E03-29939AE7E7B0}"/>
-          </ac:spMkLst>
-        </pc:spChg>
-        <pc:spChg chg="add mod">
-          <ac:chgData name="Neil Patrick  A. Del Gallego" userId="9fccce03-204c-489b-ae7d-5aeb7f0c6bb7" providerId="ADAL" clId="{6A1F3EF7-90F3-4287-8EFD-9DD7C6C2096F}" dt="2023-10-02T06:32:07.425" v="4319" actId="1076"/>
-          <ac:spMkLst>
-            <pc:docMk/>
-            <pc:sldMk cId="2490844624" sldId="338"/>
-            <ac:spMk id="11" creationId="{DD06983A-0AEB-A4ED-7545-E9BA978BE898}"/>
-          </ac:spMkLst>
-        </pc:spChg>
-        <pc:spChg chg="add mod">
-          <ac:chgData name="Neil Patrick  A. Del Gallego" userId="9fccce03-204c-489b-ae7d-5aeb7f0c6bb7" providerId="ADAL" clId="{6A1F3EF7-90F3-4287-8EFD-9DD7C6C2096F}" dt="2023-10-02T06:32:07.425" v="4319" actId="1076"/>
-          <ac:spMkLst>
-            <pc:docMk/>
-            <pc:sldMk cId="2490844624" sldId="338"/>
-            <ac:spMk id="12" creationId="{92230867-CC4C-DFA0-21A9-5AC6CBDE20D0}"/>
-          </ac:spMkLst>
-        </pc:spChg>
-        <pc:spChg chg="add mod">
-          <ac:chgData name="Neil Patrick  A. Del Gallego" userId="9fccce03-204c-489b-ae7d-5aeb7f0c6bb7" providerId="ADAL" clId="{6A1F3EF7-90F3-4287-8EFD-9DD7C6C2096F}" dt="2023-10-02T06:31:56.263" v="4287" actId="404"/>
-          <ac:spMkLst>
-            <pc:docMk/>
-            <pc:sldMk cId="2490844624" sldId="338"/>
-            <ac:spMk id="13" creationId="{BB9824B7-470D-0991-E297-A170459A1640}"/>
-          </ac:spMkLst>
-        </pc:spChg>
-        <pc:spChg chg="add mod">
-          <ac:chgData name="Neil Patrick  A. Del Gallego" userId="9fccce03-204c-489b-ae7d-5aeb7f0c6bb7" providerId="ADAL" clId="{6A1F3EF7-90F3-4287-8EFD-9DD7C6C2096F}" dt="2023-10-02T06:33:30.609" v="4324" actId="1076"/>
-          <ac:spMkLst>
-            <pc:docMk/>
-            <pc:sldMk cId="2490844624" sldId="338"/>
-            <ac:spMk id="21" creationId="{F9131A4E-F4AB-F437-C646-4C9F53C81CF7}"/>
-          </ac:spMkLst>
-        </pc:spChg>
-        <pc:spChg chg="add mod">
-          <ac:chgData name="Neil Patrick  A. Del Gallego" userId="9fccce03-204c-489b-ae7d-5aeb7f0c6bb7" providerId="ADAL" clId="{6A1F3EF7-90F3-4287-8EFD-9DD7C6C2096F}" dt="2023-10-02T06:33:09.020" v="4320" actId="1076"/>
-          <ac:spMkLst>
-            <pc:docMk/>
-            <pc:sldMk cId="2490844624" sldId="338"/>
-            <ac:spMk id="23" creationId="{81E94C55-9530-9FFC-660A-71AF3054DF8B}"/>
-          </ac:spMkLst>
-        </pc:spChg>
-        <pc:spChg chg="add mod">
-          <ac:chgData name="Neil Patrick  A. Del Gallego" userId="9fccce03-204c-489b-ae7d-5aeb7f0c6bb7" providerId="ADAL" clId="{6A1F3EF7-90F3-4287-8EFD-9DD7C6C2096F}" dt="2023-10-02T06:19:59.241" v="3778" actId="1076"/>
-          <ac:spMkLst>
-            <pc:docMk/>
-            <pc:sldMk cId="2490844624" sldId="338"/>
-            <ac:spMk id="24" creationId="{001D609B-E272-58B1-6505-CCCD421D4ECF}"/>
-          </ac:spMkLst>
-        </pc:spChg>
-        <pc:spChg chg="add mod">
-          <ac:chgData name="Neil Patrick  A. Del Gallego" userId="9fccce03-204c-489b-ae7d-5aeb7f0c6bb7" providerId="ADAL" clId="{6A1F3EF7-90F3-4287-8EFD-9DD7C6C2096F}" dt="2023-10-02T06:31:56.263" v="4287" actId="404"/>
-          <ac:spMkLst>
-            <pc:docMk/>
-            <pc:sldMk cId="2490844624" sldId="338"/>
-            <ac:spMk id="25" creationId="{25511438-D6DE-1A52-C2BD-343A55DFF328}"/>
-          </ac:spMkLst>
-        </pc:spChg>
-        <pc:spChg chg="add mod">
-          <ac:chgData name="Neil Patrick  A. Del Gallego" userId="9fccce03-204c-489b-ae7d-5aeb7f0c6bb7" providerId="ADAL" clId="{6A1F3EF7-90F3-4287-8EFD-9DD7C6C2096F}" dt="2023-10-02T06:32:02.749" v="4318" actId="1036"/>
-          <ac:spMkLst>
-            <pc:docMk/>
-            <pc:sldMk cId="2490844624" sldId="338"/>
-            <ac:spMk id="28" creationId="{AD62E444-B338-5CE5-3DB6-05253ACF67CE}"/>
-          </ac:spMkLst>
-        </pc:spChg>
-        <pc:spChg chg="add mod">
-          <ac:chgData name="Neil Patrick  A. Del Gallego" userId="9fccce03-204c-489b-ae7d-5aeb7f0c6bb7" providerId="ADAL" clId="{6A1F3EF7-90F3-4287-8EFD-9DD7C6C2096F}" dt="2023-10-02T06:32:02.749" v="4318" actId="1036"/>
-          <ac:spMkLst>
-            <pc:docMk/>
-            <pc:sldMk cId="2490844624" sldId="338"/>
-            <ac:spMk id="29" creationId="{1BE30897-EF03-CBF5-91A3-05616FF9F9D6}"/>
-          </ac:spMkLst>
-        </pc:spChg>
-        <pc:spChg chg="add mod">
-          <ac:chgData name="Neil Patrick  A. Del Gallego" userId="9fccce03-204c-489b-ae7d-5aeb7f0c6bb7" providerId="ADAL" clId="{6A1F3EF7-90F3-4287-8EFD-9DD7C6C2096F}" dt="2023-10-02T06:32:02.749" v="4318" actId="1036"/>
-          <ac:spMkLst>
-            <pc:docMk/>
-            <pc:sldMk cId="2490844624" sldId="338"/>
-            <ac:spMk id="30" creationId="{9575D3A0-8208-3D97-3BC3-4E8DCB28AFD6}"/>
-          </ac:spMkLst>
-        </pc:spChg>
-        <pc:spChg chg="add mod">
-          <ac:chgData name="Neil Patrick  A. Del Gallego" userId="9fccce03-204c-489b-ae7d-5aeb7f0c6bb7" providerId="ADAL" clId="{6A1F3EF7-90F3-4287-8EFD-9DD7C6C2096F}" dt="2023-10-02T06:32:02.749" v="4318" actId="1036"/>
-          <ac:spMkLst>
-            <pc:docMk/>
-            <pc:sldMk cId="2490844624" sldId="338"/>
-            <ac:spMk id="31" creationId="{5B186D35-47A0-BE47-7214-E2E575C0EA73}"/>
-          </ac:spMkLst>
-        </pc:spChg>
-        <pc:picChg chg="del">
-          <ac:chgData name="Neil Patrick  A. Del Gallego" userId="9fccce03-204c-489b-ae7d-5aeb7f0c6bb7" providerId="ADAL" clId="{6A1F3EF7-90F3-4287-8EFD-9DD7C6C2096F}" dt="2023-10-02T06:12:37.840" v="3326" actId="478"/>
-          <ac:picMkLst>
-            <pc:docMk/>
-            <pc:sldMk cId="2490844624" sldId="338"/>
-            <ac:picMk id="5" creationId="{6F7F23A1-55FF-2AD1-823D-14B4CDCA14E5}"/>
-          </ac:picMkLst>
-        </pc:picChg>
-        <pc:picChg chg="del">
-          <ac:chgData name="Neil Patrick  A. Del Gallego" userId="9fccce03-204c-489b-ae7d-5aeb7f0c6bb7" providerId="ADAL" clId="{6A1F3EF7-90F3-4287-8EFD-9DD7C6C2096F}" dt="2023-10-02T06:12:38.192" v="3327" actId="478"/>
-          <ac:picMkLst>
-            <pc:docMk/>
-            <pc:sldMk cId="2490844624" sldId="338"/>
-            <ac:picMk id="7" creationId="{31005B7D-211A-5DB1-8E1A-85A06F2EE2AB}"/>
-          </ac:picMkLst>
-        </pc:picChg>
-        <pc:picChg chg="add del mod">
-          <ac:chgData name="Neil Patrick  A. Del Gallego" userId="9fccce03-204c-489b-ae7d-5aeb7f0c6bb7" providerId="ADAL" clId="{6A1F3EF7-90F3-4287-8EFD-9DD7C6C2096F}" dt="2023-10-02T06:16:03.738" v="3413" actId="21"/>
-          <ac:picMkLst>
-            <pc:docMk/>
-            <pc:sldMk cId="2490844624" sldId="338"/>
-            <ac:picMk id="15" creationId="{77376D0E-2BFA-8BC3-9454-DDA7A9FBA3F8}"/>
-          </ac:picMkLst>
-        </pc:picChg>
-        <pc:picChg chg="add del mod">
-          <ac:chgData name="Neil Patrick  A. Del Gallego" userId="9fccce03-204c-489b-ae7d-5aeb7f0c6bb7" providerId="ADAL" clId="{6A1F3EF7-90F3-4287-8EFD-9DD7C6C2096F}" dt="2023-10-02T06:16:08.986" v="3416"/>
-          <ac:picMkLst>
-            <pc:docMk/>
-            <pc:sldMk cId="2490844624" sldId="338"/>
-            <ac:picMk id="16" creationId="{A8DAD8A0-2DCC-9F88-7376-B3F346981EE9}"/>
-          </ac:picMkLst>
-        </pc:picChg>
-        <pc:picChg chg="add mod">
-          <ac:chgData name="Neil Patrick  A. Del Gallego" userId="9fccce03-204c-489b-ae7d-5aeb7f0c6bb7" providerId="ADAL" clId="{6A1F3EF7-90F3-4287-8EFD-9DD7C6C2096F}" dt="2023-10-02T06:31:54.811" v="4286" actId="404"/>
-          <ac:picMkLst>
-            <pc:docMk/>
-            <pc:sldMk cId="2490844624" sldId="338"/>
-            <ac:picMk id="17" creationId="{0256E120-F2C2-38AD-A785-1D6F3098A84F}"/>
-          </ac:picMkLst>
-        </pc:picChg>
-        <pc:picChg chg="add del mod">
-          <ac:chgData name="Neil Patrick  A. Del Gallego" userId="9fccce03-204c-489b-ae7d-5aeb7f0c6bb7" providerId="ADAL" clId="{6A1F3EF7-90F3-4287-8EFD-9DD7C6C2096F}" dt="2023-10-02T06:16:37.445" v="3429" actId="21"/>
-          <ac:picMkLst>
-            <pc:docMk/>
-            <pc:sldMk cId="2490844624" sldId="338"/>
-            <ac:picMk id="18" creationId="{3E360676-0DC7-A962-19E5-2F6F7BFB3912}"/>
-          </ac:picMkLst>
-        </pc:picChg>
-        <pc:picChg chg="add del mod">
-          <ac:chgData name="Neil Patrick  A. Del Gallego" userId="9fccce03-204c-489b-ae7d-5aeb7f0c6bb7" providerId="ADAL" clId="{6A1F3EF7-90F3-4287-8EFD-9DD7C6C2096F}" dt="2023-10-02T06:17:26.888" v="3528" actId="21"/>
-          <ac:picMkLst>
-            <pc:docMk/>
-            <pc:sldMk cId="2490844624" sldId="338"/>
-            <ac:picMk id="19" creationId="{C3004879-7F32-8C1B-F830-D56DBC4DDB5D}"/>
-          </ac:picMkLst>
-        </pc:picChg>
-        <pc:picChg chg="add mod">
-          <ac:chgData name="Neil Patrick  A. Del Gallego" userId="9fccce03-204c-489b-ae7d-5aeb7f0c6bb7" providerId="ADAL" clId="{6A1F3EF7-90F3-4287-8EFD-9DD7C6C2096F}" dt="2023-10-02T06:33:09.020" v="4320" actId="1076"/>
-          <ac:picMkLst>
-            <pc:docMk/>
-            <pc:sldMk cId="2490844624" sldId="338"/>
-            <ac:picMk id="20" creationId="{E2499FCB-943F-4AA1-3AE2-3E4ABC984375}"/>
-          </ac:picMkLst>
-        </pc:picChg>
-        <pc:picChg chg="add mod">
-          <ac:chgData name="Neil Patrick  A. Del Gallego" userId="9fccce03-204c-489b-ae7d-5aeb7f0c6bb7" providerId="ADAL" clId="{6A1F3EF7-90F3-4287-8EFD-9DD7C6C2096F}" dt="2023-10-02T06:33:09.020" v="4320" actId="1076"/>
-          <ac:picMkLst>
-            <pc:docMk/>
-            <pc:sldMk cId="2490844624" sldId="338"/>
-            <ac:picMk id="22" creationId="{B1D84C9B-E9E1-DA7C-D9ED-607325D4A2D0}"/>
-          </ac:picMkLst>
-        </pc:picChg>
-        <pc:picChg chg="add mod">
-          <ac:chgData name="Neil Patrick  A. Del Gallego" userId="9fccce03-204c-489b-ae7d-5aeb7f0c6bb7" providerId="ADAL" clId="{6A1F3EF7-90F3-4287-8EFD-9DD7C6C2096F}" dt="2023-10-02T06:31:54.811" v="4286" actId="404"/>
-          <ac:picMkLst>
-            <pc:docMk/>
-            <pc:sldMk cId="2490844624" sldId="338"/>
-            <ac:picMk id="27" creationId="{3D566B6E-398C-4D3E-C471-316465A530A4}"/>
-          </ac:picMkLst>
-        </pc:picChg>
-        <pc:picChg chg="add mod">
-          <ac:chgData name="Neil Patrick  A. Del Gallego" userId="9fccce03-204c-489b-ae7d-5aeb7f0c6bb7" providerId="ADAL" clId="{6A1F3EF7-90F3-4287-8EFD-9DD7C6C2096F}" dt="2023-10-02T06:32:02.749" v="4318" actId="1036"/>
-          <ac:picMkLst>
-            <pc:docMk/>
-            <pc:sldMk cId="2490844624" sldId="338"/>
-            <ac:picMk id="33" creationId="{6466FA3C-A88C-17F8-E196-F10D776C85D6}"/>
-          </ac:picMkLst>
-        </pc:picChg>
-        <pc:picChg chg="add mod">
-          <ac:chgData name="Neil Patrick  A. Del Gallego" userId="9fccce03-204c-489b-ae7d-5aeb7f0c6bb7" providerId="ADAL" clId="{6A1F3EF7-90F3-4287-8EFD-9DD7C6C2096F}" dt="2023-10-02T06:33:22.887" v="4323" actId="14100"/>
-          <ac:picMkLst>
-            <pc:docMk/>
-            <pc:sldMk cId="2490844624" sldId="338"/>
-            <ac:picMk id="34" creationId="{F272B84E-3A1E-ABF7-9220-4D9CAF43C92C}"/>
-          </ac:picMkLst>
-        </pc:picChg>
-        <pc:picChg chg="add mod">
-          <ac:chgData name="Neil Patrick  A. Del Gallego" userId="9fccce03-204c-489b-ae7d-5aeb7f0c6bb7" providerId="ADAL" clId="{6A1F3EF7-90F3-4287-8EFD-9DD7C6C2096F}" dt="2023-10-02T06:33:09.020" v="4320" actId="1076"/>
-          <ac:picMkLst>
-            <pc:docMk/>
-            <pc:sldMk cId="2490844624" sldId="338"/>
-            <ac:picMk id="3074" creationId="{C992F94E-6C03-CE69-C9C6-6EB4E6BCE7B2}"/>
-          </ac:picMkLst>
-        </pc:picChg>
-        <pc:picChg chg="add mod">
-          <ac:chgData name="Neil Patrick  A. Del Gallego" userId="9fccce03-204c-489b-ae7d-5aeb7f0c6bb7" providerId="ADAL" clId="{6A1F3EF7-90F3-4287-8EFD-9DD7C6C2096F}" dt="2023-10-02T06:33:09.020" v="4320" actId="1076"/>
-          <ac:picMkLst>
-            <pc:docMk/>
-            <pc:sldMk cId="2490844624" sldId="338"/>
-            <ac:picMk id="3076" creationId="{B9BD571A-AA4D-1335-047D-DB48AF17CA0D}"/>
-          </ac:picMkLst>
-        </pc:picChg>
-        <pc:picChg chg="add mod">
-          <ac:chgData name="Neil Patrick  A. Del Gallego" userId="9fccce03-204c-489b-ae7d-5aeb7f0c6bb7" providerId="ADAL" clId="{6A1F3EF7-90F3-4287-8EFD-9DD7C6C2096F}" dt="2023-10-02T06:31:54.811" v="4286" actId="404"/>
-          <ac:picMkLst>
-            <pc:docMk/>
-            <pc:sldMk cId="2490844624" sldId="338"/>
-            <ac:picMk id="3078" creationId="{C6BD52E3-3769-55B3-DEDC-EE0E4E3FEC42}"/>
-          </ac:picMkLst>
-        </pc:picChg>
-        <pc:picChg chg="add mod">
-          <ac:chgData name="Neil Patrick  A. Del Gallego" userId="9fccce03-204c-489b-ae7d-5aeb7f0c6bb7" providerId="ADAL" clId="{6A1F3EF7-90F3-4287-8EFD-9DD7C6C2096F}" dt="2023-10-02T06:32:02.749" v="4318" actId="1036"/>
-          <ac:picMkLst>
-            <pc:docMk/>
-            <pc:sldMk cId="2490844624" sldId="338"/>
-            <ac:picMk id="3080" creationId="{72D93333-DE9B-8F8F-63E2-354AE0EC7B0F}"/>
-          </ac:picMkLst>
-        </pc:picChg>
-        <pc:picChg chg="add mod">
-          <ac:chgData name="Neil Patrick  A. Del Gallego" userId="9fccce03-204c-489b-ae7d-5aeb7f0c6bb7" providerId="ADAL" clId="{6A1F3EF7-90F3-4287-8EFD-9DD7C6C2096F}" dt="2023-10-02T06:32:02.749" v="4318" actId="1036"/>
-          <ac:picMkLst>
-            <pc:docMk/>
-            <pc:sldMk cId="2490844624" sldId="338"/>
-            <ac:picMk id="3082" creationId="{A0DBFBFF-5FE8-7036-F343-4C944EA73636}"/>
-          </ac:picMkLst>
-        </pc:picChg>
-        <pc:picChg chg="add mod">
-          <ac:chgData name="Neil Patrick  A. Del Gallego" userId="9fccce03-204c-489b-ae7d-5aeb7f0c6bb7" providerId="ADAL" clId="{6A1F3EF7-90F3-4287-8EFD-9DD7C6C2096F}" dt="2023-10-02T06:32:02.749" v="4318" actId="1036"/>
-          <ac:picMkLst>
-            <pc:docMk/>
-            <pc:sldMk cId="2490844624" sldId="338"/>
-            <ac:picMk id="3084" creationId="{B750C2F8-62C6-1DAA-B72C-72343754C18B}"/>
-          </ac:picMkLst>
-        </pc:picChg>
-      </pc:sldChg>
-      <pc:sldChg chg="delSp add del mod delAnim">
-        <pc:chgData name="Neil Patrick  A. Del Gallego" userId="9fccce03-204c-489b-ae7d-5aeb7f0c6bb7" providerId="ADAL" clId="{6A1F3EF7-90F3-4287-8EFD-9DD7C6C2096F}" dt="2023-10-02T06:39:29.127" v="4633" actId="47"/>
-        <pc:sldMkLst>
-          <pc:docMk/>
-          <pc:sldMk cId="620542611" sldId="339"/>
-        </pc:sldMkLst>
-        <pc:spChg chg="del">
-          <ac:chgData name="Neil Patrick  A. Del Gallego" userId="9fccce03-204c-489b-ae7d-5aeb7f0c6bb7" providerId="ADAL" clId="{6A1F3EF7-90F3-4287-8EFD-9DD7C6C2096F}" dt="2023-10-02T06:37:30.844" v="4577" actId="478"/>
-          <ac:spMkLst>
-            <pc:docMk/>
-            <pc:sldMk cId="620542611" sldId="339"/>
-            <ac:spMk id="3" creationId="{A4A1AB07-D9C1-58F6-9B2A-6F3605B18E86}"/>
-          </ac:spMkLst>
-        </pc:spChg>
-      </pc:sldChg>
-      <pc:sldChg chg="addSp delSp modSp add mod addAnim delAnim modAnim">
-        <pc:chgData name="Neil Patrick  A. Del Gallego" userId="9fccce03-204c-489b-ae7d-5aeb7f0c6bb7" providerId="ADAL" clId="{6A1F3EF7-90F3-4287-8EFD-9DD7C6C2096F}" dt="2023-10-02T11:22:32.706" v="6954" actId="14100"/>
-        <pc:sldMkLst>
-          <pc:docMk/>
-          <pc:sldMk cId="2820338251" sldId="339"/>
-        </pc:sldMkLst>
-        <pc:spChg chg="mod">
-          <ac:chgData name="Neil Patrick  A. Del Gallego" userId="9fccce03-204c-489b-ae7d-5aeb7f0c6bb7" providerId="ADAL" clId="{6A1F3EF7-90F3-4287-8EFD-9DD7C6C2096F}" dt="2023-10-02T11:21:38.088" v="6862" actId="20577"/>
-          <ac:spMkLst>
-            <pc:docMk/>
-            <pc:sldMk cId="2820338251" sldId="339"/>
-            <ac:spMk id="2" creationId="{D0FAFE88-3BB3-4A37-8738-A7A760A9234D}"/>
-          </ac:spMkLst>
-        </pc:spChg>
-        <pc:spChg chg="del mod">
-          <ac:chgData name="Neil Patrick  A. Del Gallego" userId="9fccce03-204c-489b-ae7d-5aeb7f0c6bb7" providerId="ADAL" clId="{6A1F3EF7-90F3-4287-8EFD-9DD7C6C2096F}" dt="2023-10-02T11:12:41.395" v="5599" actId="478"/>
-          <ac:spMkLst>
-            <pc:docMk/>
-            <pc:sldMk cId="2820338251" sldId="339"/>
-            <ac:spMk id="3" creationId="{A4A1AB07-D9C1-58F6-9B2A-6F3605B18E86}"/>
-          </ac:spMkLst>
-        </pc:spChg>
-        <pc:spChg chg="add del">
-          <ac:chgData name="Neil Patrick  A. Del Gallego" userId="9fccce03-204c-489b-ae7d-5aeb7f0c6bb7" providerId="ADAL" clId="{6A1F3EF7-90F3-4287-8EFD-9DD7C6C2096F}" dt="2023-10-02T11:11:17.077" v="5308" actId="478"/>
-          <ac:spMkLst>
-            <pc:docMk/>
-            <pc:sldMk cId="2820338251" sldId="339"/>
-            <ac:spMk id="4" creationId="{900A3B5E-0D88-40D3-ADEE-967AB121DC82}"/>
-          </ac:spMkLst>
-        </pc:spChg>
-        <pc:spChg chg="del mod">
-          <ac:chgData name="Neil Patrick  A. Del Gallego" userId="9fccce03-204c-489b-ae7d-5aeb7f0c6bb7" providerId="ADAL" clId="{6A1F3EF7-90F3-4287-8EFD-9DD7C6C2096F}" dt="2023-10-02T11:12:43.224" v="5600" actId="478"/>
-          <ac:spMkLst>
-            <pc:docMk/>
-            <pc:sldMk cId="2820338251" sldId="339"/>
-            <ac:spMk id="5" creationId="{381400F5-D9BA-00D9-B3D7-4FF9A2E240AA}"/>
-          </ac:spMkLst>
-        </pc:spChg>
-        <pc:spChg chg="add del">
-          <ac:chgData name="Neil Patrick  A. Del Gallego" userId="9fccce03-204c-489b-ae7d-5aeb7f0c6bb7" providerId="ADAL" clId="{6A1F3EF7-90F3-4287-8EFD-9DD7C6C2096F}" dt="2023-10-02T11:12:44.777" v="5601" actId="478"/>
-          <ac:spMkLst>
-            <pc:docMk/>
-            <pc:sldMk cId="2820338251" sldId="339"/>
-            <ac:spMk id="6" creationId="{BBBEE9B8-8A4D-CBBD-B10B-CDDC28182C70}"/>
-          </ac:spMkLst>
-        </pc:spChg>
-        <pc:spChg chg="add del">
-          <ac:chgData name="Neil Patrick  A. Del Gallego" userId="9fccce03-204c-489b-ae7d-5aeb7f0c6bb7" providerId="ADAL" clId="{6A1F3EF7-90F3-4287-8EFD-9DD7C6C2096F}" dt="2023-10-02T11:11:10.316" v="5304" actId="478"/>
-          <ac:spMkLst>
-            <pc:docMk/>
-            <pc:sldMk cId="2820338251" sldId="339"/>
-            <ac:spMk id="7" creationId="{3319F67C-81E9-79EE-354F-603BFD99E909}"/>
-          </ac:spMkLst>
-        </pc:spChg>
-        <pc:spChg chg="add del">
-          <ac:chgData name="Neil Patrick  A. Del Gallego" userId="9fccce03-204c-489b-ae7d-5aeb7f0c6bb7" providerId="ADAL" clId="{6A1F3EF7-90F3-4287-8EFD-9DD7C6C2096F}" dt="2023-10-02T11:11:11.175" v="5305" actId="478"/>
-          <ac:spMkLst>
-            <pc:docMk/>
-            <pc:sldMk cId="2820338251" sldId="339"/>
-            <ac:spMk id="8" creationId="{3AB8F22E-19F3-3E02-2A9B-B3D7B1CEC598}"/>
-          </ac:spMkLst>
-        </pc:spChg>
-        <pc:spChg chg="add mod">
-          <ac:chgData name="Neil Patrick  A. Del Gallego" userId="9fccce03-204c-489b-ae7d-5aeb7f0c6bb7" providerId="ADAL" clId="{6A1F3EF7-90F3-4287-8EFD-9DD7C6C2096F}" dt="2023-10-02T11:19:55.945" v="6731" actId="207"/>
-          <ac:spMkLst>
-            <pc:docMk/>
-            <pc:sldMk cId="2820338251" sldId="339"/>
-            <ac:spMk id="9" creationId="{4254E78C-7F1E-7D9A-F2C5-7EA2337C6DAF}"/>
-          </ac:spMkLst>
-        </pc:spChg>
-        <pc:spChg chg="add mod">
-          <ac:chgData name="Neil Patrick  A. Del Gallego" userId="9fccce03-204c-489b-ae7d-5aeb7f0c6bb7" providerId="ADAL" clId="{6A1F3EF7-90F3-4287-8EFD-9DD7C6C2096F}" dt="2023-10-02T11:19:58.702" v="6732" actId="207"/>
-          <ac:spMkLst>
-            <pc:docMk/>
-            <pc:sldMk cId="2820338251" sldId="339"/>
-            <ac:spMk id="10" creationId="{744F902E-7C3C-A96C-8EFB-F313F1694AD7}"/>
-          </ac:spMkLst>
-        </pc:spChg>
-        <pc:spChg chg="add mod">
-          <ac:chgData name="Neil Patrick  A. Del Gallego" userId="9fccce03-204c-489b-ae7d-5aeb7f0c6bb7" providerId="ADAL" clId="{6A1F3EF7-90F3-4287-8EFD-9DD7C6C2096F}" dt="2023-10-02T11:20:10.452" v="6734" actId="207"/>
-          <ac:spMkLst>
-            <pc:docMk/>
-            <pc:sldMk cId="2820338251" sldId="339"/>
-            <ac:spMk id="11" creationId="{52662E69-056A-6AB0-7DD8-0AE07157908B}"/>
-          </ac:spMkLst>
-        </pc:spChg>
-        <pc:spChg chg="add mod">
-          <ac:chgData name="Neil Patrick  A. Del Gallego" userId="9fccce03-204c-489b-ae7d-5aeb7f0c6bb7" providerId="ADAL" clId="{6A1F3EF7-90F3-4287-8EFD-9DD7C6C2096F}" dt="2023-10-02T11:20:03.978" v="6733" actId="207"/>
-          <ac:spMkLst>
-            <pc:docMk/>
-            <pc:sldMk cId="2820338251" sldId="339"/>
-            <ac:spMk id="12" creationId="{1928890F-B2C5-8917-4844-60AD0D008D21}"/>
-          </ac:spMkLst>
-        </pc:spChg>
-        <pc:spChg chg="add del">
-          <ac:chgData name="Neil Patrick  A. Del Gallego" userId="9fccce03-204c-489b-ae7d-5aeb7f0c6bb7" providerId="ADAL" clId="{6A1F3EF7-90F3-4287-8EFD-9DD7C6C2096F}" dt="2023-10-02T11:19:03.108" v="6719"/>
-          <ac:spMkLst>
-            <pc:docMk/>
-            <pc:sldMk cId="2820338251" sldId="339"/>
-            <ac:spMk id="13" creationId="{FB5F7AEF-0AFC-E791-2498-A9C9382C1364}"/>
-          </ac:spMkLst>
-        </pc:spChg>
-        <pc:spChg chg="add mod">
-          <ac:chgData name="Neil Patrick  A. Del Gallego" userId="9fccce03-204c-489b-ae7d-5aeb7f0c6bb7" providerId="ADAL" clId="{6A1F3EF7-90F3-4287-8EFD-9DD7C6C2096F}" dt="2023-10-02T11:22:32.706" v="6954" actId="14100"/>
-          <ac:spMkLst>
-            <pc:docMk/>
-            <pc:sldMk cId="2820338251" sldId="339"/>
-            <ac:spMk id="15" creationId="{71E6B4E1-4443-3114-D540-D2628E9842D9}"/>
-          </ac:spMkLst>
-        </pc:spChg>
-        <pc:picChg chg="add mod">
-          <ac:chgData name="Neil Patrick  A. Del Gallego" userId="9fccce03-204c-489b-ae7d-5aeb7f0c6bb7" providerId="ADAL" clId="{6A1F3EF7-90F3-4287-8EFD-9DD7C6C2096F}" dt="2023-10-02T11:19:43.334" v="6730"/>
-          <ac:picMkLst>
-            <pc:docMk/>
-            <pc:sldMk cId="2820338251" sldId="339"/>
-            <ac:picMk id="14" creationId="{E5534EBB-34F6-6B0F-7143-71E10ED71852}"/>
-          </ac:picMkLst>
-        </pc:picChg>
-        <pc:picChg chg="add del mod">
-          <ac:chgData name="Neil Patrick  A. Del Gallego" userId="9fccce03-204c-489b-ae7d-5aeb7f0c6bb7" providerId="ADAL" clId="{6A1F3EF7-90F3-4287-8EFD-9DD7C6C2096F}" dt="2023-10-02T11:19:36.253" v="6727" actId="21"/>
-          <ac:picMkLst>
-            <pc:docMk/>
-            <pc:sldMk cId="2820338251" sldId="339"/>
-            <ac:picMk id="3076" creationId="{A582F9AD-3167-F5E2-1A3B-6A27D11F38C2}"/>
-          </ac:picMkLst>
-        </pc:picChg>
-        <pc:picChg chg="del mod">
-          <ac:chgData name="Neil Patrick  A. Del Gallego" userId="9fccce03-204c-489b-ae7d-5aeb7f0c6bb7" providerId="ADAL" clId="{6A1F3EF7-90F3-4287-8EFD-9DD7C6C2096F}" dt="2023-10-02T11:19:01.830" v="6717" actId="478"/>
-          <ac:picMkLst>
-            <pc:docMk/>
-            <pc:sldMk cId="2820338251" sldId="339"/>
-            <ac:picMk id="7170" creationId="{36F4E454-D676-6C9F-28C5-3459185ACBFA}"/>
-          </ac:picMkLst>
-        </pc:picChg>
-      </pc:sldChg>
-      <pc:sldChg chg="addSp delSp modSp add mod modAnim">
-        <pc:chgData name="Neil Patrick  A. Del Gallego" userId="9fccce03-204c-489b-ae7d-5aeb7f0c6bb7" providerId="ADAL" clId="{6A1F3EF7-90F3-4287-8EFD-9DD7C6C2096F}" dt="2023-10-02T11:56:14.367" v="7633"/>
-        <pc:sldMkLst>
-          <pc:docMk/>
-          <pc:sldMk cId="1787033067" sldId="340"/>
-        </pc:sldMkLst>
-        <pc:spChg chg="mod">
-          <ac:chgData name="Neil Patrick  A. Del Gallego" userId="9fccce03-204c-489b-ae7d-5aeb7f0c6bb7" providerId="ADAL" clId="{6A1F3EF7-90F3-4287-8EFD-9DD7C6C2096F}" dt="2023-10-02T11:56:14.367" v="7633"/>
-          <ac:spMkLst>
-            <pc:docMk/>
-            <pc:sldMk cId="1787033067" sldId="340"/>
-            <ac:spMk id="2" creationId="{D0FAFE88-3BB3-4A37-8738-A7A760A9234D}"/>
-          </ac:spMkLst>
-        </pc:spChg>
-        <pc:spChg chg="add del mod">
-          <ac:chgData name="Neil Patrick  A. Del Gallego" userId="9fccce03-204c-489b-ae7d-5aeb7f0c6bb7" providerId="ADAL" clId="{6A1F3EF7-90F3-4287-8EFD-9DD7C6C2096F}" dt="2023-10-02T11:30:05.449" v="7388"/>
-          <ac:spMkLst>
-            <pc:docMk/>
-            <pc:sldMk cId="1787033067" sldId="340"/>
-            <ac:spMk id="4" creationId="{DBE87635-7E54-3BC4-81C6-52202962FB0C}"/>
-          </ac:spMkLst>
-        </pc:spChg>
-        <pc:spChg chg="mod">
-          <ac:chgData name="Neil Patrick  A. Del Gallego" userId="9fccce03-204c-489b-ae7d-5aeb7f0c6bb7" providerId="ADAL" clId="{6A1F3EF7-90F3-4287-8EFD-9DD7C6C2096F}" dt="2023-10-02T11:37:25.465" v="7621" actId="20577"/>
-          <ac:spMkLst>
-            <pc:docMk/>
-            <pc:sldMk cId="1787033067" sldId="340"/>
-            <ac:spMk id="5" creationId="{B627F1C3-DEB1-AB20-3FDB-4C265CC1C62D}"/>
-          </ac:spMkLst>
-        </pc:spChg>
-        <pc:spChg chg="add mod">
-          <ac:chgData name="Neil Patrick  A. Del Gallego" userId="9fccce03-204c-489b-ae7d-5aeb7f0c6bb7" providerId="ADAL" clId="{6A1F3EF7-90F3-4287-8EFD-9DD7C6C2096F}" dt="2023-10-02T11:30:23.225" v="7467" actId="113"/>
-          <ac:spMkLst>
-            <pc:docMk/>
-            <pc:sldMk cId="1787033067" sldId="340"/>
-            <ac:spMk id="6" creationId="{A63D3142-AA10-669F-5D3E-34C8FDE9303C}"/>
-          </ac:spMkLst>
-        </pc:spChg>
-        <pc:spChg chg="del">
-          <ac:chgData name="Neil Patrick  A. Del Gallego" userId="9fccce03-204c-489b-ae7d-5aeb7f0c6bb7" providerId="ADAL" clId="{6A1F3EF7-90F3-4287-8EFD-9DD7C6C2096F}" dt="2023-10-02T11:30:09.217" v="7391" actId="478"/>
-          <ac:spMkLst>
-            <pc:docMk/>
-            <pc:sldMk cId="1787033067" sldId="340"/>
-            <ac:spMk id="13" creationId="{BDB982B1-6E4D-B0BE-091D-1C97FE5A5906}"/>
-          </ac:spMkLst>
-        </pc:spChg>
-        <pc:grpChg chg="del">
-          <ac:chgData name="Neil Patrick  A. Del Gallego" userId="9fccce03-204c-489b-ae7d-5aeb7f0c6bb7" providerId="ADAL" clId="{6A1F3EF7-90F3-4287-8EFD-9DD7C6C2096F}" dt="2023-10-02T11:30:10.016" v="7392" actId="478"/>
-          <ac:grpSpMkLst>
-            <pc:docMk/>
-            <pc:sldMk cId="1787033067" sldId="340"/>
-            <ac:grpSpMk id="8" creationId="{85E574FE-A569-9ED8-1195-B93493F8CD4B}"/>
-          </ac:grpSpMkLst>
-        </pc:grpChg>
-        <pc:picChg chg="del">
-          <ac:chgData name="Neil Patrick  A. Del Gallego" userId="9fccce03-204c-489b-ae7d-5aeb7f0c6bb7" providerId="ADAL" clId="{6A1F3EF7-90F3-4287-8EFD-9DD7C6C2096F}" dt="2023-10-02T11:30:07.880" v="7390" actId="478"/>
-          <ac:picMkLst>
-            <pc:docMk/>
-            <pc:sldMk cId="1787033067" sldId="340"/>
-            <ac:picMk id="7" creationId="{AC340BD2-DD45-600D-1087-D3A380B3B5BD}"/>
-          </ac:picMkLst>
-        </pc:picChg>
-        <pc:picChg chg="del">
-          <ac:chgData name="Neil Patrick  A. Del Gallego" userId="9fccce03-204c-489b-ae7d-5aeb7f0c6bb7" providerId="ADAL" clId="{6A1F3EF7-90F3-4287-8EFD-9DD7C6C2096F}" dt="2023-10-02T11:30:07.563" v="7389" actId="478"/>
-          <ac:picMkLst>
-            <pc:docMk/>
-            <pc:sldMk cId="1787033067" sldId="340"/>
-            <ac:picMk id="11" creationId="{101A3199-381A-958B-A1C5-58490D5AAE59}"/>
-          </ac:picMkLst>
-        </pc:picChg>
-        <pc:picChg chg="add mod">
-          <ac:chgData name="Neil Patrick  A. Del Gallego" userId="9fccce03-204c-489b-ae7d-5aeb7f0c6bb7" providerId="ADAL" clId="{6A1F3EF7-90F3-4287-8EFD-9DD7C6C2096F}" dt="2023-10-02T11:36:19.762" v="7591" actId="1076"/>
-          <ac:picMkLst>
-            <pc:docMk/>
-            <pc:sldMk cId="1787033067" sldId="340"/>
-            <ac:picMk id="4098" creationId="{AC9307ED-4D1F-B296-6053-FF780D7C941C}"/>
-          </ac:picMkLst>
-        </pc:picChg>
-        <pc:picChg chg="add mod">
-          <ac:chgData name="Neil Patrick  A. Del Gallego" userId="9fccce03-204c-489b-ae7d-5aeb7f0c6bb7" providerId="ADAL" clId="{6A1F3EF7-90F3-4287-8EFD-9DD7C6C2096F}" dt="2023-10-02T11:36:23.076" v="7593" actId="1076"/>
-          <ac:picMkLst>
-            <pc:docMk/>
-            <pc:sldMk cId="1787033067" sldId="340"/>
-            <ac:picMk id="4100" creationId="{947C4DFF-3538-24A4-10AB-C0FA39E619C0}"/>
-          </ac:picMkLst>
-        </pc:picChg>
-        <pc:picChg chg="add mod">
-          <ac:chgData name="Neil Patrick  A. Del Gallego" userId="9fccce03-204c-489b-ae7d-5aeb7f0c6bb7" providerId="ADAL" clId="{6A1F3EF7-90F3-4287-8EFD-9DD7C6C2096F}" dt="2023-10-02T11:36:24.359" v="7594" actId="1076"/>
-          <ac:picMkLst>
-            <pc:docMk/>
-            <pc:sldMk cId="1787033067" sldId="340"/>
-            <ac:picMk id="4102" creationId="{B2EC7AF9-0E71-70F4-57C4-F500E8A65719}"/>
-          </ac:picMkLst>
-        </pc:picChg>
-        <pc:picChg chg="add mod">
-          <ac:chgData name="Neil Patrick  A. Del Gallego" userId="9fccce03-204c-489b-ae7d-5aeb7f0c6bb7" providerId="ADAL" clId="{6A1F3EF7-90F3-4287-8EFD-9DD7C6C2096F}" dt="2023-10-02T11:36:42.173" v="7609" actId="1076"/>
-          <ac:picMkLst>
-            <pc:docMk/>
-            <pc:sldMk cId="1787033067" sldId="340"/>
-            <ac:picMk id="4104" creationId="{E33468D0-990A-1AD2-E31D-B8D5BA35D6BB}"/>
-          </ac:picMkLst>
-        </pc:picChg>
-        <pc:picChg chg="add mod">
-          <ac:chgData name="Neil Patrick  A. Del Gallego" userId="9fccce03-204c-489b-ae7d-5aeb7f0c6bb7" providerId="ADAL" clId="{6A1F3EF7-90F3-4287-8EFD-9DD7C6C2096F}" dt="2023-10-02T11:36:50.473" v="7611" actId="1076"/>
-          <ac:picMkLst>
-            <pc:docMk/>
-            <pc:sldMk cId="1787033067" sldId="340"/>
-            <ac:picMk id="4106" creationId="{F49C2CFE-F1E0-47EC-9EDC-1253689711D9}"/>
-          </ac:picMkLst>
-        </pc:picChg>
-      </pc:sldChg>
-      <pc:sldMasterChg chg="addSp modSldLayout">
-        <pc:chgData name="Neil Patrick  A. Del Gallego" userId="9fccce03-204c-489b-ae7d-5aeb7f0c6bb7" providerId="ADAL" clId="{6A1F3EF7-90F3-4287-8EFD-9DD7C6C2096F}" dt="2023-10-02T05:56:11.206" v="2614"/>
-        <pc:sldMasterMkLst>
-          <pc:docMk/>
-          <pc:sldMasterMk cId="128815445" sldId="2147483684"/>
-        </pc:sldMasterMkLst>
-        <pc:picChg chg="add">
-          <ac:chgData name="Neil Patrick  A. Del Gallego" userId="9fccce03-204c-489b-ae7d-5aeb7f0c6bb7" providerId="ADAL" clId="{6A1F3EF7-90F3-4287-8EFD-9DD7C6C2096F}" dt="2023-10-02T05:56:11.206" v="2614"/>
-          <ac:picMkLst>
-            <pc:docMk/>
-            <pc:sldMasterMk cId="128815445" sldId="2147483684"/>
-            <ac:picMk id="8" creationId="{025A7386-BD03-FC25-D674-A5F773FBC0D9}"/>
-          </ac:picMkLst>
-        </pc:picChg>
-        <pc:sldLayoutChg chg="addSp">
-          <pc:chgData name="Neil Patrick  A. Del Gallego" userId="9fccce03-204c-489b-ae7d-5aeb7f0c6bb7" providerId="ADAL" clId="{6A1F3EF7-90F3-4287-8EFD-9DD7C6C2096F}" dt="2023-10-02T05:56:11.206" v="2614"/>
-          <pc:sldLayoutMkLst>
-            <pc:docMk/>
-            <pc:sldMasterMk cId="128815445" sldId="2147483684"/>
-            <pc:sldLayoutMk cId="2571631433" sldId="2147483685"/>
-          </pc:sldLayoutMkLst>
-          <pc:picChg chg="add">
-            <ac:chgData name="Neil Patrick  A. Del Gallego" userId="9fccce03-204c-489b-ae7d-5aeb7f0c6bb7" providerId="ADAL" clId="{6A1F3EF7-90F3-4287-8EFD-9DD7C6C2096F}" dt="2023-10-02T05:56:11.206" v="2614"/>
-            <ac:picMkLst>
-              <pc:docMk/>
-              <pc:sldMasterMk cId="128815445" sldId="2147483684"/>
-              <pc:sldLayoutMk cId="2571631433" sldId="2147483685"/>
-              <ac:picMk id="8" creationId="{FFE6279F-A124-8572-3CCF-22D43CF8712A}"/>
-            </ac:picMkLst>
-          </pc:picChg>
-        </pc:sldLayoutChg>
-        <pc:sldLayoutChg chg="addSp">
-          <pc:chgData name="Neil Patrick  A. Del Gallego" userId="9fccce03-204c-489b-ae7d-5aeb7f0c6bb7" providerId="ADAL" clId="{6A1F3EF7-90F3-4287-8EFD-9DD7C6C2096F}" dt="2023-10-02T05:56:11.206" v="2614"/>
-          <pc:sldLayoutMkLst>
-            <pc:docMk/>
-            <pc:sldMasterMk cId="128815445" sldId="2147483684"/>
-            <pc:sldLayoutMk cId="1852470555" sldId="2147483687"/>
-          </pc:sldLayoutMkLst>
-          <pc:picChg chg="add">
-            <ac:chgData name="Neil Patrick  A. Del Gallego" userId="9fccce03-204c-489b-ae7d-5aeb7f0c6bb7" providerId="ADAL" clId="{6A1F3EF7-90F3-4287-8EFD-9DD7C6C2096F}" dt="2023-10-02T05:56:11.206" v="2614"/>
-            <ac:picMkLst>
-              <pc:docMk/>
-              <pc:sldMasterMk cId="128815445" sldId="2147483684"/>
-              <pc:sldLayoutMk cId="1852470555" sldId="2147483687"/>
-              <ac:picMk id="7" creationId="{CD7D036D-4E45-148C-4F61-5AFF4B7253E5}"/>
-            </ac:picMkLst>
-          </pc:picChg>
-        </pc:sldLayoutChg>
-        <pc:sldLayoutChg chg="addSp">
-          <pc:chgData name="Neil Patrick  A. Del Gallego" userId="9fccce03-204c-489b-ae7d-5aeb7f0c6bb7" providerId="ADAL" clId="{6A1F3EF7-90F3-4287-8EFD-9DD7C6C2096F}" dt="2023-10-02T05:56:11.206" v="2614"/>
-          <pc:sldLayoutMkLst>
-            <pc:docMk/>
-            <pc:sldMasterMk cId="128815445" sldId="2147483684"/>
-            <pc:sldLayoutMk cId="2575019990" sldId="2147483691"/>
-          </pc:sldLayoutMkLst>
-          <pc:picChg chg="add">
-            <ac:chgData name="Neil Patrick  A. Del Gallego" userId="9fccce03-204c-489b-ae7d-5aeb7f0c6bb7" providerId="ADAL" clId="{6A1F3EF7-90F3-4287-8EFD-9DD7C6C2096F}" dt="2023-10-02T05:56:11.206" v="2614"/>
-            <ac:picMkLst>
-              <pc:docMk/>
-              <pc:sldMasterMk cId="128815445" sldId="2147483684"/>
-              <pc:sldLayoutMk cId="2575019990" sldId="2147483691"/>
-              <ac:picMk id="5" creationId="{E8C74CEC-DF01-34A4-624A-9690E345B7B4}"/>
-            </ac:picMkLst>
-          </pc:picChg>
-        </pc:sldLayoutChg>
-        <pc:sldLayoutChg chg="addSp">
-          <pc:chgData name="Neil Patrick  A. Del Gallego" userId="9fccce03-204c-489b-ae7d-5aeb7f0c6bb7" providerId="ADAL" clId="{6A1F3EF7-90F3-4287-8EFD-9DD7C6C2096F}" dt="2023-10-02T05:56:11.206" v="2614"/>
-          <pc:sldLayoutMkLst>
-            <pc:docMk/>
-            <pc:sldMasterMk cId="128815445" sldId="2147483684"/>
-            <pc:sldLayoutMk cId="2318768651" sldId="2147483692"/>
-          </pc:sldLayoutMkLst>
-          <pc:picChg chg="add">
-            <ac:chgData name="Neil Patrick  A. Del Gallego" userId="9fccce03-204c-489b-ae7d-5aeb7f0c6bb7" providerId="ADAL" clId="{6A1F3EF7-90F3-4287-8EFD-9DD7C6C2096F}" dt="2023-10-02T05:56:11.206" v="2614"/>
-            <ac:picMkLst>
-              <pc:docMk/>
-              <pc:sldMasterMk cId="128815445" sldId="2147483684"/>
-              <pc:sldLayoutMk cId="2318768651" sldId="2147483692"/>
-              <ac:picMk id="8" creationId="{D91C6305-5879-2D3B-E459-C1EF9D07DF84}"/>
-            </ac:picMkLst>
-          </pc:picChg>
-        </pc:sldLayoutChg>
-      </pc:sldMasterChg>
-      <pc:sldMasterChg chg="addSp modSp mod modSldLayout">
-        <pc:chgData name="Neil Patrick  A. Del Gallego" userId="9fccce03-204c-489b-ae7d-5aeb7f0c6bb7" providerId="ADAL" clId="{6A1F3EF7-90F3-4287-8EFD-9DD7C6C2096F}" dt="2023-10-02T05:58:30.276" v="2666" actId="1440"/>
-        <pc:sldMasterMkLst>
-          <pc:docMk/>
-          <pc:sldMasterMk cId="2644797524" sldId="2147483684"/>
-        </pc:sldMasterMkLst>
-        <pc:spChg chg="mod">
-          <ac:chgData name="Neil Patrick  A. Del Gallego" userId="9fccce03-204c-489b-ae7d-5aeb7f0c6bb7" providerId="ADAL" clId="{6A1F3EF7-90F3-4287-8EFD-9DD7C6C2096F}" dt="2023-10-02T05:58:18.386" v="2661" actId="14100"/>
-          <ac:spMkLst>
-            <pc:docMk/>
-            <pc:sldMasterMk cId="2644797524" sldId="2147483684"/>
-            <ac:spMk id="6" creationId="{0D75BAD7-4DE0-8DAF-2B8C-021CF961F416}"/>
-          </ac:spMkLst>
-        </pc:spChg>
-        <pc:picChg chg="add mod">
-          <ac:chgData name="Neil Patrick  A. Del Gallego" userId="9fccce03-204c-489b-ae7d-5aeb7f0c6bb7" providerId="ADAL" clId="{6A1F3EF7-90F3-4287-8EFD-9DD7C6C2096F}" dt="2023-10-02T05:58:30.276" v="2666" actId="1440"/>
-          <ac:picMkLst>
-            <pc:docMk/>
-            <pc:sldMasterMk cId="2644797524" sldId="2147483684"/>
-            <ac:picMk id="7" creationId="{7E8353E9-309E-4D7F-BA19-68ED15C1CF24}"/>
-          </ac:picMkLst>
-        </pc:picChg>
-        <pc:picChg chg="add mod">
-          <ac:chgData name="Neil Patrick  A. Del Gallego" userId="9fccce03-204c-489b-ae7d-5aeb7f0c6bb7" providerId="ADAL" clId="{6A1F3EF7-90F3-4287-8EFD-9DD7C6C2096F}" dt="2023-10-02T05:58:15.038" v="2660" actId="1440"/>
-          <ac:picMkLst>
-            <pc:docMk/>
-            <pc:sldMasterMk cId="2644797524" sldId="2147483684"/>
-            <ac:picMk id="8" creationId="{826DC515-5005-E090-FDD6-DC92BB630040}"/>
-          </ac:picMkLst>
-        </pc:picChg>
-        <pc:sldLayoutChg chg="addSp delSp modSp mod">
-          <pc:chgData name="Neil Patrick  A. Del Gallego" userId="9fccce03-204c-489b-ae7d-5aeb7f0c6bb7" providerId="ADAL" clId="{6A1F3EF7-90F3-4287-8EFD-9DD7C6C2096F}" dt="2023-10-02T05:57:48.191" v="2652" actId="21"/>
-          <pc:sldLayoutMkLst>
-            <pc:docMk/>
-            <pc:sldMasterMk cId="2644797524" sldId="2147483684"/>
-            <pc:sldLayoutMk cId="3365251982" sldId="2147483685"/>
-          </pc:sldLayoutMkLst>
-          <pc:picChg chg="add del mod">
-            <ac:chgData name="Neil Patrick  A. Del Gallego" userId="9fccce03-204c-489b-ae7d-5aeb7f0c6bb7" providerId="ADAL" clId="{6A1F3EF7-90F3-4287-8EFD-9DD7C6C2096F}" dt="2023-10-02T05:56:45.590" v="2640" actId="478"/>
-            <ac:picMkLst>
-              <pc:docMk/>
-              <pc:sldMasterMk cId="2644797524" sldId="2147483684"/>
-              <pc:sldLayoutMk cId="3365251982" sldId="2147483685"/>
-              <ac:picMk id="7" creationId="{8B6EF945-3105-5913-78F0-BC847B715B29}"/>
-            </ac:picMkLst>
-          </pc:picChg>
-          <pc:picChg chg="add del mod">
-            <ac:chgData name="Neil Patrick  A. Del Gallego" userId="9fccce03-204c-489b-ae7d-5aeb7f0c6bb7" providerId="ADAL" clId="{6A1F3EF7-90F3-4287-8EFD-9DD7C6C2096F}" dt="2023-10-02T05:57:48.191" v="2652" actId="21"/>
-            <ac:picMkLst>
-              <pc:docMk/>
-              <pc:sldMasterMk cId="2644797524" sldId="2147483684"/>
-              <pc:sldLayoutMk cId="3365251982" sldId="2147483685"/>
-              <ac:picMk id="9" creationId="{CB40AC28-1CE1-50C5-CBEB-2AFE6024D3D4}"/>
-            </ac:picMkLst>
-          </pc:picChg>
-        </pc:sldLayoutChg>
-        <pc:sldLayoutChg chg="addSp delSp mod">
-          <pc:chgData name="Neil Patrick  A. Del Gallego" userId="9fccce03-204c-489b-ae7d-5aeb7f0c6bb7" providerId="ADAL" clId="{6A1F3EF7-90F3-4287-8EFD-9DD7C6C2096F}" dt="2023-10-02T05:57:02.280" v="2644" actId="478"/>
-          <pc:sldLayoutMkLst>
-            <pc:docMk/>
-            <pc:sldMasterMk cId="2644797524" sldId="2147483684"/>
-            <pc:sldLayoutMk cId="2279362463" sldId="2147483687"/>
-          </pc:sldLayoutMkLst>
-          <pc:picChg chg="add del">
-            <ac:chgData name="Neil Patrick  A. Del Gallego" userId="9fccce03-204c-489b-ae7d-5aeb7f0c6bb7" providerId="ADAL" clId="{6A1F3EF7-90F3-4287-8EFD-9DD7C6C2096F}" dt="2023-10-02T05:57:02.280" v="2644" actId="478"/>
-            <ac:picMkLst>
-              <pc:docMk/>
-              <pc:sldMasterMk cId="2644797524" sldId="2147483684"/>
-              <pc:sldLayoutMk cId="2279362463" sldId="2147483687"/>
-              <ac:picMk id="7" creationId="{136B7616-A47E-D7DF-DD4E-C49340B1B810}"/>
-            </ac:picMkLst>
-          </pc:picChg>
-        </pc:sldLayoutChg>
-        <pc:sldLayoutChg chg="addSp delSp mod">
-          <pc:chgData name="Neil Patrick  A. Del Gallego" userId="9fccce03-204c-489b-ae7d-5aeb7f0c6bb7" providerId="ADAL" clId="{6A1F3EF7-90F3-4287-8EFD-9DD7C6C2096F}" dt="2023-10-02T05:57:06.562" v="2645" actId="478"/>
-          <pc:sldLayoutMkLst>
-            <pc:docMk/>
-            <pc:sldMasterMk cId="2644797524" sldId="2147483684"/>
-            <pc:sldLayoutMk cId="3661424728" sldId="2147483691"/>
-          </pc:sldLayoutMkLst>
-          <pc:picChg chg="add del">
-            <ac:chgData name="Neil Patrick  A. Del Gallego" userId="9fccce03-204c-489b-ae7d-5aeb7f0c6bb7" providerId="ADAL" clId="{6A1F3EF7-90F3-4287-8EFD-9DD7C6C2096F}" dt="2023-10-02T05:57:06.562" v="2645" actId="478"/>
-            <ac:picMkLst>
-              <pc:docMk/>
-              <pc:sldMasterMk cId="2644797524" sldId="2147483684"/>
-              <pc:sldLayoutMk cId="3661424728" sldId="2147483691"/>
-              <ac:picMk id="5" creationId="{C331C085-9395-2446-6F83-34F1DF29AA6F}"/>
-            </ac:picMkLst>
-          </pc:picChg>
-        </pc:sldLayoutChg>
-        <pc:sldLayoutChg chg="addSp delSp mod">
-          <pc:chgData name="Neil Patrick  A. Del Gallego" userId="9fccce03-204c-489b-ae7d-5aeb7f0c6bb7" providerId="ADAL" clId="{6A1F3EF7-90F3-4287-8EFD-9DD7C6C2096F}" dt="2023-10-02T05:57:08.285" v="2646" actId="478"/>
-          <pc:sldLayoutMkLst>
-            <pc:docMk/>
-            <pc:sldMasterMk cId="2644797524" sldId="2147483684"/>
-            <pc:sldLayoutMk cId="1069821278" sldId="2147483692"/>
-          </pc:sldLayoutMkLst>
-          <pc:picChg chg="add del">
-            <ac:chgData name="Neil Patrick  A. Del Gallego" userId="9fccce03-204c-489b-ae7d-5aeb7f0c6bb7" providerId="ADAL" clId="{6A1F3EF7-90F3-4287-8EFD-9DD7C6C2096F}" dt="2023-10-02T05:57:08.285" v="2646" actId="478"/>
-            <ac:picMkLst>
-              <pc:docMk/>
-              <pc:sldMasterMk cId="2644797524" sldId="2147483684"/>
-              <pc:sldLayoutMk cId="1069821278" sldId="2147483692"/>
-              <ac:picMk id="8" creationId="{84BDB514-70BC-7969-C217-5B69781A6843}"/>
-            </ac:picMkLst>
-          </pc:picChg>
-        </pc:sldLayoutChg>
-      </pc:sldMasterChg>
-    </pc:docChg>
-  </pc:docChgLst>
-</pc:chgInfo>
+<file path=ppt/revisionInfo.xml><?xml version="1.0" encoding="utf-8"?>
+<p1510:revInfo xmlns:a="http://schemas.openxmlformats.org/drawingml/2006/main" xmlns:r="http://schemas.openxmlformats.org/officeDocument/2006/relationships" xmlns:p1510="http://schemas.microsoft.com/office/powerpoint/2015/10/main">
+  <p1510:revLst>
+    <p1510:client id="{02E5670E-D68B-B626-1B83-C06C5D5950FE}" v="9" dt="2024-11-29T13:45:09.429"/>
+    <p1510:client id="{973D0E54-00AD-4E53-8B69-DDEF35D29174}" v="583" dt="2024-11-29T13:50:19.666"/>
+    <p1510:client id="{BBAEBEF1-351B-1F22-248F-340725C94BAB}" v="2396" dt="2024-11-29T13:36:03.482"/>
+  </p1510:revLst>
+</p1510:revInfo>
 </file>
 
 <file path=ppt/notesMasters/notesMaster1.xml><?xml version="1.0" encoding="utf-8"?>
@@ -2383,90 +489,6 @@
     </a:lvl9pPr>
   </p:notesStyle>
 </p:notesMaster>
-</file>
-
-<file path=ppt/notesSlides/notesSlide1.xml><?xml version="1.0" encoding="utf-8"?>
-<p:notes xmlns:a="http://schemas.openxmlformats.org/drawingml/2006/main" xmlns:r="http://schemas.openxmlformats.org/officeDocument/2006/relationships" xmlns:p="http://schemas.openxmlformats.org/presentationml/2006/main">
-  <p:cSld>
-    <p:spTree>
-      <p:nvGrpSpPr>
-        <p:cNvPr id="1" name=""/>
-        <p:cNvGrpSpPr/>
-        <p:nvPr/>
-      </p:nvGrpSpPr>
-      <p:grpSpPr>
-        <a:xfrm>
-          <a:off x="0" y="0"/>
-          <a:ext cx="0" cy="0"/>
-          <a:chOff x="0" y="0"/>
-          <a:chExt cx="0" cy="0"/>
-        </a:xfrm>
-      </p:grpSpPr>
-      <p:sp>
-        <p:nvSpPr>
-          <p:cNvPr id="2" name="Slide Image Placeholder 1"/>
-          <p:cNvSpPr>
-            <a:spLocks noGrp="1" noRot="1" noChangeAspect="1"/>
-          </p:cNvSpPr>
-          <p:nvPr>
-            <p:ph type="sldImg"/>
-          </p:nvPr>
-        </p:nvSpPr>
-        <p:spPr/>
-      </p:sp>
-      <p:sp>
-        <p:nvSpPr>
-          <p:cNvPr id="3" name="Notes Placeholder 2"/>
-          <p:cNvSpPr>
-            <a:spLocks noGrp="1"/>
-          </p:cNvSpPr>
-          <p:nvPr>
-            <p:ph type="body" idx="1"/>
-          </p:nvPr>
-        </p:nvSpPr>
-        <p:spPr/>
-        <p:txBody>
-          <a:bodyPr/>
-          <a:lstStyle/>
-          <a:p>
-            <a:endParaRPr lang="en-US" dirty="0"/>
-          </a:p>
-        </p:txBody>
-      </p:sp>
-      <p:sp>
-        <p:nvSpPr>
-          <p:cNvPr id="4" name="Slide Number Placeholder 3"/>
-          <p:cNvSpPr>
-            <a:spLocks noGrp="1"/>
-          </p:cNvSpPr>
-          <p:nvPr>
-            <p:ph type="sldNum" sz="quarter" idx="5"/>
-          </p:nvPr>
-        </p:nvSpPr>
-        <p:spPr/>
-        <p:txBody>
-          <a:bodyPr/>
-          <a:lstStyle/>
-          <a:p>
-            <a:fld id="{6D8E8492-2C95-46AF-81CD-79BF6D25C0E0}" type="slidenum">
-              <a:rPr lang="en-US" smtClean="0"/>
-              <a:t>5</a:t>
-            </a:fld>
-            <a:endParaRPr lang="en-US"/>
-          </a:p>
-        </p:txBody>
-      </p:sp>
-    </p:spTree>
-    <p:extLst>
-      <p:ext uri="{BB962C8B-B14F-4D97-AF65-F5344CB8AC3E}">
-        <p14:creationId xmlns:p14="http://schemas.microsoft.com/office/powerpoint/2010/main" val="36747357"/>
-      </p:ext>
-    </p:extLst>
-  </p:cSld>
-  <p:clrMapOvr>
-    <a:masterClrMapping/>
-  </p:clrMapOvr>
-</p:notes>
 </file>
 
 <file path=ppt/slideLayouts/slideLayout1.xml><?xml version="1.0" encoding="utf-8"?>
@@ -5877,9 +3899,10 @@
           </a:lstStyle>
           <a:p>
             <a:r>
-              <a:rPr lang="en-US" sz="4400" dirty="0"/>
-              <a:t>CLI Process Multiplexer</a:t>
-            </a:r>
+              <a:rPr lang="en-US" sz="4400"/>
+              <a:t>Multi-tasking OS</a:t>
+            </a:r>
+            <a:endParaRPr lang="en-US" sz="4400" dirty="0"/>
           </a:p>
         </p:txBody>
       </p:sp>
@@ -5926,574 +3949,6 @@
 </file>
 
 <file path=ppt/slides/slide10.xml><?xml version="1.0" encoding="utf-8"?>
-<p:sld xmlns:a="http://schemas.openxmlformats.org/drawingml/2006/main" xmlns:r="http://schemas.openxmlformats.org/officeDocument/2006/relationships" xmlns:p="http://schemas.openxmlformats.org/presentationml/2006/main">
-  <p:cSld>
-    <p:spTree>
-      <p:nvGrpSpPr>
-        <p:cNvPr id="1" name="">
-          <a:extLst>
-            <a:ext uri="{FF2B5EF4-FFF2-40B4-BE49-F238E27FC236}">
-              <a16:creationId xmlns:a16="http://schemas.microsoft.com/office/drawing/2014/main" id="{471B8880-B380-0E16-EE04-EBCAF6DBFED0}"/>
-            </a:ext>
-          </a:extLst>
-        </p:cNvPr>
-        <p:cNvGrpSpPr/>
-        <p:nvPr/>
-      </p:nvGrpSpPr>
-      <p:grpSpPr>
-        <a:xfrm>
-          <a:off x="0" y="0"/>
-          <a:ext cx="0" cy="0"/>
-          <a:chOff x="0" y="0"/>
-          <a:chExt cx="0" cy="0"/>
-        </a:xfrm>
-      </p:grpSpPr>
-      <p:sp>
-        <p:nvSpPr>
-          <p:cNvPr id="2" name="Title 1">
-            <a:extLst>
-              <a:ext uri="{FF2B5EF4-FFF2-40B4-BE49-F238E27FC236}">
-                <a16:creationId xmlns:a16="http://schemas.microsoft.com/office/drawing/2014/main" id="{F5A7E0BD-CCC9-B6F8-0722-B1C21ADC53E0}"/>
-              </a:ext>
-            </a:extLst>
-          </p:cNvPr>
-          <p:cNvSpPr>
-            <a:spLocks noGrp="1"/>
-          </p:cNvSpPr>
-          <p:nvPr>
-            <p:ph type="title" idx="4294967295"/>
-          </p:nvPr>
-        </p:nvSpPr>
-        <p:spPr>
-          <a:xfrm>
-            <a:off x="258750" y="176213"/>
-            <a:ext cx="10639437" cy="692150"/>
-          </a:xfrm>
-        </p:spPr>
-        <p:txBody>
-          <a:bodyPr anchor="t">
-            <a:normAutofit fontScale="90000"/>
-          </a:bodyPr>
-          <a:lstStyle/>
-          <a:p>
-            <a:r>
-              <a:rPr lang="en-US" dirty="0"/>
-              <a:t>Scheduler Implementation</a:t>
-            </a:r>
-          </a:p>
-        </p:txBody>
-      </p:sp>
-      <p:sp>
-        <p:nvSpPr>
-          <p:cNvPr id="4" name="Content Placeholder 2">
-            <a:extLst>
-              <a:ext uri="{FF2B5EF4-FFF2-40B4-BE49-F238E27FC236}">
-                <a16:creationId xmlns:a16="http://schemas.microsoft.com/office/drawing/2014/main" id="{CF09A2AE-017E-69CD-B369-AC8DE01E2D35}"/>
-              </a:ext>
-            </a:extLst>
-          </p:cNvPr>
-          <p:cNvSpPr>
-            <a:spLocks noGrp="1"/>
-          </p:cNvSpPr>
-          <p:nvPr>
-            <p:ph idx="4294967295"/>
-          </p:nvPr>
-        </p:nvSpPr>
-        <p:spPr>
-          <a:xfrm>
-            <a:off x="217088" y="868363"/>
-            <a:ext cx="6567169" cy="5137150"/>
-          </a:xfrm>
-        </p:spPr>
-        <p:txBody>
-          <a:bodyPr>
-            <a:normAutofit/>
-          </a:bodyPr>
-          <a:lstStyle/>
-          <a:p>
-            <a:pPr>
-              <a:buFont typeface="Arial" panose="020B0604020202020204" pitchFamily="34" charset="0"/>
-              <a:buChar char="•"/>
-            </a:pPr>
-            <a:r>
-              <a:rPr lang="en-US" sz="2400" dirty="0"/>
-              <a:t>The scheduler is initialized by the </a:t>
-            </a:r>
-            <a:r>
-              <a:rPr lang="en-US" sz="2400" dirty="0" err="1"/>
-              <a:t>CliManager</a:t>
-            </a:r>
-            <a:r>
-              <a:rPr lang="en-US" sz="2400" dirty="0"/>
-              <a:t> class upon entering the “initialize” command. It then calls the scheduler constructor which reads the configuration file which will be used in setting the fields of the scheduler class.</a:t>
-            </a:r>
-          </a:p>
-          <a:p>
-            <a:pPr>
-              <a:buFont typeface="Arial" panose="020B0604020202020204" pitchFamily="34" charset="0"/>
-              <a:buChar char="•"/>
-            </a:pPr>
-            <a:r>
-              <a:rPr lang="en-US" sz="2400" dirty="0"/>
-              <a:t>Once the user inputs the command “scheduler-start”, the </a:t>
-            </a:r>
-            <a:r>
-              <a:rPr lang="en-US" sz="2400" dirty="0" err="1"/>
-              <a:t>CliManager</a:t>
-            </a:r>
-            <a:r>
-              <a:rPr lang="en-US" sz="2400" dirty="0"/>
-              <a:t> class will call the </a:t>
-            </a:r>
-            <a:r>
-              <a:rPr lang="en-US" sz="2400" dirty="0" err="1"/>
-              <a:t>startScheduler</a:t>
-            </a:r>
-            <a:r>
-              <a:rPr lang="en-US" sz="2400" dirty="0"/>
-              <a:t> method which will initialize the threads and other necessary fields for the scheduler.</a:t>
-            </a:r>
-          </a:p>
-          <a:p>
-            <a:pPr>
-              <a:buFont typeface="Arial" panose="020B0604020202020204" pitchFamily="34" charset="0"/>
-              <a:buChar char="•"/>
-            </a:pPr>
-            <a:r>
-              <a:rPr lang="en-US" sz="2400" dirty="0"/>
-              <a:t>The threads that were created will then call the </a:t>
-            </a:r>
-            <a:r>
-              <a:rPr lang="en-US" sz="2400" dirty="0" err="1"/>
-              <a:t>fcfs</a:t>
-            </a:r>
-            <a:r>
-              <a:rPr lang="en-US" sz="2400" dirty="0"/>
-              <a:t> or </a:t>
-            </a:r>
-            <a:r>
-              <a:rPr lang="en-US" sz="2400" dirty="0" err="1"/>
-              <a:t>roundRobin</a:t>
-            </a:r>
-            <a:r>
-              <a:rPr lang="en-US" sz="2400" dirty="0"/>
-              <a:t> method depending on the settings of the configuration file.</a:t>
-            </a:r>
-          </a:p>
-        </p:txBody>
-      </p:sp>
-      <p:sp>
-        <p:nvSpPr>
-          <p:cNvPr id="5" name="Slide Number Placeholder 4">
-            <a:extLst>
-              <a:ext uri="{FF2B5EF4-FFF2-40B4-BE49-F238E27FC236}">
-                <a16:creationId xmlns:a16="http://schemas.microsoft.com/office/drawing/2014/main" id="{FC8119B2-3F0B-5AB7-D680-9C7535A49C99}"/>
-              </a:ext>
-            </a:extLst>
-          </p:cNvPr>
-          <p:cNvSpPr>
-            <a:spLocks noGrp="1"/>
-          </p:cNvSpPr>
-          <p:nvPr>
-            <p:ph type="sldNum" sz="quarter" idx="12"/>
-          </p:nvPr>
-        </p:nvSpPr>
-        <p:spPr/>
-        <p:txBody>
-          <a:bodyPr/>
-          <a:lstStyle/>
-          <a:p>
-            <a:fld id="{FF00C4FC-38D3-4854-AF00-0F78321D5711}" type="slidenum">
-              <a:rPr lang="en-US" smtClean="0"/>
-              <a:t>10</a:t>
-            </a:fld>
-            <a:endParaRPr lang="en-US"/>
-          </a:p>
-        </p:txBody>
-      </p:sp>
-      <p:pic>
-        <p:nvPicPr>
-          <p:cNvPr id="7" name="Picture 6" descr="A computer screen shot of a program code&#10;&#10;Description automatically generated">
-            <a:extLst>
-              <a:ext uri="{FF2B5EF4-FFF2-40B4-BE49-F238E27FC236}">
-                <a16:creationId xmlns:a16="http://schemas.microsoft.com/office/drawing/2014/main" id="{1DF94C94-AB8A-091B-AB34-B2C32A2B7F7A}"/>
-              </a:ext>
-            </a:extLst>
-          </p:cNvPr>
-          <p:cNvPicPr>
-            <a:picLocks noChangeAspect="1"/>
-          </p:cNvPicPr>
-          <p:nvPr/>
-        </p:nvPicPr>
-        <p:blipFill>
-          <a:blip r:embed="rId2">
-            <a:extLst>
-              <a:ext uri="{28A0092B-C50C-407E-A947-70E740481C1C}">
-                <a14:useLocalDpi xmlns:a14="http://schemas.microsoft.com/office/drawing/2010/main" val="0"/>
-              </a:ext>
-            </a:extLst>
-          </a:blip>
-          <a:stretch>
-            <a:fillRect/>
-          </a:stretch>
-        </p:blipFill>
-        <p:spPr>
-          <a:xfrm>
-            <a:off x="6896928" y="344128"/>
-            <a:ext cx="4880669" cy="3193235"/>
-          </a:xfrm>
-          <a:prstGeom prst="rect">
-            <a:avLst/>
-          </a:prstGeom>
-        </p:spPr>
-      </p:pic>
-      <p:pic>
-        <p:nvPicPr>
-          <p:cNvPr id="9" name="Picture 8" descr="A computer screen with text&#10;&#10;Description automatically generated">
-            <a:extLst>
-              <a:ext uri="{FF2B5EF4-FFF2-40B4-BE49-F238E27FC236}">
-                <a16:creationId xmlns:a16="http://schemas.microsoft.com/office/drawing/2014/main" id="{BE4C48F8-0E41-E940-8F86-42C5F4C95F0E}"/>
-              </a:ext>
-            </a:extLst>
-          </p:cNvPr>
-          <p:cNvPicPr>
-            <a:picLocks noChangeAspect="1"/>
-          </p:cNvPicPr>
-          <p:nvPr/>
-        </p:nvPicPr>
-        <p:blipFill>
-          <a:blip r:embed="rId3">
-            <a:extLst>
-              <a:ext uri="{28A0092B-C50C-407E-A947-70E740481C1C}">
-                <a14:useLocalDpi xmlns:a14="http://schemas.microsoft.com/office/drawing/2010/main" val="0"/>
-              </a:ext>
-            </a:extLst>
-          </a:blip>
-          <a:stretch>
-            <a:fillRect/>
-          </a:stretch>
-        </p:blipFill>
-        <p:spPr>
-          <a:xfrm>
-            <a:off x="6961240" y="3722693"/>
-            <a:ext cx="4345562" cy="2227404"/>
-          </a:xfrm>
-          <a:prstGeom prst="rect">
-            <a:avLst/>
-          </a:prstGeom>
-        </p:spPr>
-      </p:pic>
-    </p:spTree>
-    <p:extLst>
-      <p:ext uri="{BB962C8B-B14F-4D97-AF65-F5344CB8AC3E}">
-        <p14:creationId xmlns:p14="http://schemas.microsoft.com/office/powerpoint/2010/main" val="184164588"/>
-      </p:ext>
-    </p:extLst>
-  </p:cSld>
-  <p:clrMapOvr>
-    <a:masterClrMapping/>
-  </p:clrMapOvr>
-</p:sld>
-</file>
-
-<file path=ppt/slides/slide11.xml><?xml version="1.0" encoding="utf-8"?>
-<p:sld xmlns:a="http://schemas.openxmlformats.org/drawingml/2006/main" xmlns:r="http://schemas.openxmlformats.org/officeDocument/2006/relationships" xmlns:p="http://schemas.openxmlformats.org/presentationml/2006/main">
-  <p:cSld>
-    <p:spTree>
-      <p:nvGrpSpPr>
-        <p:cNvPr id="1" name="">
-          <a:extLst>
-            <a:ext uri="{FF2B5EF4-FFF2-40B4-BE49-F238E27FC236}">
-              <a16:creationId xmlns:a16="http://schemas.microsoft.com/office/drawing/2014/main" id="{FA2D44F6-D5D7-EB3B-4096-886551E85B10}"/>
-            </a:ext>
-          </a:extLst>
-        </p:cNvPr>
-        <p:cNvGrpSpPr/>
-        <p:nvPr/>
-      </p:nvGrpSpPr>
-      <p:grpSpPr>
-        <a:xfrm>
-          <a:off x="0" y="0"/>
-          <a:ext cx="0" cy="0"/>
-          <a:chOff x="0" y="0"/>
-          <a:chExt cx="0" cy="0"/>
-        </a:xfrm>
-      </p:grpSpPr>
-      <p:sp>
-        <p:nvSpPr>
-          <p:cNvPr id="2" name="Title 1">
-            <a:extLst>
-              <a:ext uri="{FF2B5EF4-FFF2-40B4-BE49-F238E27FC236}">
-                <a16:creationId xmlns:a16="http://schemas.microsoft.com/office/drawing/2014/main" id="{6D2EA4D4-CA70-3645-889B-BC28BFDB3794}"/>
-              </a:ext>
-            </a:extLst>
-          </p:cNvPr>
-          <p:cNvSpPr>
-            <a:spLocks noGrp="1"/>
-          </p:cNvSpPr>
-          <p:nvPr>
-            <p:ph type="title" idx="4294967295"/>
-          </p:nvPr>
-        </p:nvSpPr>
-        <p:spPr>
-          <a:xfrm>
-            <a:off x="258750" y="176213"/>
-            <a:ext cx="10639437" cy="692150"/>
-          </a:xfrm>
-        </p:spPr>
-        <p:txBody>
-          <a:bodyPr anchor="t">
-            <a:normAutofit fontScale="90000"/>
-          </a:bodyPr>
-          <a:lstStyle/>
-          <a:p>
-            <a:r>
-              <a:rPr lang="en-US" dirty="0"/>
-              <a:t>Scheduler Implementation</a:t>
-            </a:r>
-          </a:p>
-        </p:txBody>
-      </p:sp>
-      <p:sp>
-        <p:nvSpPr>
-          <p:cNvPr id="4" name="Content Placeholder 2">
-            <a:extLst>
-              <a:ext uri="{FF2B5EF4-FFF2-40B4-BE49-F238E27FC236}">
-                <a16:creationId xmlns:a16="http://schemas.microsoft.com/office/drawing/2014/main" id="{29A79C3C-7935-BF55-A3F2-B0ADB03DA485}"/>
-              </a:ext>
-            </a:extLst>
-          </p:cNvPr>
-          <p:cNvSpPr>
-            <a:spLocks noGrp="1"/>
-          </p:cNvSpPr>
-          <p:nvPr>
-            <p:ph idx="4294967295"/>
-          </p:nvPr>
-        </p:nvSpPr>
-        <p:spPr>
-          <a:xfrm>
-            <a:off x="217088" y="868363"/>
-            <a:ext cx="6567169" cy="5137150"/>
-          </a:xfrm>
-        </p:spPr>
-        <p:txBody>
-          <a:bodyPr>
-            <a:normAutofit/>
-          </a:bodyPr>
-          <a:lstStyle/>
-          <a:p>
-            <a:pPr>
-              <a:buFont typeface="Arial" panose="020B0604020202020204" pitchFamily="34" charset="0"/>
-              <a:buChar char="•"/>
-            </a:pPr>
-            <a:r>
-              <a:rPr lang="en-US" sz="2400" dirty="0"/>
-              <a:t>The </a:t>
-            </a:r>
-            <a:r>
-              <a:rPr lang="en-US" sz="2400" dirty="0" err="1"/>
-              <a:t>cpuClock</a:t>
-            </a:r>
-            <a:r>
-              <a:rPr lang="en-US" sz="2400" dirty="0"/>
-              <a:t> method is implemented as a separate thread from the </a:t>
-            </a:r>
-            <a:r>
-              <a:rPr lang="en-US" sz="2400" dirty="0" err="1"/>
-              <a:t>fcfs</a:t>
-            </a:r>
-            <a:r>
-              <a:rPr lang="en-US" sz="2400" dirty="0"/>
-              <a:t> and </a:t>
-            </a:r>
-            <a:r>
-              <a:rPr lang="en-US" sz="2400" dirty="0" err="1"/>
-              <a:t>roundRobin</a:t>
-            </a:r>
-            <a:r>
-              <a:rPr lang="en-US" sz="2400" dirty="0"/>
-              <a:t> method as it will run independently to determine when a new process will be created and when an instruction will be executed by the schedulers.</a:t>
-            </a:r>
-          </a:p>
-          <a:p>
-            <a:pPr>
-              <a:buFont typeface="Arial" panose="020B0604020202020204" pitchFamily="34" charset="0"/>
-              <a:buChar char="•"/>
-            </a:pPr>
-            <a:r>
-              <a:rPr lang="en-US" sz="2400" dirty="0"/>
-              <a:t>The condition variable cv2 is used to notify the schedulers that an instruction should be executed in that </a:t>
-            </a:r>
-            <a:r>
-              <a:rPr lang="en-US" sz="2400" dirty="0" err="1"/>
-              <a:t>cpu</a:t>
-            </a:r>
-            <a:r>
-              <a:rPr lang="en-US" sz="2400" dirty="0"/>
-              <a:t> cycle.</a:t>
-            </a:r>
-          </a:p>
-          <a:p>
-            <a:pPr>
-              <a:buFont typeface="Arial" panose="020B0604020202020204" pitchFamily="34" charset="0"/>
-              <a:buChar char="•"/>
-            </a:pPr>
-            <a:r>
-              <a:rPr lang="en-US" sz="2400" dirty="0"/>
-              <a:t>The </a:t>
-            </a:r>
-            <a:r>
-              <a:rPr lang="en-US" sz="2400" dirty="0" err="1"/>
-              <a:t>createProcess</a:t>
-            </a:r>
-            <a:r>
-              <a:rPr lang="en-US" sz="2400" dirty="0"/>
-              <a:t> method is called by the </a:t>
-            </a:r>
-            <a:r>
-              <a:rPr lang="en-US" sz="2400" dirty="0" err="1"/>
-              <a:t>cpuClock</a:t>
-            </a:r>
-            <a:r>
-              <a:rPr lang="en-US" sz="2400" dirty="0"/>
-              <a:t> and </a:t>
-            </a:r>
-            <a:r>
-              <a:rPr lang="en-US" sz="2400" dirty="0" err="1"/>
-              <a:t>CliManager</a:t>
-            </a:r>
-            <a:r>
-              <a:rPr lang="en-US" sz="2400" dirty="0"/>
-              <a:t> class when a new process will be created.</a:t>
-            </a:r>
-          </a:p>
-          <a:p>
-            <a:pPr>
-              <a:buFont typeface="Arial" panose="020B0604020202020204" pitchFamily="34" charset="0"/>
-              <a:buChar char="•"/>
-            </a:pPr>
-            <a:r>
-              <a:rPr lang="en-US" sz="2400" dirty="0"/>
-              <a:t>To resolve the consumer-producer problem, the condition variable cv is used to notify the schedulers that a process has been created.</a:t>
-            </a:r>
-          </a:p>
-        </p:txBody>
-      </p:sp>
-      <p:sp>
-        <p:nvSpPr>
-          <p:cNvPr id="5" name="Slide Number Placeholder 4">
-            <a:extLst>
-              <a:ext uri="{FF2B5EF4-FFF2-40B4-BE49-F238E27FC236}">
-                <a16:creationId xmlns:a16="http://schemas.microsoft.com/office/drawing/2014/main" id="{10AD0233-6DD9-8117-431D-7443660C6E81}"/>
-              </a:ext>
-            </a:extLst>
-          </p:cNvPr>
-          <p:cNvSpPr>
-            <a:spLocks noGrp="1"/>
-          </p:cNvSpPr>
-          <p:nvPr>
-            <p:ph type="sldNum" sz="quarter" idx="12"/>
-          </p:nvPr>
-        </p:nvSpPr>
-        <p:spPr/>
-        <p:txBody>
-          <a:bodyPr/>
-          <a:lstStyle/>
-          <a:p>
-            <a:fld id="{FF00C4FC-38D3-4854-AF00-0F78321D5711}" type="slidenum">
-              <a:rPr lang="en-US" smtClean="0"/>
-              <a:t>11</a:t>
-            </a:fld>
-            <a:endParaRPr lang="en-US"/>
-          </a:p>
-        </p:txBody>
-      </p:sp>
-      <p:pic>
-        <p:nvPicPr>
-          <p:cNvPr id="6" name="Picture 5">
-            <a:extLst>
-              <a:ext uri="{FF2B5EF4-FFF2-40B4-BE49-F238E27FC236}">
-                <a16:creationId xmlns:a16="http://schemas.microsoft.com/office/drawing/2014/main" id="{4544DF88-E1AF-04F1-F422-A583E7E06BEF}"/>
-              </a:ext>
-            </a:extLst>
-          </p:cNvPr>
-          <p:cNvPicPr>
-            <a:picLocks noChangeAspect="1"/>
-          </p:cNvPicPr>
-          <p:nvPr/>
-        </p:nvPicPr>
-        <p:blipFill>
-          <a:blip r:embed="rId2">
-            <a:extLst>
-              <a:ext uri="{28A0092B-C50C-407E-A947-70E740481C1C}">
-                <a14:useLocalDpi xmlns:a14="http://schemas.microsoft.com/office/drawing/2010/main" val="0"/>
-              </a:ext>
-            </a:extLst>
-          </a:blip>
-          <a:stretch>
-            <a:fillRect/>
-          </a:stretch>
-        </p:blipFill>
-        <p:spPr>
-          <a:xfrm>
-            <a:off x="7046243" y="397087"/>
-            <a:ext cx="4887007" cy="2838846"/>
-          </a:xfrm>
-          <a:prstGeom prst="rect">
-            <a:avLst/>
-          </a:prstGeom>
-        </p:spPr>
-      </p:pic>
-      <p:pic>
-        <p:nvPicPr>
-          <p:cNvPr id="10" name="Picture 9" descr="A screen shot of a computer&#10;&#10;Description automatically generated">
-            <a:extLst>
-              <a:ext uri="{FF2B5EF4-FFF2-40B4-BE49-F238E27FC236}">
-                <a16:creationId xmlns:a16="http://schemas.microsoft.com/office/drawing/2014/main" id="{B2EB8224-5C7B-6A6D-E598-9C576D964DB1}"/>
-              </a:ext>
-            </a:extLst>
-          </p:cNvPr>
-          <p:cNvPicPr>
-            <a:picLocks noChangeAspect="1"/>
-          </p:cNvPicPr>
-          <p:nvPr/>
-        </p:nvPicPr>
-        <p:blipFill>
-          <a:blip r:embed="rId3">
-            <a:extLst>
-              <a:ext uri="{28A0092B-C50C-407E-A947-70E740481C1C}">
-                <a14:useLocalDpi xmlns:a14="http://schemas.microsoft.com/office/drawing/2010/main" val="0"/>
-              </a:ext>
-            </a:extLst>
-          </a:blip>
-          <a:stretch>
-            <a:fillRect/>
-          </a:stretch>
-        </p:blipFill>
-        <p:spPr>
-          <a:xfrm>
-            <a:off x="6894135" y="4680155"/>
-            <a:ext cx="5191222" cy="1048732"/>
-          </a:xfrm>
-          <a:prstGeom prst="rect">
-            <a:avLst/>
-          </a:prstGeom>
-        </p:spPr>
-      </p:pic>
-    </p:spTree>
-    <p:extLst>
-      <p:ext uri="{BB962C8B-B14F-4D97-AF65-F5344CB8AC3E}">
-        <p14:creationId xmlns:p14="http://schemas.microsoft.com/office/powerpoint/2010/main" val="2916203173"/>
-      </p:ext>
-    </p:extLst>
-  </p:cSld>
-  <p:clrMapOvr>
-    <a:masterClrMapping/>
-  </p:clrMapOvr>
-</p:sld>
-</file>
-
-<file path=ppt/slides/slide12.xml><?xml version="1.0" encoding="utf-8"?>
 <p:sld xmlns:a="http://schemas.openxmlformats.org/drawingml/2006/main" xmlns:r="http://schemas.openxmlformats.org/officeDocument/2006/relationships" xmlns:p="http://schemas.openxmlformats.org/presentationml/2006/main">
   <p:cSld>
     <p:spTree>
@@ -6707,7 +4162,7 @@
           <a:p>
             <a:fld id="{FF00C4FC-38D3-4854-AF00-0F78321D5711}" type="slidenum">
               <a:rPr lang="en-US" smtClean="0"/>
-              <a:t>12</a:t>
+              <a:t>10</a:t>
             </a:fld>
             <a:endParaRPr lang="en-US"/>
           </a:p>
@@ -6761,7 +4216,7 @@
 </p:sld>
 </file>
 
-<file path=ppt/slides/slide13.xml><?xml version="1.0" encoding="utf-8"?>
+<file path=ppt/slides/slide11.xml><?xml version="1.0" encoding="utf-8"?>
 <p:sld xmlns:a="http://schemas.openxmlformats.org/drawingml/2006/main" xmlns:r="http://schemas.openxmlformats.org/officeDocument/2006/relationships" xmlns:p="http://schemas.openxmlformats.org/presentationml/2006/main">
   <p:cSld>
     <p:spTree>
@@ -6965,7 +4420,7 @@
           <a:p>
             <a:fld id="{FF00C4FC-38D3-4854-AF00-0F78321D5711}" type="slidenum">
               <a:rPr lang="en-US" smtClean="0"/>
-              <a:t>13</a:t>
+              <a:t>11</a:t>
             </a:fld>
             <a:endParaRPr lang="en-US"/>
           </a:p>
@@ -7019,7 +4474,7 @@
 </p:sld>
 </file>
 
-<file path=ppt/slides/slide14.xml><?xml version="1.0" encoding="utf-8"?>
+<file path=ppt/slides/slide12.xml><?xml version="1.0" encoding="utf-8"?>
 <p:sld xmlns:a="http://schemas.openxmlformats.org/drawingml/2006/main" xmlns:r="http://schemas.openxmlformats.org/officeDocument/2006/relationships" xmlns:p="http://schemas.openxmlformats.org/presentationml/2006/main">
   <p:cSld>
     <p:spTree>
@@ -7247,7 +4702,7 @@
           <a:p>
             <a:fld id="{FF00C4FC-38D3-4854-AF00-0F78321D5711}" type="slidenum">
               <a:rPr lang="en-US" smtClean="0"/>
-              <a:t>14</a:t>
+              <a:t>12</a:t>
             </a:fld>
             <a:endParaRPr lang="en-US"/>
           </a:p>
@@ -7301,7 +4756,7 @@
 </p:sld>
 </file>
 
-<file path=ppt/slides/slide15.xml><?xml version="1.0" encoding="utf-8"?>
+<file path=ppt/slides/slide13.xml><?xml version="1.0" encoding="utf-8"?>
 <p:sld xmlns:a="http://schemas.openxmlformats.org/drawingml/2006/main" xmlns:r="http://schemas.openxmlformats.org/officeDocument/2006/relationships" xmlns:p="http://schemas.openxmlformats.org/presentationml/2006/main">
   <p:cSld>
     <p:spTree>
@@ -7514,7 +4969,7 @@
           <a:p>
             <a:fld id="{FF00C4FC-38D3-4854-AF00-0F78321D5711}" type="slidenum">
               <a:rPr lang="en-US" smtClean="0"/>
-              <a:t>15</a:t>
+              <a:t>13</a:t>
             </a:fld>
             <a:endParaRPr lang="en-US"/>
           </a:p>
@@ -7569,7 +5024,7 @@
 </p:sld>
 </file>
 
-<file path=ppt/slides/slide16.xml><?xml version="1.0" encoding="utf-8"?>
+<file path=ppt/slides/slide14.xml><?xml version="1.0" encoding="utf-8"?>
 <p:sld xmlns:a="http://schemas.openxmlformats.org/drawingml/2006/main" xmlns:r="http://schemas.openxmlformats.org/officeDocument/2006/relationships" xmlns:p="http://schemas.openxmlformats.org/presentationml/2006/main">
   <p:cSld>
     <p:spTree>
@@ -7764,7 +5219,7 @@
           <a:p>
             <a:fld id="{FF00C4FC-38D3-4854-AF00-0F78321D5711}" type="slidenum">
               <a:rPr lang="en-US" smtClean="0"/>
-              <a:t>16</a:t>
+              <a:t>14</a:t>
             </a:fld>
             <a:endParaRPr lang="en-US"/>
           </a:p>
@@ -7819,7 +5274,974 @@
 </p:sld>
 </file>
 
+<file path=ppt/slides/slide15.xml><?xml version="1.0" encoding="utf-8"?>
+<p:sld xmlns:a="http://schemas.openxmlformats.org/drawingml/2006/main" xmlns:r="http://schemas.openxmlformats.org/officeDocument/2006/relationships" xmlns:p="http://schemas.openxmlformats.org/presentationml/2006/main">
+  <p:cSld>
+    <p:spTree>
+      <p:nvGrpSpPr>
+        <p:cNvPr id="1" name="">
+          <a:extLst>
+            <a:ext uri="{FF2B5EF4-FFF2-40B4-BE49-F238E27FC236}">
+              <a16:creationId xmlns:a16="http://schemas.microsoft.com/office/drawing/2014/main" id="{110E04E0-8189-1ED0-DCEA-B1DBD3D1600C}"/>
+            </a:ext>
+          </a:extLst>
+        </p:cNvPr>
+        <p:cNvGrpSpPr/>
+        <p:nvPr/>
+      </p:nvGrpSpPr>
+      <p:grpSpPr>
+        <a:xfrm>
+          <a:off x="0" y="0"/>
+          <a:ext cx="0" cy="0"/>
+          <a:chOff x="0" y="0"/>
+          <a:chExt cx="0" cy="0"/>
+        </a:xfrm>
+      </p:grpSpPr>
+      <p:sp>
+        <p:nvSpPr>
+          <p:cNvPr id="2" name="Title 1">
+            <a:extLst>
+              <a:ext uri="{FF2B5EF4-FFF2-40B4-BE49-F238E27FC236}">
+                <a16:creationId xmlns:a16="http://schemas.microsoft.com/office/drawing/2014/main" id="{AE6AEB09-AD10-2A81-C0B5-F2EA78138E31}"/>
+              </a:ext>
+            </a:extLst>
+          </p:cNvPr>
+          <p:cNvSpPr>
+            <a:spLocks noGrp="1"/>
+          </p:cNvSpPr>
+          <p:nvPr>
+            <p:ph type="title" idx="4294967295"/>
+          </p:nvPr>
+        </p:nvSpPr>
+        <p:spPr>
+          <a:xfrm>
+            <a:off x="258750" y="176213"/>
+            <a:ext cx="10639437" cy="692150"/>
+          </a:xfrm>
+        </p:spPr>
+        <p:txBody>
+          <a:bodyPr anchor="t">
+            <a:normAutofit fontScale="90000"/>
+          </a:bodyPr>
+          <a:lstStyle/>
+          <a:p>
+            <a:r>
+              <a:rPr lang="en-US" dirty="0"/>
+              <a:t>Memory management – paging</a:t>
+            </a:r>
+          </a:p>
+        </p:txBody>
+      </p:sp>
+      <p:sp>
+        <p:nvSpPr>
+          <p:cNvPr id="4" name="Content Placeholder 2">
+            <a:extLst>
+              <a:ext uri="{FF2B5EF4-FFF2-40B4-BE49-F238E27FC236}">
+                <a16:creationId xmlns:a16="http://schemas.microsoft.com/office/drawing/2014/main" id="{FFF4DAB1-7150-37F1-4E89-64F0D1876C59}"/>
+              </a:ext>
+            </a:extLst>
+          </p:cNvPr>
+          <p:cNvSpPr>
+            <a:spLocks noGrp="1"/>
+          </p:cNvSpPr>
+          <p:nvPr>
+            <p:ph idx="4294967295"/>
+          </p:nvPr>
+        </p:nvSpPr>
+        <p:spPr>
+          <a:xfrm>
+            <a:off x="217089" y="868363"/>
+            <a:ext cx="6341028" cy="5137150"/>
+          </a:xfrm>
+        </p:spPr>
+        <p:txBody>
+          <a:bodyPr vert="horz" lIns="91440" tIns="45720" rIns="91440" bIns="45720" rtlCol="0" anchor="t">
+            <a:normAutofit fontScale="92500" lnSpcReduction="10000"/>
+          </a:bodyPr>
+          <a:lstStyle/>
+          <a:p>
+            <a:pPr>
+              <a:buFont typeface="Arial" panose="020B0604020202020204" pitchFamily="34" charset="0"/>
+              <a:buChar char="•"/>
+            </a:pPr>
+            <a:r>
+              <a:rPr lang="en-US" sz="2400" dirty="0"/>
+              <a:t>In the paging memory management , the main memory is segmented into frames which is represented by </a:t>
+            </a:r>
+            <a:r>
+              <a:rPr lang="en-US" sz="2400" dirty="0" err="1"/>
+              <a:t>mem_per_frame</a:t>
+            </a:r>
+            <a:r>
+              <a:rPr lang="en-US" sz="2400" dirty="0"/>
+              <a:t>.  </a:t>
+            </a:r>
+          </a:p>
+          <a:p>
+            <a:r>
+              <a:rPr lang="en-US" sz="2400">
+                <a:ea typeface="Calibri"/>
+                <a:cs typeface="Calibri"/>
+              </a:rPr>
+              <a:t>The character of vectors named "memory" contains the values "F" if memory frame is free and "O" if memory frame is occupied.</a:t>
+            </a:r>
+          </a:p>
+          <a:p>
+            <a:pPr>
+              <a:buFont typeface="Arial" panose="020B0604020202020204" pitchFamily="34" charset="0"/>
+              <a:buChar char="•"/>
+            </a:pPr>
+            <a:r>
+              <a:rPr lang="en-US" sz="2400" dirty="0" err="1"/>
+              <a:t>num_paged_in</a:t>
+            </a:r>
+            <a:r>
+              <a:rPr lang="en-US" sz="2400" dirty="0"/>
+              <a:t> and </a:t>
+            </a:r>
+            <a:r>
+              <a:rPr lang="en-US" sz="2400" dirty="0" err="1"/>
+              <a:t>num_paged_out</a:t>
+            </a:r>
+            <a:r>
+              <a:rPr lang="en-US" sz="2400" dirty="0"/>
+              <a:t> counts the number of paged in and paged out</a:t>
+            </a:r>
+            <a:r>
+              <a:rPr lang="en-US" sz="2400"/>
+              <a:t>.</a:t>
+            </a:r>
+            <a:endParaRPr lang="en-US" sz="2400">
+              <a:ea typeface="Calibri"/>
+              <a:cs typeface="Calibri"/>
+            </a:endParaRPr>
+          </a:p>
+          <a:p>
+            <a:r>
+              <a:rPr lang="en-US" sz="2400">
+                <a:ea typeface="Calibri"/>
+                <a:cs typeface="Calibri"/>
+              </a:rPr>
+              <a:t>Allocate() method allocates the process in the memory through the use of helper methods such as </a:t>
+            </a:r>
+            <a:r>
+              <a:rPr lang="en-US" sz="2400" err="1">
+                <a:ea typeface="Calibri"/>
+                <a:cs typeface="Calibri"/>
+              </a:rPr>
+              <a:t>canAllocate</a:t>
+            </a:r>
+            <a:r>
+              <a:rPr lang="en-US" sz="2400">
+                <a:ea typeface="Calibri"/>
+                <a:cs typeface="Calibri"/>
+              </a:rPr>
+              <a:t>(), </a:t>
+            </a:r>
+            <a:r>
+              <a:rPr lang="en-US" sz="2400" err="1">
+                <a:ea typeface="Calibri"/>
+                <a:cs typeface="Calibri"/>
+              </a:rPr>
+              <a:t>allocateAt</a:t>
+            </a:r>
+            <a:r>
+              <a:rPr lang="en-US" sz="2400">
+                <a:ea typeface="Calibri"/>
+                <a:cs typeface="Calibri"/>
+              </a:rPr>
+              <a:t>(), </a:t>
+            </a:r>
+            <a:r>
+              <a:rPr lang="en-US" sz="2400" err="1">
+                <a:ea typeface="Calibri"/>
+                <a:cs typeface="Calibri"/>
+              </a:rPr>
+              <a:t>getAvailableFrames</a:t>
+            </a:r>
+            <a:r>
+              <a:rPr lang="en-US" sz="2400">
+                <a:ea typeface="Calibri"/>
+                <a:cs typeface="Calibri"/>
+              </a:rPr>
+              <a:t>(), etc.</a:t>
+            </a:r>
+          </a:p>
+          <a:p>
+            <a:r>
+              <a:rPr lang="en-US" sz="2400">
+                <a:ea typeface="Calibri"/>
+                <a:cs typeface="Calibri"/>
+              </a:rPr>
+              <a:t>Deallocate() method deallocates the process in the memory. The process is removed from the memory </a:t>
+            </a:r>
+            <a:r>
+              <a:rPr lang="en-US" sz="2400" err="1">
+                <a:ea typeface="Calibri"/>
+                <a:cs typeface="Calibri"/>
+              </a:rPr>
+              <a:t>allocationMap</a:t>
+            </a:r>
+            <a:r>
+              <a:rPr lang="en-US" sz="2400">
+                <a:ea typeface="Calibri"/>
+                <a:cs typeface="Calibri"/>
+              </a:rPr>
+              <a:t> and the memory frames are set to "F" signifying that the frame is free.</a:t>
+            </a:r>
+          </a:p>
+          <a:p>
+            <a:pPr>
+              <a:buFont typeface="Arial" panose="020B0604020202020204" pitchFamily="34" charset="0"/>
+              <a:buChar char="•"/>
+            </a:pPr>
+            <a:endParaRPr lang="en-US" sz="2400">
+              <a:ea typeface="Calibri"/>
+              <a:cs typeface="Calibri"/>
+            </a:endParaRPr>
+          </a:p>
+          <a:p>
+            <a:pPr>
+              <a:buFont typeface="Arial" panose="020B0604020202020204" pitchFamily="34" charset="0"/>
+              <a:buChar char="•"/>
+            </a:pPr>
+            <a:endParaRPr lang="en-US" sz="2400" dirty="0"/>
+          </a:p>
+          <a:p>
+            <a:endParaRPr lang="en-US" sz="2400">
+              <a:ea typeface="Calibri" panose="020F0502020204030204"/>
+              <a:cs typeface="Calibri" panose="020F0502020204030204"/>
+            </a:endParaRPr>
+          </a:p>
+          <a:p>
+            <a:endParaRPr lang="en-US" sz="2400">
+              <a:ea typeface="Calibri" panose="020F0502020204030204"/>
+              <a:cs typeface="Calibri" panose="020F0502020204030204"/>
+            </a:endParaRPr>
+          </a:p>
+        </p:txBody>
+      </p:sp>
+      <p:sp>
+        <p:nvSpPr>
+          <p:cNvPr id="5" name="Slide Number Placeholder 4">
+            <a:extLst>
+              <a:ext uri="{FF2B5EF4-FFF2-40B4-BE49-F238E27FC236}">
+                <a16:creationId xmlns:a16="http://schemas.microsoft.com/office/drawing/2014/main" id="{36A278B7-BE83-0DAF-94BF-3CF2FC4AA9B8}"/>
+              </a:ext>
+            </a:extLst>
+          </p:cNvPr>
+          <p:cNvSpPr>
+            <a:spLocks noGrp="1"/>
+          </p:cNvSpPr>
+          <p:nvPr>
+            <p:ph type="sldNum" sz="quarter" idx="12"/>
+          </p:nvPr>
+        </p:nvSpPr>
+        <p:spPr/>
+        <p:txBody>
+          <a:bodyPr/>
+          <a:lstStyle/>
+          <a:p>
+            <a:fld id="{FF00C4FC-38D3-4854-AF00-0F78321D5711}" type="slidenum">
+              <a:rPr lang="en-US" smtClean="0"/>
+              <a:t>15</a:t>
+            </a:fld>
+            <a:endParaRPr lang="en-US"/>
+          </a:p>
+        </p:txBody>
+      </p:sp>
+      <p:pic>
+        <p:nvPicPr>
+          <p:cNvPr id="6" name="Picture 5">
+            <a:extLst>
+              <a:ext uri="{FF2B5EF4-FFF2-40B4-BE49-F238E27FC236}">
+                <a16:creationId xmlns:a16="http://schemas.microsoft.com/office/drawing/2014/main" id="{40A03412-7B0B-81DB-AD91-B94559012D94}"/>
+              </a:ext>
+            </a:extLst>
+          </p:cNvPr>
+          <p:cNvPicPr>
+            <a:picLocks noChangeAspect="1"/>
+          </p:cNvPicPr>
+          <p:nvPr/>
+        </p:nvPicPr>
+        <p:blipFill>
+          <a:blip r:embed="rId2"/>
+          <a:stretch>
+            <a:fillRect/>
+          </a:stretch>
+        </p:blipFill>
+        <p:spPr>
+          <a:xfrm>
+            <a:off x="7549090" y="-2494"/>
+            <a:ext cx="3557872" cy="1177851"/>
+          </a:xfrm>
+          <a:prstGeom prst="rect">
+            <a:avLst/>
+          </a:prstGeom>
+        </p:spPr>
+      </p:pic>
+      <p:pic>
+        <p:nvPicPr>
+          <p:cNvPr id="3" name="Picture 2" descr="A computer screen shot of a program&#10;&#10;Description automatically generated">
+            <a:extLst>
+              <a:ext uri="{FF2B5EF4-FFF2-40B4-BE49-F238E27FC236}">
+                <a16:creationId xmlns:a16="http://schemas.microsoft.com/office/drawing/2014/main" id="{E81840CE-E5EA-897F-A282-53E45136FBF1}"/>
+              </a:ext>
+            </a:extLst>
+          </p:cNvPr>
+          <p:cNvPicPr>
+            <a:picLocks noChangeAspect="1"/>
+          </p:cNvPicPr>
+          <p:nvPr/>
+        </p:nvPicPr>
+        <p:blipFill>
+          <a:blip r:embed="rId3"/>
+          <a:stretch>
+            <a:fillRect/>
+          </a:stretch>
+        </p:blipFill>
+        <p:spPr>
+          <a:xfrm>
+            <a:off x="7542386" y="1356481"/>
+            <a:ext cx="3566085" cy="3014134"/>
+          </a:xfrm>
+          <a:prstGeom prst="rect">
+            <a:avLst/>
+          </a:prstGeom>
+        </p:spPr>
+      </p:pic>
+      <p:pic>
+        <p:nvPicPr>
+          <p:cNvPr id="7" name="Picture 6" descr="A computer screen shot of a program code&#10;&#10;Description automatically generated">
+            <a:extLst>
+              <a:ext uri="{FF2B5EF4-FFF2-40B4-BE49-F238E27FC236}">
+                <a16:creationId xmlns:a16="http://schemas.microsoft.com/office/drawing/2014/main" id="{AA01EBB2-8957-32C0-589C-E530673F32C1}"/>
+              </a:ext>
+            </a:extLst>
+          </p:cNvPr>
+          <p:cNvPicPr>
+            <a:picLocks noChangeAspect="1"/>
+          </p:cNvPicPr>
+          <p:nvPr/>
+        </p:nvPicPr>
+        <p:blipFill>
+          <a:blip r:embed="rId4"/>
+          <a:stretch>
+            <a:fillRect/>
+          </a:stretch>
+        </p:blipFill>
+        <p:spPr>
+          <a:xfrm>
+            <a:off x="7547428" y="4463194"/>
+            <a:ext cx="3689049" cy="2261706"/>
+          </a:xfrm>
+          <a:prstGeom prst="rect">
+            <a:avLst/>
+          </a:prstGeom>
+        </p:spPr>
+      </p:pic>
+    </p:spTree>
+    <p:extLst>
+      <p:ext uri="{BB962C8B-B14F-4D97-AF65-F5344CB8AC3E}">
+        <p14:creationId xmlns:p14="http://schemas.microsoft.com/office/powerpoint/2010/main" val="1085622437"/>
+      </p:ext>
+    </p:extLst>
+  </p:cSld>
+  <p:clrMapOvr>
+    <a:masterClrMapping/>
+  </p:clrMapOvr>
+</p:sld>
+</file>
+
+<file path=ppt/slides/slide16.xml><?xml version="1.0" encoding="utf-8"?>
+<p:sld xmlns:a="http://schemas.openxmlformats.org/drawingml/2006/main" xmlns:r="http://schemas.openxmlformats.org/officeDocument/2006/relationships" xmlns:p="http://schemas.openxmlformats.org/presentationml/2006/main">
+  <p:cSld>
+    <p:spTree>
+      <p:nvGrpSpPr>
+        <p:cNvPr id="1" name="">
+          <a:extLst>
+            <a:ext uri="{FF2B5EF4-FFF2-40B4-BE49-F238E27FC236}">
+              <a16:creationId xmlns:a16="http://schemas.microsoft.com/office/drawing/2014/main" id="{1A462F2F-1594-290D-6666-E38A9FA3F777}"/>
+            </a:ext>
+          </a:extLst>
+        </p:cNvPr>
+        <p:cNvGrpSpPr/>
+        <p:nvPr/>
+      </p:nvGrpSpPr>
+      <p:grpSpPr>
+        <a:xfrm>
+          <a:off x="0" y="0"/>
+          <a:ext cx="0" cy="0"/>
+          <a:chOff x="0" y="0"/>
+          <a:chExt cx="0" cy="0"/>
+        </a:xfrm>
+      </p:grpSpPr>
+      <p:sp>
+        <p:nvSpPr>
+          <p:cNvPr id="2" name="Title 1">
+            <a:extLst>
+              <a:ext uri="{FF2B5EF4-FFF2-40B4-BE49-F238E27FC236}">
+                <a16:creationId xmlns:a16="http://schemas.microsoft.com/office/drawing/2014/main" id="{AD30CB2B-131A-D696-0CED-14C3A6B74B5C}"/>
+              </a:ext>
+            </a:extLst>
+          </p:cNvPr>
+          <p:cNvSpPr>
+            <a:spLocks noGrp="1"/>
+          </p:cNvSpPr>
+          <p:nvPr>
+            <p:ph type="title" idx="4294967295"/>
+          </p:nvPr>
+        </p:nvSpPr>
+        <p:spPr>
+          <a:xfrm>
+            <a:off x="258750" y="176213"/>
+            <a:ext cx="10639437" cy="692150"/>
+          </a:xfrm>
+        </p:spPr>
+        <p:txBody>
+          <a:bodyPr anchor="t">
+            <a:normAutofit fontScale="90000"/>
+          </a:bodyPr>
+          <a:lstStyle/>
+          <a:p>
+            <a:r>
+              <a:rPr lang="en-US" dirty="0"/>
+              <a:t>Memory management – paging</a:t>
+            </a:r>
+          </a:p>
+        </p:txBody>
+      </p:sp>
+      <p:sp>
+        <p:nvSpPr>
+          <p:cNvPr id="4" name="Content Placeholder 2">
+            <a:extLst>
+              <a:ext uri="{FF2B5EF4-FFF2-40B4-BE49-F238E27FC236}">
+                <a16:creationId xmlns:a16="http://schemas.microsoft.com/office/drawing/2014/main" id="{99DD0476-A92B-4720-775F-51450EE1836A}"/>
+              </a:ext>
+            </a:extLst>
+          </p:cNvPr>
+          <p:cNvSpPr>
+            <a:spLocks noGrp="1"/>
+          </p:cNvSpPr>
+          <p:nvPr>
+            <p:ph idx="4294967295"/>
+          </p:nvPr>
+        </p:nvSpPr>
+        <p:spPr>
+          <a:xfrm>
+            <a:off x="217089" y="868363"/>
+            <a:ext cx="6341028" cy="5137150"/>
+          </a:xfrm>
+        </p:spPr>
+        <p:txBody>
+          <a:bodyPr vert="horz" lIns="91440" tIns="45720" rIns="91440" bIns="45720" rtlCol="0" anchor="t">
+            <a:normAutofit fontScale="92500"/>
+          </a:bodyPr>
+          <a:lstStyle/>
+          <a:p>
+            <a:pPr>
+              <a:buFont typeface="Arial,Sans-Serif" panose="020B0604020202020204" pitchFamily="34" charset="0"/>
+              <a:buChar char="•"/>
+            </a:pPr>
+            <a:r>
+              <a:rPr lang="en-US" sz="2400" err="1"/>
+              <a:t>canAllocate</a:t>
+            </a:r>
+            <a:r>
+              <a:rPr lang="en-US" sz="2400" dirty="0"/>
+              <a:t>()</a:t>
+            </a:r>
+            <a:r>
+              <a:rPr lang="en-US" sz="2400"/>
+              <a:t> method</a:t>
+            </a:r>
+            <a:r>
+              <a:rPr lang="en-US" sz="2400" dirty="0"/>
+              <a:t> checks if a frame in a memory is unoccupied or not</a:t>
+            </a:r>
+            <a:endParaRPr lang="en-US" sz="2400">
+              <a:ea typeface="Calibri"/>
+              <a:cs typeface="Calibri"/>
+            </a:endParaRPr>
+          </a:p>
+          <a:p>
+            <a:pPr>
+              <a:buFont typeface="Arial,Sans-Serif" panose="020B0604020202020204" pitchFamily="34" charset="0"/>
+              <a:buChar char="•"/>
+            </a:pPr>
+            <a:r>
+              <a:rPr lang="en-US" sz="2400" err="1"/>
+              <a:t>allocateAt</a:t>
+            </a:r>
+            <a:r>
+              <a:rPr lang="en-US" sz="2400" dirty="0"/>
+              <a:t>()</a:t>
+            </a:r>
+            <a:r>
+              <a:rPr lang="en-US" sz="2400"/>
+              <a:t> method</a:t>
+            </a:r>
+            <a:r>
+              <a:rPr lang="en-US" sz="2400" dirty="0"/>
+              <a:t> that allocates a memory to a process. </a:t>
+            </a:r>
+            <a:endParaRPr lang="en-US"/>
+          </a:p>
+          <a:p>
+            <a:pPr>
+              <a:buFont typeface="Arial,Sans-Serif" panose="020B0604020202020204" pitchFamily="34" charset="0"/>
+              <a:buChar char="•"/>
+            </a:pPr>
+            <a:r>
+              <a:rPr lang="en-US" sz="2400">
+                <a:ea typeface="Calibri"/>
+                <a:cs typeface="Calibri"/>
+              </a:rPr>
+              <a:t>The </a:t>
+            </a:r>
+            <a:r>
+              <a:rPr lang="en-US" sz="2400" err="1">
+                <a:ea typeface="Calibri"/>
+                <a:cs typeface="Calibri"/>
+              </a:rPr>
+              <a:t>backingStore</a:t>
+            </a:r>
+            <a:r>
+              <a:rPr lang="en-US" sz="2400">
+                <a:ea typeface="Calibri"/>
+                <a:cs typeface="Calibri"/>
+              </a:rPr>
+              <a:t>() method finds a process in the memory that is not "RUNNING", deallocates it and stores it in the </a:t>
+            </a:r>
+            <a:r>
+              <a:rPr lang="en-US" sz="2400" err="1">
+                <a:ea typeface="Calibri"/>
+                <a:cs typeface="Calibri"/>
+              </a:rPr>
+              <a:t>backing_store</a:t>
+            </a:r>
+            <a:r>
+              <a:rPr lang="en-US" sz="2400">
+                <a:ea typeface="Calibri"/>
+                <a:cs typeface="Calibri"/>
+              </a:rPr>
+              <a:t> folder with the name &lt;process.name&gt;.txt.</a:t>
+            </a:r>
+          </a:p>
+          <a:p>
+            <a:pPr>
+              <a:buFont typeface="Arial,Sans-Serif" panose="020B0604020202020204" pitchFamily="34" charset="0"/>
+              <a:buChar char="•"/>
+            </a:pPr>
+            <a:r>
+              <a:rPr lang="en-US" sz="2400">
+                <a:ea typeface="Calibri"/>
+                <a:cs typeface="Calibri"/>
+              </a:rPr>
+              <a:t>If no process is found in the memory that can be stored in the backing store, the function exits.</a:t>
+            </a:r>
+          </a:p>
+          <a:p>
+            <a:pPr>
+              <a:buFont typeface="Arial,Sans-Serif" panose="020B0604020202020204" pitchFamily="34" charset="0"/>
+              <a:buChar char="•"/>
+            </a:pPr>
+            <a:r>
+              <a:rPr lang="en-US" sz="2400">
+                <a:ea typeface="Calibri"/>
+                <a:cs typeface="Calibri"/>
+              </a:rPr>
+              <a:t>The </a:t>
+            </a:r>
+            <a:r>
+              <a:rPr lang="en-US" sz="2400" err="1">
+                <a:ea typeface="Calibri"/>
+                <a:cs typeface="Calibri"/>
+              </a:rPr>
+              <a:t>checkBackingStore</a:t>
+            </a:r>
+            <a:r>
+              <a:rPr lang="en-US" sz="2400">
+                <a:ea typeface="Calibri" panose="020F0502020204030204"/>
+                <a:cs typeface="Calibri" panose="020F0502020204030204"/>
+              </a:rPr>
+              <a:t>() method is for checking if the process has been stored in the backing store. If there is a record, it deletes it from the backing store. This method is called by the allocate() method.</a:t>
+            </a:r>
+          </a:p>
+          <a:p>
+            <a:endParaRPr lang="en-US" sz="2400">
+              <a:ea typeface="Calibri" panose="020F0502020204030204"/>
+              <a:cs typeface="Calibri" panose="020F0502020204030204"/>
+            </a:endParaRPr>
+          </a:p>
+          <a:p>
+            <a:endParaRPr lang="en-US" sz="2400">
+              <a:ea typeface="Calibri" panose="020F0502020204030204"/>
+              <a:cs typeface="Calibri" panose="020F0502020204030204"/>
+            </a:endParaRPr>
+          </a:p>
+          <a:p>
+            <a:endParaRPr lang="en-US" sz="2400">
+              <a:ea typeface="Calibri" panose="020F0502020204030204"/>
+              <a:cs typeface="Calibri" panose="020F0502020204030204"/>
+            </a:endParaRPr>
+          </a:p>
+        </p:txBody>
+      </p:sp>
+      <p:sp>
+        <p:nvSpPr>
+          <p:cNvPr id="5" name="Slide Number Placeholder 4">
+            <a:extLst>
+              <a:ext uri="{FF2B5EF4-FFF2-40B4-BE49-F238E27FC236}">
+                <a16:creationId xmlns:a16="http://schemas.microsoft.com/office/drawing/2014/main" id="{5F154A4A-DC76-2B7D-88ED-97334DF1E49F}"/>
+              </a:ext>
+            </a:extLst>
+          </p:cNvPr>
+          <p:cNvSpPr>
+            <a:spLocks noGrp="1"/>
+          </p:cNvSpPr>
+          <p:nvPr>
+            <p:ph type="sldNum" sz="quarter" idx="12"/>
+          </p:nvPr>
+        </p:nvSpPr>
+        <p:spPr/>
+        <p:txBody>
+          <a:bodyPr/>
+          <a:lstStyle/>
+          <a:p>
+            <a:fld id="{FF00C4FC-38D3-4854-AF00-0F78321D5711}" type="slidenum">
+              <a:rPr lang="en-US" smtClean="0"/>
+              <a:t>16</a:t>
+            </a:fld>
+            <a:endParaRPr lang="en-US"/>
+          </a:p>
+        </p:txBody>
+      </p:sp>
+      <p:pic>
+        <p:nvPicPr>
+          <p:cNvPr id="3" name="Picture 2" descr="A computer screen with text and images&#10;&#10;Description automatically generated">
+            <a:extLst>
+              <a:ext uri="{FF2B5EF4-FFF2-40B4-BE49-F238E27FC236}">
+                <a16:creationId xmlns:a16="http://schemas.microsoft.com/office/drawing/2014/main" id="{43076B5C-B588-CA8F-F208-69135AE1BEDA}"/>
+              </a:ext>
+            </a:extLst>
+          </p:cNvPr>
+          <p:cNvPicPr>
+            <a:picLocks noChangeAspect="1"/>
+          </p:cNvPicPr>
+          <p:nvPr/>
+        </p:nvPicPr>
+        <p:blipFill>
+          <a:blip r:embed="rId2"/>
+          <a:stretch>
+            <a:fillRect/>
+          </a:stretch>
+        </p:blipFill>
+        <p:spPr>
+          <a:xfrm>
+            <a:off x="7097486" y="111277"/>
+            <a:ext cx="4673600" cy="1507067"/>
+          </a:xfrm>
+          <a:prstGeom prst="rect">
+            <a:avLst/>
+          </a:prstGeom>
+        </p:spPr>
+      </p:pic>
+      <p:pic>
+        <p:nvPicPr>
+          <p:cNvPr id="7" name="Picture 6" descr="A computer code with green and blue text&#10;&#10;Description automatically generated">
+            <a:extLst>
+              <a:ext uri="{FF2B5EF4-FFF2-40B4-BE49-F238E27FC236}">
+                <a16:creationId xmlns:a16="http://schemas.microsoft.com/office/drawing/2014/main" id="{D76EA293-0906-131E-2435-BA406D101F45}"/>
+              </a:ext>
+            </a:extLst>
+          </p:cNvPr>
+          <p:cNvPicPr>
+            <a:picLocks noChangeAspect="1"/>
+          </p:cNvPicPr>
+          <p:nvPr/>
+        </p:nvPicPr>
+        <p:blipFill>
+          <a:blip r:embed="rId3"/>
+          <a:stretch>
+            <a:fillRect/>
+          </a:stretch>
+        </p:blipFill>
+        <p:spPr>
+          <a:xfrm>
+            <a:off x="7092421" y="1671183"/>
+            <a:ext cx="4357159" cy="1326395"/>
+          </a:xfrm>
+          <a:prstGeom prst="rect">
+            <a:avLst/>
+          </a:prstGeom>
+        </p:spPr>
+      </p:pic>
+      <p:pic>
+        <p:nvPicPr>
+          <p:cNvPr id="9" name="Picture 8" descr="A computer screen shot of a program code&#10;&#10;Description automatically generated">
+            <a:extLst>
+              <a:ext uri="{FF2B5EF4-FFF2-40B4-BE49-F238E27FC236}">
+                <a16:creationId xmlns:a16="http://schemas.microsoft.com/office/drawing/2014/main" id="{5D4FD45D-512A-7A8B-B3AB-C5140AE8D482}"/>
+              </a:ext>
+            </a:extLst>
+          </p:cNvPr>
+          <p:cNvPicPr>
+            <a:picLocks noChangeAspect="1"/>
+          </p:cNvPicPr>
+          <p:nvPr/>
+        </p:nvPicPr>
+        <p:blipFill>
+          <a:blip r:embed="rId4"/>
+          <a:stretch>
+            <a:fillRect/>
+          </a:stretch>
+        </p:blipFill>
+        <p:spPr>
+          <a:xfrm>
+            <a:off x="7314029" y="3004457"/>
+            <a:ext cx="3938135" cy="3340705"/>
+          </a:xfrm>
+          <a:prstGeom prst="rect">
+            <a:avLst/>
+          </a:prstGeom>
+        </p:spPr>
+      </p:pic>
+    </p:spTree>
+    <p:extLst>
+      <p:ext uri="{BB962C8B-B14F-4D97-AF65-F5344CB8AC3E}">
+        <p14:creationId xmlns:p14="http://schemas.microsoft.com/office/powerpoint/2010/main" val="1893091615"/>
+      </p:ext>
+    </p:extLst>
+  </p:cSld>
+  <p:clrMapOvr>
+    <a:masterClrMapping/>
+  </p:clrMapOvr>
+</p:sld>
+</file>
+
 <file path=ppt/slides/slide17.xml><?xml version="1.0" encoding="utf-8"?>
+<p:sld xmlns:a="http://schemas.openxmlformats.org/drawingml/2006/main" xmlns:r="http://schemas.openxmlformats.org/officeDocument/2006/relationships" xmlns:p="http://schemas.openxmlformats.org/presentationml/2006/main">
+  <p:cSld>
+    <p:spTree>
+      <p:nvGrpSpPr>
+        <p:cNvPr id="1" name="">
+          <a:extLst>
+            <a:ext uri="{FF2B5EF4-FFF2-40B4-BE49-F238E27FC236}">
+              <a16:creationId xmlns:a16="http://schemas.microsoft.com/office/drawing/2014/main" id="{564B55FC-6F6A-D6C5-9BC1-8B69DDC8FCED}"/>
+            </a:ext>
+          </a:extLst>
+        </p:cNvPr>
+        <p:cNvGrpSpPr/>
+        <p:nvPr/>
+      </p:nvGrpSpPr>
+      <p:grpSpPr>
+        <a:xfrm>
+          <a:off x="0" y="0"/>
+          <a:ext cx="0" cy="0"/>
+          <a:chOff x="0" y="0"/>
+          <a:chExt cx="0" cy="0"/>
+        </a:xfrm>
+      </p:grpSpPr>
+      <p:sp>
+        <p:nvSpPr>
+          <p:cNvPr id="2" name="Title 1">
+            <a:extLst>
+              <a:ext uri="{FF2B5EF4-FFF2-40B4-BE49-F238E27FC236}">
+                <a16:creationId xmlns:a16="http://schemas.microsoft.com/office/drawing/2014/main" id="{B497B81F-926C-4531-9A8D-9595537A5B9C}"/>
+              </a:ext>
+            </a:extLst>
+          </p:cNvPr>
+          <p:cNvSpPr>
+            <a:spLocks noGrp="1"/>
+          </p:cNvSpPr>
+          <p:nvPr>
+            <p:ph type="title" idx="4294967295"/>
+          </p:nvPr>
+        </p:nvSpPr>
+        <p:spPr>
+          <a:xfrm>
+            <a:off x="258750" y="176213"/>
+            <a:ext cx="10639437" cy="692150"/>
+          </a:xfrm>
+        </p:spPr>
+        <p:txBody>
+          <a:bodyPr anchor="t">
+            <a:normAutofit fontScale="90000"/>
+          </a:bodyPr>
+          <a:lstStyle/>
+          <a:p>
+            <a:r>
+              <a:rPr lang="en-US" dirty="0"/>
+              <a:t>Memory management – flat memory</a:t>
+            </a:r>
+          </a:p>
+        </p:txBody>
+      </p:sp>
+      <p:sp>
+        <p:nvSpPr>
+          <p:cNvPr id="4" name="Content Placeholder 2">
+            <a:extLst>
+              <a:ext uri="{FF2B5EF4-FFF2-40B4-BE49-F238E27FC236}">
+                <a16:creationId xmlns:a16="http://schemas.microsoft.com/office/drawing/2014/main" id="{A38CCA61-BD16-E724-B670-C2320123D545}"/>
+              </a:ext>
+            </a:extLst>
+          </p:cNvPr>
+          <p:cNvSpPr>
+            <a:spLocks noGrp="1"/>
+          </p:cNvSpPr>
+          <p:nvPr>
+            <p:ph idx="4294967295"/>
+          </p:nvPr>
+        </p:nvSpPr>
+        <p:spPr>
+          <a:xfrm>
+            <a:off x="217089" y="868363"/>
+            <a:ext cx="6341028" cy="5137150"/>
+          </a:xfrm>
+        </p:spPr>
+        <p:txBody>
+          <a:bodyPr vert="horz" lIns="91440" tIns="45720" rIns="91440" bIns="45720" rtlCol="0" anchor="t">
+            <a:normAutofit/>
+          </a:bodyPr>
+          <a:lstStyle/>
+          <a:p>
+            <a:r>
+              <a:rPr lang="en-US" sz="2200">
+                <a:ea typeface="Calibri"/>
+                <a:cs typeface="Calibri"/>
+              </a:rPr>
+              <a:t>In the flat memory management , the main memory is segmented into "blocks" wherein </a:t>
+            </a:r>
+            <a:r>
+              <a:rPr lang="en-US" sz="2200" err="1">
+                <a:ea typeface="Calibri"/>
+                <a:cs typeface="Calibri"/>
+              </a:rPr>
+              <a:t>mem_per_block</a:t>
+            </a:r>
+            <a:r>
+              <a:rPr lang="en-US" sz="2200">
+                <a:ea typeface="Calibri"/>
+                <a:cs typeface="Calibri"/>
+              </a:rPr>
+              <a:t> is equal to 1 by default.</a:t>
+            </a:r>
+          </a:p>
+          <a:p>
+            <a:r>
+              <a:rPr lang="en-US" sz="2200">
+                <a:ea typeface="Calibri"/>
+                <a:cs typeface="Calibri"/>
+              </a:rPr>
+              <a:t>All of the methods in the flat memory are almost the same as the implementation with the paging allocator. The only difference is that the memory per block is 1 to signify that the the memory is one single contiguous block.</a:t>
+            </a:r>
+          </a:p>
+        </p:txBody>
+      </p:sp>
+      <p:sp>
+        <p:nvSpPr>
+          <p:cNvPr id="5" name="Slide Number Placeholder 4">
+            <a:extLst>
+              <a:ext uri="{FF2B5EF4-FFF2-40B4-BE49-F238E27FC236}">
+                <a16:creationId xmlns:a16="http://schemas.microsoft.com/office/drawing/2014/main" id="{317BC5CA-4E22-2C26-D7CD-4993B95C1A3A}"/>
+              </a:ext>
+            </a:extLst>
+          </p:cNvPr>
+          <p:cNvSpPr>
+            <a:spLocks noGrp="1"/>
+          </p:cNvSpPr>
+          <p:nvPr>
+            <p:ph type="sldNum" sz="quarter" idx="12"/>
+          </p:nvPr>
+        </p:nvSpPr>
+        <p:spPr/>
+        <p:txBody>
+          <a:bodyPr/>
+          <a:lstStyle/>
+          <a:p>
+            <a:fld id="{FF00C4FC-38D3-4854-AF00-0F78321D5711}" type="slidenum">
+              <a:rPr lang="en-US" smtClean="0"/>
+              <a:t>17</a:t>
+            </a:fld>
+            <a:endParaRPr lang="en-US"/>
+          </a:p>
+        </p:txBody>
+      </p:sp>
+      <p:pic>
+        <p:nvPicPr>
+          <p:cNvPr id="3" name="Picture 2" descr="A black screen with white text&#10;&#10;Description automatically generated">
+            <a:extLst>
+              <a:ext uri="{FF2B5EF4-FFF2-40B4-BE49-F238E27FC236}">
+                <a16:creationId xmlns:a16="http://schemas.microsoft.com/office/drawing/2014/main" id="{886BB1F3-C95D-0B06-24F1-1251C715B920}"/>
+              </a:ext>
+            </a:extLst>
+          </p:cNvPr>
+          <p:cNvPicPr>
+            <a:picLocks noChangeAspect="1"/>
+          </p:cNvPicPr>
+          <p:nvPr/>
+        </p:nvPicPr>
+        <p:blipFill>
+          <a:blip r:embed="rId2"/>
+          <a:stretch>
+            <a:fillRect/>
+          </a:stretch>
+        </p:blipFill>
+        <p:spPr>
+          <a:xfrm>
+            <a:off x="6722432" y="869646"/>
+            <a:ext cx="5010150" cy="1047750"/>
+          </a:xfrm>
+          <a:prstGeom prst="rect">
+            <a:avLst/>
+          </a:prstGeom>
+        </p:spPr>
+      </p:pic>
+      <p:pic>
+        <p:nvPicPr>
+          <p:cNvPr id="6" name="Picture 5" descr="A computer screen shot of a program code&#10;&#10;Description automatically generated">
+            <a:extLst>
+              <a:ext uri="{FF2B5EF4-FFF2-40B4-BE49-F238E27FC236}">
+                <a16:creationId xmlns:a16="http://schemas.microsoft.com/office/drawing/2014/main" id="{101D4D78-8CDB-4852-9B1E-DD464B7F89BB}"/>
+              </a:ext>
+            </a:extLst>
+          </p:cNvPr>
+          <p:cNvPicPr>
+            <a:picLocks noChangeAspect="1"/>
+          </p:cNvPicPr>
+          <p:nvPr/>
+        </p:nvPicPr>
+        <p:blipFill>
+          <a:blip r:embed="rId3"/>
+          <a:stretch>
+            <a:fillRect/>
+          </a:stretch>
+        </p:blipFill>
+        <p:spPr>
+          <a:xfrm>
+            <a:off x="6872701" y="2102285"/>
+            <a:ext cx="4709613" cy="4114800"/>
+          </a:xfrm>
+          <a:prstGeom prst="rect">
+            <a:avLst/>
+          </a:prstGeom>
+        </p:spPr>
+      </p:pic>
+    </p:spTree>
+    <p:extLst>
+      <p:ext uri="{BB962C8B-B14F-4D97-AF65-F5344CB8AC3E}">
+        <p14:creationId xmlns:p14="http://schemas.microsoft.com/office/powerpoint/2010/main" val="2032071881"/>
+      </p:ext>
+    </p:extLst>
+  </p:cSld>
+  <p:clrMapOvr>
+    <a:masterClrMapping/>
+  </p:clrMapOvr>
+</p:sld>
+</file>
+
+<file path=ppt/slides/slide18.xml><?xml version="1.0" encoding="utf-8"?>
 <p:sld xmlns:a="http://schemas.openxmlformats.org/drawingml/2006/main" xmlns:r="http://schemas.openxmlformats.org/officeDocument/2006/relationships" xmlns:p="http://schemas.openxmlformats.org/presentationml/2006/main">
   <p:cSld>
     <p:spTree>
@@ -7952,7 +6374,7 @@
           <a:p>
             <a:fld id="{FF00C4FC-38D3-4854-AF00-0F78321D5711}" type="slidenum">
               <a:rPr lang="en-US" smtClean="0"/>
-              <a:t>17</a:t>
+              <a:t>18</a:t>
             </a:fld>
             <a:endParaRPr lang="en-US"/>
           </a:p>
@@ -8540,13 +6962,7 @@
   <p:cSld>
     <p:spTree>
       <p:nvGrpSpPr>
-        <p:cNvPr id="1" name="">
-          <a:extLst>
-            <a:ext uri="{FF2B5EF4-FFF2-40B4-BE49-F238E27FC236}">
-              <a16:creationId xmlns:a16="http://schemas.microsoft.com/office/drawing/2014/main" id="{A0895D74-F7DD-5CE9-68DC-23BB41218631}"/>
-            </a:ext>
-          </a:extLst>
-        </p:cNvPr>
+        <p:cNvPr id="1" name=""/>
         <p:cNvGrpSpPr/>
         <p:nvPr/>
       </p:nvGrpSpPr>
@@ -8563,7 +6979,7 @@
           <p:cNvPr id="2" name="Title 1">
             <a:extLst>
               <a:ext uri="{FF2B5EF4-FFF2-40B4-BE49-F238E27FC236}">
-                <a16:creationId xmlns:a16="http://schemas.microsoft.com/office/drawing/2014/main" id="{609548D7-F6C8-A7D6-75C4-D7B1D4D515FE}"/>
+                <a16:creationId xmlns:a16="http://schemas.microsoft.com/office/drawing/2014/main" id="{D0FAFE88-3BB3-4A37-8738-A7A760A9234D}"/>
               </a:ext>
             </a:extLst>
           </p:cNvPr>
@@ -8587,8 +7003,8 @@
           <a:lstStyle/>
           <a:p>
             <a:r>
-              <a:rPr lang="en-US" dirty="0"/>
-              <a:t>Console UI implementation</a:t>
+              <a:rPr lang="en-US"/>
+              <a:t>Command Recognition</a:t>
             </a:r>
           </a:p>
         </p:txBody>
@@ -8598,7 +7014,7 @@
           <p:cNvPr id="4" name="Content Placeholder 2">
             <a:extLst>
               <a:ext uri="{FF2B5EF4-FFF2-40B4-BE49-F238E27FC236}">
-                <a16:creationId xmlns:a16="http://schemas.microsoft.com/office/drawing/2014/main" id="{04A01B69-D9A4-259B-940E-0E69C82E7738}"/>
+                <a16:creationId xmlns:a16="http://schemas.microsoft.com/office/drawing/2014/main" id="{900A3B5E-0D88-40D3-ADEE-967AB121DC82}"/>
               </a:ext>
             </a:extLst>
           </p:cNvPr>
@@ -8611,105 +7027,130 @@
         </p:nvSpPr>
         <p:spPr>
           <a:xfrm>
-            <a:off x="217089" y="868362"/>
-            <a:ext cx="5581545" cy="5989637"/>
+            <a:off x="248403" y="868362"/>
+            <a:ext cx="6362675" cy="5652962"/>
           </a:xfrm>
         </p:spPr>
         <p:txBody>
-          <a:bodyPr>
-            <a:normAutofit fontScale="92500" lnSpcReduction="10000"/>
+          <a:bodyPr vert="horz" lIns="91440" tIns="45720" rIns="91440" bIns="45720" rtlCol="0" anchor="t">
+            <a:normAutofit/>
           </a:bodyPr>
           <a:lstStyle/>
           <a:p>
-            <a:pPr>
-              <a:buFont typeface="Arial" panose="020B0604020202020204" pitchFamily="34" charset="0"/>
-              <a:buChar char="•"/>
-            </a:pPr>
-            <a:r>
-              <a:rPr lang="en-US" sz="2400" dirty="0"/>
-              <a:t>The Console UI is implemented in the </a:t>
-            </a:r>
-            <a:r>
-              <a:rPr lang="en-US" sz="2400" dirty="0" err="1"/>
+            <a:r>
+              <a:rPr lang="en-US" sz="2400">
+                <a:ea typeface="Calibri"/>
+                <a:cs typeface="Calibri"/>
+              </a:rPr>
+              <a:t>For the "</a:t>
+            </a:r>
+            <a:r>
+              <a:rPr lang="en-US" sz="2400" err="1">
+                <a:ea typeface="Calibri"/>
+                <a:cs typeface="Calibri"/>
+              </a:rPr>
+              <a:t>vmstat</a:t>
+            </a:r>
+            <a:r>
+              <a:rPr lang="en-US" sz="2400">
+                <a:ea typeface="Calibri"/>
+                <a:cs typeface="Calibri"/>
+              </a:rPr>
+              <a:t>" command, the </a:t>
+            </a:r>
+            <a:r>
+              <a:rPr lang="en-US" sz="2400" err="1">
+                <a:ea typeface="Calibri"/>
+                <a:cs typeface="Calibri"/>
+              </a:rPr>
+              <a:t>vmstatScreen</a:t>
+            </a:r>
+            <a:r>
+              <a:rPr lang="en-US" sz="2400">
+                <a:ea typeface="Calibri"/>
+                <a:cs typeface="Calibri"/>
+              </a:rPr>
+              <a:t>() method of the </a:t>
+            </a:r>
+            <a:r>
+              <a:rPr lang="en-US" sz="2400" err="1">
+                <a:ea typeface="Calibri"/>
+                <a:cs typeface="Calibri"/>
+              </a:rPr>
               <a:t>CliLayout</a:t>
             </a:r>
             <a:r>
-              <a:rPr lang="en-US" sz="2400" dirty="0"/>
-              <a:t> class wherein it contains methods to display various UI layouts such as the main screen, screen –r and screen –ls screen, etc.</a:t>
-            </a:r>
-          </a:p>
-          <a:p>
-            <a:r>
-              <a:rPr lang="en-US" sz="2400" dirty="0"/>
-              <a:t>Its methods is called by the </a:t>
-            </a:r>
-            <a:r>
-              <a:rPr lang="en-US" sz="2400" dirty="0" err="1"/>
-              <a:t>CliManager</a:t>
-            </a:r>
-            <a:r>
-              <a:rPr lang="en-US" sz="2400" dirty="0"/>
-              <a:t> which is the class that acts as an intermediary between all of the classes in the program.</a:t>
-            </a:r>
-          </a:p>
-          <a:p>
-            <a:pPr>
-              <a:buFont typeface="Arial" panose="020B0604020202020204" pitchFamily="34" charset="0"/>
-              <a:buChar char="•"/>
-            </a:pPr>
-            <a:r>
-              <a:rPr lang="en-US" sz="2400" dirty="0"/>
-              <a:t>screen –r &lt;process name&gt; command switches to a different screen, and access these information: </a:t>
-            </a:r>
-          </a:p>
-          <a:p>
-            <a:pPr lvl="1"/>
-            <a:r>
-              <a:rPr lang="en-US" dirty="0"/>
-              <a:t>process id</a:t>
-            </a:r>
-          </a:p>
-          <a:p>
-            <a:pPr lvl="1"/>
-            <a:r>
-              <a:rPr lang="en-US" dirty="0"/>
-              <a:t>id number</a:t>
-            </a:r>
-          </a:p>
-          <a:p>
-            <a:pPr lvl="1"/>
-            <a:r>
-              <a:rPr lang="en-US" dirty="0"/>
-              <a:t>current/total lines of code</a:t>
-            </a:r>
-          </a:p>
-          <a:p>
-            <a:pPr lvl="1"/>
-            <a:r>
-              <a:rPr lang="en-US" dirty="0"/>
-              <a:t>timestamp</a:t>
-            </a:r>
-          </a:p>
-          <a:p>
-            <a:r>
-              <a:rPr lang="en-US" sz="2400" dirty="0"/>
-              <a:t>within the screen-r screen, it is also possible to type the ”process-</a:t>
-            </a:r>
-            <a:r>
-              <a:rPr lang="en-US" sz="2400" dirty="0" err="1"/>
+              <a:rPr lang="en-US" sz="2400">
+                <a:ea typeface="Calibri"/>
+                <a:cs typeface="Calibri"/>
+              </a:rPr>
+              <a:t> class is called with string vector as its parameter which contains the information needed to be displayed. It also contains the format for the command.</a:t>
+            </a:r>
+          </a:p>
+          <a:p>
+            <a:r>
+              <a:rPr lang="en-US" sz="2400">
+                <a:ea typeface="Calibri"/>
+                <a:cs typeface="Calibri"/>
+              </a:rPr>
+              <a:t>For "process-</a:t>
+            </a:r>
+            <a:r>
+              <a:rPr lang="en-US" sz="2400" err="1">
+                <a:ea typeface="Calibri"/>
+                <a:cs typeface="Calibri"/>
+              </a:rPr>
               <a:t>smi</a:t>
             </a:r>
             <a:r>
-              <a:rPr lang="en-US" sz="2400" dirty="0"/>
-              <a:t>” command to display the status of a certain process whether it’s currently running or finished.</a:t>
-            </a:r>
-          </a:p>
-          <a:p>
-            <a:pPr>
-              <a:buFont typeface="Arial" panose="020B0604020202020204" pitchFamily="34" charset="0"/>
-              <a:buChar char="•"/>
-            </a:pPr>
-            <a:endParaRPr lang="en-US" sz="2400" dirty="0"/>
+              <a:rPr lang="en-US" sz="2400">
+                <a:ea typeface="Calibri"/>
+                <a:cs typeface="Calibri"/>
+              </a:rPr>
+              <a:t>" command, similarly to the "</a:t>
+            </a:r>
+            <a:r>
+              <a:rPr lang="en-US" sz="2400" err="1">
+                <a:ea typeface="Calibri"/>
+                <a:cs typeface="Calibri"/>
+              </a:rPr>
+              <a:t>vmstat</a:t>
+            </a:r>
+            <a:r>
+              <a:rPr lang="en-US" sz="2400">
+                <a:ea typeface="Calibri"/>
+                <a:cs typeface="Calibri"/>
+              </a:rPr>
+              <a:t>" command, it is implemented as a method of the </a:t>
+            </a:r>
+            <a:r>
+              <a:rPr lang="en-US" sz="2400" err="1">
+                <a:ea typeface="Calibri"/>
+                <a:cs typeface="Calibri"/>
+              </a:rPr>
+              <a:t>CliLayout</a:t>
+            </a:r>
+            <a:r>
+              <a:rPr lang="en-US" sz="2400">
+                <a:ea typeface="Calibri"/>
+                <a:cs typeface="Calibri"/>
+              </a:rPr>
+              <a:t> class with a string vector as its parameter. The vector contains information such as </a:t>
+            </a:r>
+            <a:r>
+              <a:rPr lang="en-US" sz="2400" err="1">
+                <a:ea typeface="Calibri"/>
+                <a:cs typeface="Calibri"/>
+              </a:rPr>
+              <a:t>cpu</a:t>
+            </a:r>
+            <a:r>
+              <a:rPr lang="en-US" sz="2400">
+                <a:ea typeface="Calibri"/>
+                <a:cs typeface="Calibri"/>
+              </a:rPr>
+              <a:t> utilization, used memory, total memory, memory utilization, and process information that are currently running in the memory.</a:t>
+            </a:r>
           </a:p>
         </p:txBody>
       </p:sp>
@@ -8718,7 +7159,7 @@
           <p:cNvPr id="5" name="Slide Number Placeholder 4">
             <a:extLst>
               <a:ext uri="{FF2B5EF4-FFF2-40B4-BE49-F238E27FC236}">
-                <a16:creationId xmlns:a16="http://schemas.microsoft.com/office/drawing/2014/main" id="{1596B9D4-65C6-76FE-2DB0-33081ECCED80}"/>
+                <a16:creationId xmlns:a16="http://schemas.microsoft.com/office/drawing/2014/main" id="{418E8B37-F70B-EB6E-F835-8C1F6D824931}"/>
               </a:ext>
             </a:extLst>
           </p:cNvPr>
@@ -8744,10 +7185,10 @@
       </p:sp>
       <p:pic>
         <p:nvPicPr>
-          <p:cNvPr id="6" name="Picture 5" descr="A computer screen with text&#10;&#10;Description automatically generated">
-            <a:extLst>
-              <a:ext uri="{FF2B5EF4-FFF2-40B4-BE49-F238E27FC236}">
-                <a16:creationId xmlns:a16="http://schemas.microsoft.com/office/drawing/2014/main" id="{56457F87-C328-4663-B866-85E994CE43AD}"/>
+          <p:cNvPr id="3" name="Picture 2" descr="A computer screen shot of a program code&#10;&#10;Description automatically generated">
+            <a:extLst>
+              <a:ext uri="{FF2B5EF4-FFF2-40B4-BE49-F238E27FC236}">
+                <a16:creationId xmlns:a16="http://schemas.microsoft.com/office/drawing/2014/main" id="{11F99DA0-9C5C-C1C8-4C28-CFB5211040E8}"/>
               </a:ext>
             </a:extLst>
           </p:cNvPr>
@@ -8757,21 +7198,15 @@
           <p:nvPr/>
         </p:nvPicPr>
         <p:blipFill>
-          <a:blip r:embed="rId2">
-            <a:extLst>
-              <a:ext uri="{28A0092B-C50C-407E-A947-70E740481C1C}">
-                <a14:useLocalDpi xmlns:a14="http://schemas.microsoft.com/office/drawing/2010/main" val="0"/>
-              </a:ext>
-            </a:extLst>
-          </a:blip>
+          <a:blip r:embed="rId2"/>
           <a:stretch>
             <a:fillRect/>
           </a:stretch>
         </p:blipFill>
         <p:spPr>
           <a:xfrm>
-            <a:off x="6593361" y="522288"/>
-            <a:ext cx="5318497" cy="1583924"/>
+            <a:off x="7045890" y="177879"/>
+            <a:ext cx="4373672" cy="3015831"/>
           </a:xfrm>
           <a:prstGeom prst="rect">
             <a:avLst/>
@@ -8780,10 +7215,10 @@
       </p:pic>
       <p:pic>
         <p:nvPicPr>
-          <p:cNvPr id="8" name="Picture 7" descr="A computer screen shot of code&#10;&#10;Description automatically generated">
-            <a:extLst>
-              <a:ext uri="{FF2B5EF4-FFF2-40B4-BE49-F238E27FC236}">
-                <a16:creationId xmlns:a16="http://schemas.microsoft.com/office/drawing/2014/main" id="{6B438470-CFFA-57A3-C79B-02BD45DDA57B}"/>
+          <p:cNvPr id="6" name="Picture 5" descr="A screen shot of a computer program&#10;&#10;Description automatically generated">
+            <a:extLst>
+              <a:ext uri="{FF2B5EF4-FFF2-40B4-BE49-F238E27FC236}">
+                <a16:creationId xmlns:a16="http://schemas.microsoft.com/office/drawing/2014/main" id="{A4DCB1FC-E4F8-3C12-D082-EE10088030FA}"/>
               </a:ext>
             </a:extLst>
           </p:cNvPr>
@@ -8793,93 +7228,15 @@
           <p:nvPr/>
         </p:nvPicPr>
         <p:blipFill>
-          <a:blip r:embed="rId3">
-            <a:extLst>
-              <a:ext uri="{28A0092B-C50C-407E-A947-70E740481C1C}">
-                <a14:useLocalDpi xmlns:a14="http://schemas.microsoft.com/office/drawing/2010/main" val="0"/>
-              </a:ext>
-            </a:extLst>
-          </a:blip>
+          <a:blip r:embed="rId3"/>
           <a:stretch>
             <a:fillRect/>
           </a:stretch>
         </p:blipFill>
         <p:spPr>
           <a:xfrm>
-            <a:off x="6732895" y="2246364"/>
-            <a:ext cx="5039428" cy="2505425"/>
-          </a:xfrm>
-          <a:prstGeom prst="rect">
-            <a:avLst/>
-          </a:prstGeom>
-        </p:spPr>
-      </p:pic>
-      <p:pic>
-        <p:nvPicPr>
-          <p:cNvPr id="7" name="Picture 6" descr="A close-up of a code&#10;&#10;Description automatically generated">
-            <a:extLst>
-              <a:ext uri="{FF2B5EF4-FFF2-40B4-BE49-F238E27FC236}">
-                <a16:creationId xmlns:a16="http://schemas.microsoft.com/office/drawing/2014/main" id="{9697ED0A-87D1-4A1C-F31A-E8CE9693A0F8}"/>
-              </a:ext>
-            </a:extLst>
-          </p:cNvPr>
-          <p:cNvPicPr>
-            <a:picLocks noChangeAspect="1"/>
-          </p:cNvPicPr>
-          <p:nvPr/>
-        </p:nvPicPr>
-        <p:blipFill>
-          <a:blip r:embed="rId4">
-            <a:extLst>
-              <a:ext uri="{28A0092B-C50C-407E-A947-70E740481C1C}">
-                <a14:useLocalDpi xmlns:a14="http://schemas.microsoft.com/office/drawing/2010/main" val="0"/>
-              </a:ext>
-            </a:extLst>
-          </a:blip>
-          <a:stretch>
-            <a:fillRect/>
-          </a:stretch>
-        </p:blipFill>
-        <p:spPr>
-          <a:xfrm>
-            <a:off x="5656708" y="4772425"/>
-            <a:ext cx="3404896" cy="1583923"/>
-          </a:xfrm>
-          <a:prstGeom prst="rect">
-            <a:avLst/>
-          </a:prstGeom>
-        </p:spPr>
-      </p:pic>
-      <p:pic>
-        <p:nvPicPr>
-          <p:cNvPr id="10" name="Picture 9" descr="A screenshot of a computer code&#10;&#10;Description automatically generated">
-            <a:extLst>
-              <a:ext uri="{FF2B5EF4-FFF2-40B4-BE49-F238E27FC236}">
-                <a16:creationId xmlns:a16="http://schemas.microsoft.com/office/drawing/2014/main" id="{2660150C-6DD7-46A7-E9F9-6BC47696A16C}"/>
-              </a:ext>
-            </a:extLst>
-          </p:cNvPr>
-          <p:cNvPicPr>
-            <a:picLocks noChangeAspect="1"/>
-          </p:cNvPicPr>
-          <p:nvPr/>
-        </p:nvPicPr>
-        <p:blipFill>
-          <a:blip r:embed="rId5">
-            <a:extLst>
-              <a:ext uri="{28A0092B-C50C-407E-A947-70E740481C1C}">
-                <a14:useLocalDpi xmlns:a14="http://schemas.microsoft.com/office/drawing/2010/main" val="0"/>
-              </a:ext>
-            </a:extLst>
-          </a:blip>
-          <a:stretch>
-            <a:fillRect/>
-          </a:stretch>
-        </p:blipFill>
-        <p:spPr>
-          <a:xfrm>
-            <a:off x="8736981" y="4904201"/>
-            <a:ext cx="2358482" cy="1294853"/>
+            <a:off x="7987952" y="3301557"/>
+            <a:ext cx="3436068" cy="3196225"/>
           </a:xfrm>
           <a:prstGeom prst="rect">
             <a:avLst/>
@@ -8889,7 +7246,7 @@
     </p:spTree>
     <p:extLst>
       <p:ext uri="{BB962C8B-B14F-4D97-AF65-F5344CB8AC3E}">
-        <p14:creationId xmlns:p14="http://schemas.microsoft.com/office/powerpoint/2010/main" val="3983062372"/>
+        <p14:creationId xmlns:p14="http://schemas.microsoft.com/office/powerpoint/2010/main" val="1950081604"/>
       </p:ext>
     </p:extLst>
   </p:cSld>
@@ -8900,623 +7257,6 @@
 </file>
 
 <file path=ppt/slides/slide5.xml><?xml version="1.0" encoding="utf-8"?>
-<p:sld xmlns:a="http://schemas.openxmlformats.org/drawingml/2006/main" xmlns:r="http://schemas.openxmlformats.org/officeDocument/2006/relationships" xmlns:p="http://schemas.openxmlformats.org/presentationml/2006/main">
-  <p:cSld>
-    <p:spTree>
-      <p:nvGrpSpPr>
-        <p:cNvPr id="1" name="">
-          <a:extLst>
-            <a:ext uri="{FF2B5EF4-FFF2-40B4-BE49-F238E27FC236}">
-              <a16:creationId xmlns:a16="http://schemas.microsoft.com/office/drawing/2014/main" id="{A0895D74-F7DD-5CE9-68DC-23BB41218631}"/>
-            </a:ext>
-          </a:extLst>
-        </p:cNvPr>
-        <p:cNvGrpSpPr/>
-        <p:nvPr/>
-      </p:nvGrpSpPr>
-      <p:grpSpPr>
-        <a:xfrm>
-          <a:off x="0" y="0"/>
-          <a:ext cx="0" cy="0"/>
-          <a:chOff x="0" y="0"/>
-          <a:chExt cx="0" cy="0"/>
-        </a:xfrm>
-      </p:grpSpPr>
-      <p:sp>
-        <p:nvSpPr>
-          <p:cNvPr id="2" name="Title 1">
-            <a:extLst>
-              <a:ext uri="{FF2B5EF4-FFF2-40B4-BE49-F238E27FC236}">
-                <a16:creationId xmlns:a16="http://schemas.microsoft.com/office/drawing/2014/main" id="{609548D7-F6C8-A7D6-75C4-D7B1D4D515FE}"/>
-              </a:ext>
-            </a:extLst>
-          </p:cNvPr>
-          <p:cNvSpPr>
-            <a:spLocks noGrp="1"/>
-          </p:cNvSpPr>
-          <p:nvPr>
-            <p:ph type="title" idx="4294967295"/>
-          </p:nvPr>
-        </p:nvSpPr>
-        <p:spPr>
-          <a:xfrm>
-            <a:off x="217089" y="321179"/>
-            <a:ext cx="10639437" cy="692150"/>
-          </a:xfrm>
-        </p:spPr>
-        <p:txBody>
-          <a:bodyPr anchor="t">
-            <a:normAutofit fontScale="90000"/>
-          </a:bodyPr>
-          <a:lstStyle/>
-          <a:p>
-            <a:r>
-              <a:rPr lang="en-US" dirty="0"/>
-              <a:t>Console UI implementation</a:t>
-            </a:r>
-          </a:p>
-        </p:txBody>
-      </p:sp>
-      <p:sp>
-        <p:nvSpPr>
-          <p:cNvPr id="4" name="Content Placeholder 2">
-            <a:extLst>
-              <a:ext uri="{FF2B5EF4-FFF2-40B4-BE49-F238E27FC236}">
-                <a16:creationId xmlns:a16="http://schemas.microsoft.com/office/drawing/2014/main" id="{04A01B69-D9A4-259B-940E-0E69C82E7738}"/>
-              </a:ext>
-            </a:extLst>
-          </p:cNvPr>
-          <p:cNvSpPr>
-            <a:spLocks noGrp="1"/>
-          </p:cNvSpPr>
-          <p:nvPr>
-            <p:ph idx="4294967295"/>
-          </p:nvPr>
-        </p:nvSpPr>
-        <p:spPr>
-          <a:xfrm>
-            <a:off x="217089" y="1031007"/>
-            <a:ext cx="5481184" cy="5137150"/>
-          </a:xfrm>
-        </p:spPr>
-        <p:txBody>
-          <a:bodyPr>
-            <a:normAutofit/>
-          </a:bodyPr>
-          <a:lstStyle/>
-          <a:p>
-            <a:pPr>
-              <a:buFont typeface="Arial" panose="020B0604020202020204" pitchFamily="34" charset="0"/>
-              <a:buChar char="•"/>
-            </a:pPr>
-            <a:r>
-              <a:rPr lang="en-US" sz="2400" dirty="0"/>
-              <a:t>As indicated in the specs, the UI of “screen –ls” and “report-util” are similar</a:t>
-            </a:r>
-          </a:p>
-          <a:p>
-            <a:pPr>
-              <a:buFont typeface="Arial" panose="020B0604020202020204" pitchFamily="34" charset="0"/>
-              <a:buChar char="•"/>
-            </a:pPr>
-            <a:r>
-              <a:rPr lang="en-US" sz="2400" dirty="0"/>
-              <a:t>Both commands display these information</a:t>
-            </a:r>
-          </a:p>
-          <a:p>
-            <a:pPr lvl="1"/>
-            <a:r>
-              <a:rPr lang="en-US" sz="2000" dirty="0"/>
-              <a:t>CPU utilization</a:t>
-            </a:r>
-          </a:p>
-          <a:p>
-            <a:pPr lvl="1"/>
-            <a:r>
-              <a:rPr lang="en-US" sz="2000" dirty="0"/>
-              <a:t>Cores used</a:t>
-            </a:r>
-          </a:p>
-          <a:p>
-            <a:pPr lvl="1"/>
-            <a:r>
-              <a:rPr lang="en-US" sz="2000" dirty="0"/>
-              <a:t>Cores available</a:t>
-            </a:r>
-          </a:p>
-          <a:p>
-            <a:pPr lvl="1"/>
-            <a:r>
-              <a:rPr lang="en-US" sz="2000" dirty="0"/>
-              <a:t>Running processes</a:t>
-            </a:r>
-          </a:p>
-          <a:p>
-            <a:pPr lvl="1"/>
-            <a:r>
-              <a:rPr lang="en-US" sz="2000" dirty="0"/>
-              <a:t>Finished processes</a:t>
-            </a:r>
-          </a:p>
-          <a:p>
-            <a:pPr>
-              <a:buFont typeface="Arial" panose="020B0604020202020204" pitchFamily="34" charset="0"/>
-              <a:buChar char="•"/>
-            </a:pPr>
-            <a:r>
-              <a:rPr lang="en-US" sz="2400" dirty="0"/>
-              <a:t>screen –ls functionality shows the latest information within the command line</a:t>
-            </a:r>
-          </a:p>
-          <a:p>
-            <a:pPr>
-              <a:buFont typeface="Arial" panose="020B0604020202020204" pitchFamily="34" charset="0"/>
-              <a:buChar char="•"/>
-            </a:pPr>
-            <a:r>
-              <a:rPr lang="en-US" sz="2400" dirty="0"/>
-              <a:t>report util functionality exports the latest information to a text file named “</a:t>
-            </a:r>
-            <a:r>
-              <a:rPr lang="en-US" sz="2400" dirty="0" err="1"/>
-              <a:t>csopesy-log.txt</a:t>
-            </a:r>
-            <a:r>
-              <a:rPr lang="en-US" sz="2400" dirty="0"/>
-              <a:t>”</a:t>
-            </a:r>
-          </a:p>
-          <a:p>
-            <a:pPr>
-              <a:buFont typeface="Arial" panose="020B0604020202020204" pitchFamily="34" charset="0"/>
-              <a:buChar char="•"/>
-            </a:pPr>
-            <a:endParaRPr lang="en-US" sz="2400" dirty="0"/>
-          </a:p>
-          <a:p>
-            <a:pPr>
-              <a:buFont typeface="Arial" panose="020B0604020202020204" pitchFamily="34" charset="0"/>
-              <a:buChar char="•"/>
-            </a:pPr>
-            <a:endParaRPr lang="en-US" sz="2400" dirty="0"/>
-          </a:p>
-        </p:txBody>
-      </p:sp>
-      <p:sp>
-        <p:nvSpPr>
-          <p:cNvPr id="5" name="Slide Number Placeholder 4">
-            <a:extLst>
-              <a:ext uri="{FF2B5EF4-FFF2-40B4-BE49-F238E27FC236}">
-                <a16:creationId xmlns:a16="http://schemas.microsoft.com/office/drawing/2014/main" id="{1596B9D4-65C6-76FE-2DB0-33081ECCED80}"/>
-              </a:ext>
-            </a:extLst>
-          </p:cNvPr>
-          <p:cNvSpPr>
-            <a:spLocks noGrp="1"/>
-          </p:cNvSpPr>
-          <p:nvPr>
-            <p:ph type="sldNum" sz="quarter" idx="12"/>
-          </p:nvPr>
-        </p:nvSpPr>
-        <p:spPr/>
-        <p:txBody>
-          <a:bodyPr/>
-          <a:lstStyle/>
-          <a:p>
-            <a:fld id="{FF00C4FC-38D3-4854-AF00-0F78321D5711}" type="slidenum">
-              <a:rPr lang="en-US" smtClean="0"/>
-              <a:t>5</a:t>
-            </a:fld>
-            <a:endParaRPr lang="en-US"/>
-          </a:p>
-        </p:txBody>
-      </p:sp>
-      <p:sp>
-        <p:nvSpPr>
-          <p:cNvPr id="7" name="TextBox 6">
-            <a:extLst>
-              <a:ext uri="{FF2B5EF4-FFF2-40B4-BE49-F238E27FC236}">
-                <a16:creationId xmlns:a16="http://schemas.microsoft.com/office/drawing/2014/main" id="{BA8BC75D-5955-68AD-6AC0-40D79E441678}"/>
-              </a:ext>
-            </a:extLst>
-          </p:cNvPr>
-          <p:cNvSpPr txBox="1"/>
-          <p:nvPr/>
-        </p:nvSpPr>
-        <p:spPr>
-          <a:xfrm>
-            <a:off x="7448085" y="1013329"/>
-            <a:ext cx="2325029" cy="369332"/>
-          </a:xfrm>
-          <a:prstGeom prst="rect">
-            <a:avLst/>
-          </a:prstGeom>
-          <a:noFill/>
-        </p:spPr>
-        <p:txBody>
-          <a:bodyPr wrap="square">
-            <a:spAutoFit/>
-          </a:bodyPr>
-          <a:lstStyle/>
-          <a:p>
-            <a:r>
-              <a:rPr lang="en-US" b="1" dirty="0"/>
-              <a:t>screen –ls example:</a:t>
-            </a:r>
-            <a:endParaRPr lang="en-US" sz="1800" b="1" dirty="0"/>
-          </a:p>
-        </p:txBody>
-      </p:sp>
-      <p:pic>
-        <p:nvPicPr>
-          <p:cNvPr id="12" name="Picture 11" descr="A screenshot of a computer&#10;&#10;Description automatically generated">
-            <a:extLst>
-              <a:ext uri="{FF2B5EF4-FFF2-40B4-BE49-F238E27FC236}">
-                <a16:creationId xmlns:a16="http://schemas.microsoft.com/office/drawing/2014/main" id="{E1CFF0E9-ABBD-2A0A-AEC8-F6886A3C09CF}"/>
-              </a:ext>
-            </a:extLst>
-          </p:cNvPr>
-          <p:cNvPicPr>
-            <a:picLocks noChangeAspect="1"/>
-          </p:cNvPicPr>
-          <p:nvPr/>
-        </p:nvPicPr>
-        <p:blipFill>
-          <a:blip r:embed="rId3">
-            <a:extLst>
-              <a:ext uri="{28A0092B-C50C-407E-A947-70E740481C1C}">
-                <a14:useLocalDpi xmlns:a14="http://schemas.microsoft.com/office/drawing/2010/main" val="0"/>
-              </a:ext>
-            </a:extLst>
-          </a:blip>
-          <a:stretch>
-            <a:fillRect/>
-          </a:stretch>
-        </p:blipFill>
-        <p:spPr>
-          <a:xfrm>
-            <a:off x="6042955" y="1382661"/>
-            <a:ext cx="5135289" cy="2216921"/>
-          </a:xfrm>
-          <a:prstGeom prst="rect">
-            <a:avLst/>
-          </a:prstGeom>
-        </p:spPr>
-      </p:pic>
-      <p:sp>
-        <p:nvSpPr>
-          <p:cNvPr id="16" name="TextBox 15">
-            <a:extLst>
-              <a:ext uri="{FF2B5EF4-FFF2-40B4-BE49-F238E27FC236}">
-                <a16:creationId xmlns:a16="http://schemas.microsoft.com/office/drawing/2014/main" id="{49D33F20-7B3D-635A-17BC-28F5517F8D04}"/>
-              </a:ext>
-            </a:extLst>
-          </p:cNvPr>
-          <p:cNvSpPr txBox="1"/>
-          <p:nvPr/>
-        </p:nvSpPr>
-        <p:spPr>
-          <a:xfrm>
-            <a:off x="7381817" y="3777172"/>
-            <a:ext cx="3409484" cy="369332"/>
-          </a:xfrm>
-          <a:prstGeom prst="rect">
-            <a:avLst/>
-          </a:prstGeom>
-          <a:noFill/>
-        </p:spPr>
-        <p:txBody>
-          <a:bodyPr wrap="square">
-            <a:spAutoFit/>
-          </a:bodyPr>
-          <a:lstStyle/>
-          <a:p>
-            <a:r>
-              <a:rPr lang="en-US" b="1" dirty="0"/>
-              <a:t>report-util example:</a:t>
-            </a:r>
-            <a:endParaRPr lang="en-US" sz="1800" b="1" dirty="0"/>
-          </a:p>
-        </p:txBody>
-      </p:sp>
-      <p:pic>
-        <p:nvPicPr>
-          <p:cNvPr id="18" name="Picture 17" descr="A screenshot of a computer&#10;&#10;Description automatically generated">
-            <a:extLst>
-              <a:ext uri="{FF2B5EF4-FFF2-40B4-BE49-F238E27FC236}">
-                <a16:creationId xmlns:a16="http://schemas.microsoft.com/office/drawing/2014/main" id="{45570258-813F-E2F9-34F4-A4D4A051F493}"/>
-              </a:ext>
-            </a:extLst>
-          </p:cNvPr>
-          <p:cNvPicPr>
-            <a:picLocks noChangeAspect="1"/>
-          </p:cNvPicPr>
-          <p:nvPr/>
-        </p:nvPicPr>
-        <p:blipFill>
-          <a:blip r:embed="rId4">
-            <a:extLst>
-              <a:ext uri="{28A0092B-C50C-407E-A947-70E740481C1C}">
-                <a14:useLocalDpi xmlns:a14="http://schemas.microsoft.com/office/drawing/2010/main" val="0"/>
-              </a:ext>
-            </a:extLst>
-          </a:blip>
-          <a:stretch>
-            <a:fillRect/>
-          </a:stretch>
-        </p:blipFill>
-        <p:spPr>
-          <a:xfrm>
-            <a:off x="6096000" y="4095227"/>
-            <a:ext cx="4971660" cy="2312400"/>
-          </a:xfrm>
-          <a:prstGeom prst="rect">
-            <a:avLst/>
-          </a:prstGeom>
-        </p:spPr>
-      </p:pic>
-    </p:spTree>
-    <p:extLst>
-      <p:ext uri="{BB962C8B-B14F-4D97-AF65-F5344CB8AC3E}">
-        <p14:creationId xmlns:p14="http://schemas.microsoft.com/office/powerpoint/2010/main" val="3595475717"/>
-      </p:ext>
-    </p:extLst>
-  </p:cSld>
-  <p:clrMapOvr>
-    <a:masterClrMapping/>
-  </p:clrMapOvr>
-</p:sld>
-</file>
-
-<file path=ppt/slides/slide6.xml><?xml version="1.0" encoding="utf-8"?>
-<p:sld xmlns:a="http://schemas.openxmlformats.org/drawingml/2006/main" xmlns:r="http://schemas.openxmlformats.org/officeDocument/2006/relationships" xmlns:p="http://schemas.openxmlformats.org/presentationml/2006/main">
-  <p:cSld>
-    <p:spTree>
-      <p:nvGrpSpPr>
-        <p:cNvPr id="1" name="">
-          <a:extLst>
-            <a:ext uri="{FF2B5EF4-FFF2-40B4-BE49-F238E27FC236}">
-              <a16:creationId xmlns:a16="http://schemas.microsoft.com/office/drawing/2014/main" id="{81EACFDA-4670-167A-305B-09097EFAFA1D}"/>
-            </a:ext>
-          </a:extLst>
-        </p:cNvPr>
-        <p:cNvGrpSpPr/>
-        <p:nvPr/>
-      </p:nvGrpSpPr>
-      <p:grpSpPr>
-        <a:xfrm>
-          <a:off x="0" y="0"/>
-          <a:ext cx="0" cy="0"/>
-          <a:chOff x="0" y="0"/>
-          <a:chExt cx="0" cy="0"/>
-        </a:xfrm>
-      </p:grpSpPr>
-      <p:sp>
-        <p:nvSpPr>
-          <p:cNvPr id="2" name="Title 1">
-            <a:extLst>
-              <a:ext uri="{FF2B5EF4-FFF2-40B4-BE49-F238E27FC236}">
-                <a16:creationId xmlns:a16="http://schemas.microsoft.com/office/drawing/2014/main" id="{2C907793-5173-B9DD-65C7-9436B85F7707}"/>
-              </a:ext>
-            </a:extLst>
-          </p:cNvPr>
-          <p:cNvSpPr>
-            <a:spLocks noGrp="1"/>
-          </p:cNvSpPr>
-          <p:nvPr>
-            <p:ph type="title" idx="4294967295"/>
-          </p:nvPr>
-        </p:nvSpPr>
-        <p:spPr>
-          <a:xfrm>
-            <a:off x="258750" y="176213"/>
-            <a:ext cx="10639437" cy="692150"/>
-          </a:xfrm>
-        </p:spPr>
-        <p:txBody>
-          <a:bodyPr anchor="t">
-            <a:normAutofit fontScale="90000"/>
-          </a:bodyPr>
-          <a:lstStyle/>
-          <a:p>
-            <a:r>
-              <a:rPr lang="en-US" dirty="0"/>
-              <a:t>Command Interpreter implementation</a:t>
-            </a:r>
-          </a:p>
-        </p:txBody>
-      </p:sp>
-      <p:sp>
-        <p:nvSpPr>
-          <p:cNvPr id="4" name="Content Placeholder 2">
-            <a:extLst>
-              <a:ext uri="{FF2B5EF4-FFF2-40B4-BE49-F238E27FC236}">
-                <a16:creationId xmlns:a16="http://schemas.microsoft.com/office/drawing/2014/main" id="{56C5229C-BDD5-1CFA-F0D6-06E353FC6BFF}"/>
-              </a:ext>
-            </a:extLst>
-          </p:cNvPr>
-          <p:cNvSpPr>
-            <a:spLocks noGrp="1"/>
-          </p:cNvSpPr>
-          <p:nvPr>
-            <p:ph idx="4294967295"/>
-          </p:nvPr>
-        </p:nvSpPr>
-        <p:spPr>
-          <a:xfrm>
-            <a:off x="217088" y="868363"/>
-            <a:ext cx="6331195" cy="5137150"/>
-          </a:xfrm>
-        </p:spPr>
-        <p:txBody>
-          <a:bodyPr>
-            <a:normAutofit/>
-          </a:bodyPr>
-          <a:lstStyle/>
-          <a:p>
-            <a:pPr>
-              <a:buFont typeface="Arial" panose="020B0604020202020204" pitchFamily="34" charset="0"/>
-              <a:buChar char="•"/>
-            </a:pPr>
-            <a:r>
-              <a:rPr lang="en-US" sz="2400" dirty="0"/>
-              <a:t>The </a:t>
-            </a:r>
-            <a:r>
-              <a:rPr lang="en-US" sz="2400" dirty="0" err="1"/>
-              <a:t>CliManager</a:t>
-            </a:r>
-            <a:r>
-              <a:rPr lang="en-US" sz="2400" dirty="0"/>
-              <a:t> class handles interpreting user input in its constructor wherein it will compare the command in a series of if and else statements.</a:t>
-            </a:r>
-          </a:p>
-          <a:p>
-            <a:pPr>
-              <a:buFont typeface="Arial" panose="020B0604020202020204" pitchFamily="34" charset="0"/>
-              <a:buChar char="•"/>
-            </a:pPr>
-            <a:r>
-              <a:rPr lang="en-US" sz="2400" dirty="0"/>
-              <a:t>If the command has one or more arguments, the tokenizer method of the </a:t>
-            </a:r>
-            <a:r>
-              <a:rPr lang="en-US" sz="2400" dirty="0" err="1"/>
-              <a:t>CliManager</a:t>
-            </a:r>
-            <a:r>
-              <a:rPr lang="en-US" sz="2400" dirty="0"/>
-              <a:t> class is called to separate the arguments of the command in a vector of strings.</a:t>
-            </a:r>
-          </a:p>
-          <a:p>
-            <a:pPr>
-              <a:buFont typeface="Arial" panose="020B0604020202020204" pitchFamily="34" charset="0"/>
-              <a:buChar char="•"/>
-            </a:pPr>
-            <a:r>
-              <a:rPr lang="en-US" sz="2400" dirty="0"/>
-              <a:t>The tokenizer method is used in “screen” commands wherein one or more arguments is present.</a:t>
-            </a:r>
-          </a:p>
-        </p:txBody>
-      </p:sp>
-      <p:sp>
-        <p:nvSpPr>
-          <p:cNvPr id="5" name="Slide Number Placeholder 4">
-            <a:extLst>
-              <a:ext uri="{FF2B5EF4-FFF2-40B4-BE49-F238E27FC236}">
-                <a16:creationId xmlns:a16="http://schemas.microsoft.com/office/drawing/2014/main" id="{27F9D2E3-495B-457D-6161-5E1A5DB96853}"/>
-              </a:ext>
-            </a:extLst>
-          </p:cNvPr>
-          <p:cNvSpPr>
-            <a:spLocks noGrp="1"/>
-          </p:cNvSpPr>
-          <p:nvPr>
-            <p:ph type="sldNum" sz="quarter" idx="12"/>
-          </p:nvPr>
-        </p:nvSpPr>
-        <p:spPr/>
-        <p:txBody>
-          <a:bodyPr/>
-          <a:lstStyle/>
-          <a:p>
-            <a:fld id="{FF00C4FC-38D3-4854-AF00-0F78321D5711}" type="slidenum">
-              <a:rPr lang="en-US" smtClean="0"/>
-              <a:t>6</a:t>
-            </a:fld>
-            <a:endParaRPr lang="en-US"/>
-          </a:p>
-        </p:txBody>
-      </p:sp>
-      <p:pic>
-        <p:nvPicPr>
-          <p:cNvPr id="6" name="Picture 5">
-            <a:extLst>
-              <a:ext uri="{FF2B5EF4-FFF2-40B4-BE49-F238E27FC236}">
-                <a16:creationId xmlns:a16="http://schemas.microsoft.com/office/drawing/2014/main" id="{F45C8EAF-B0B7-AFE8-C0AC-1EA4E671850C}"/>
-              </a:ext>
-            </a:extLst>
-          </p:cNvPr>
-          <p:cNvPicPr>
-            <a:picLocks noChangeAspect="1"/>
-          </p:cNvPicPr>
-          <p:nvPr/>
-        </p:nvPicPr>
-        <p:blipFill>
-          <a:blip r:embed="rId2">
-            <a:extLst>
-              <a:ext uri="{28A0092B-C50C-407E-A947-70E740481C1C}">
-                <a14:useLocalDpi xmlns:a14="http://schemas.microsoft.com/office/drawing/2010/main" val="0"/>
-              </a:ext>
-            </a:extLst>
-          </a:blip>
-          <a:stretch>
-            <a:fillRect/>
-          </a:stretch>
-        </p:blipFill>
-        <p:spPr>
-          <a:xfrm>
-            <a:off x="7659236" y="4766995"/>
-            <a:ext cx="3572374" cy="1914792"/>
-          </a:xfrm>
-          <a:prstGeom prst="rect">
-            <a:avLst/>
-          </a:prstGeom>
-        </p:spPr>
-      </p:pic>
-      <p:pic>
-        <p:nvPicPr>
-          <p:cNvPr id="8" name="Picture 7">
-            <a:extLst>
-              <a:ext uri="{FF2B5EF4-FFF2-40B4-BE49-F238E27FC236}">
-                <a16:creationId xmlns:a16="http://schemas.microsoft.com/office/drawing/2014/main" id="{1DE12152-43F0-BEE7-BD8F-C59545DFD8C5}"/>
-              </a:ext>
-            </a:extLst>
-          </p:cNvPr>
-          <p:cNvPicPr>
-            <a:picLocks noChangeAspect="1"/>
-          </p:cNvPicPr>
-          <p:nvPr/>
-        </p:nvPicPr>
-        <p:blipFill>
-          <a:blip r:embed="rId3">
-            <a:extLst>
-              <a:ext uri="{28A0092B-C50C-407E-A947-70E740481C1C}">
-                <a14:useLocalDpi xmlns:a14="http://schemas.microsoft.com/office/drawing/2010/main" val="0"/>
-              </a:ext>
-            </a:extLst>
-          </a:blip>
-          <a:stretch>
-            <a:fillRect/>
-          </a:stretch>
-        </p:blipFill>
-        <p:spPr>
-          <a:xfrm>
-            <a:off x="7021913" y="868363"/>
-            <a:ext cx="4847020" cy="3724700"/>
-          </a:xfrm>
-          <a:prstGeom prst="rect">
-            <a:avLst/>
-          </a:prstGeom>
-        </p:spPr>
-      </p:pic>
-    </p:spTree>
-    <p:extLst>
-      <p:ext uri="{BB962C8B-B14F-4D97-AF65-F5344CB8AC3E}">
-        <p14:creationId xmlns:p14="http://schemas.microsoft.com/office/powerpoint/2010/main" val="1747571886"/>
-      </p:ext>
-    </p:extLst>
-  </p:cSld>
-  <p:clrMapOvr>
-    <a:masterClrMapping/>
-  </p:clrMapOvr>
-</p:sld>
-</file>
-
-<file path=ppt/slides/slide7.xml><?xml version="1.0" encoding="utf-8"?>
 <p:sld xmlns:a="http://schemas.openxmlformats.org/drawingml/2006/main" xmlns:r="http://schemas.openxmlformats.org/officeDocument/2006/relationships" xmlns:p="http://schemas.openxmlformats.org/presentationml/2006/main">
   <p:cSld>
     <p:spTree>
@@ -9597,102 +7337,172 @@
           </a:xfrm>
         </p:spPr>
         <p:txBody>
-          <a:bodyPr>
-            <a:normAutofit lnSpcReduction="10000"/>
+          <a:bodyPr vert="horz" lIns="91440" tIns="45720" rIns="91440" bIns="45720" rtlCol="0" anchor="t">
+            <a:normAutofit/>
           </a:bodyPr>
           <a:lstStyle/>
           <a:p>
             <a:pPr>
-              <a:buFont typeface="Arial" panose="020B0604020202020204" pitchFamily="34" charset="0"/>
-              <a:buChar char="•"/>
+              <a:buNone/>
             </a:pPr>
             <a:r>
-              <a:rPr lang="en-US" sz="2400" dirty="0"/>
+              <a:rPr lang="en-US" sz="1800"/>
               <a:t>Each individual process is represented as a class with the following fields:</a:t>
             </a:r>
-          </a:p>
-          <a:p>
-            <a:pPr marL="457200" indent="-457200">
-              <a:buAutoNum type="arabicParenR"/>
+            <a:endParaRPr lang="en-US" sz="1800">
+              <a:ea typeface="Calibri"/>
+              <a:cs typeface="Calibri"/>
+            </a:endParaRPr>
+          </a:p>
+          <a:p>
+            <a:pPr marL="342900" indent="-342900">
+              <a:buAutoNum type="arabicPeriod"/>
             </a:pPr>
             <a:r>
-              <a:rPr lang="en-US" sz="2400" dirty="0"/>
+              <a:rPr lang="en-US" sz="1800"/>
               <a:t>Name = Corresponds to the name of the process.</a:t>
             </a:r>
-          </a:p>
-          <a:p>
-            <a:pPr marL="457200" indent="-457200">
-              <a:buAutoNum type="arabicParenR"/>
+            <a:endParaRPr lang="en-US" sz="1800">
+              <a:ea typeface="Calibri"/>
+              <a:cs typeface="Calibri"/>
+            </a:endParaRPr>
+          </a:p>
+          <a:p>
+            <a:pPr marL="342900" indent="-342900">
+              <a:buAutoNum type="arabicPeriod"/>
             </a:pPr>
             <a:r>
-              <a:rPr lang="en-US" sz="2400" dirty="0" err="1"/>
+              <a:rPr lang="en-US" sz="1800" err="1"/>
               <a:t>timeCreated</a:t>
             </a:r>
             <a:r>
-              <a:rPr lang="en-US" sz="2400" dirty="0"/>
+              <a:rPr lang="en-US" sz="1800"/>
               <a:t> = Which was when the process was created in (MM:DD:YY HH:MM:SS AM) format.</a:t>
             </a:r>
-          </a:p>
-          <a:p>
-            <a:pPr marL="457200" indent="-457200">
-              <a:buAutoNum type="arabicParenR"/>
+            <a:endParaRPr lang="en-US" sz="1800">
+              <a:ea typeface="Calibri"/>
+              <a:cs typeface="Calibri"/>
+            </a:endParaRPr>
+          </a:p>
+          <a:p>
+            <a:pPr marL="342900" indent="-342900">
+              <a:buAutoNum type="arabicPeriod"/>
             </a:pPr>
             <a:r>
-              <a:rPr lang="en-US" sz="2400" dirty="0" err="1"/>
+              <a:rPr lang="en-US" sz="1800" err="1"/>
               <a:t>currLine</a:t>
             </a:r>
             <a:r>
-              <a:rPr lang="en-US" sz="2400" dirty="0"/>
+              <a:rPr lang="en-US" sz="1800"/>
               <a:t> = Corresponds to the current line of instruction to be executed.</a:t>
             </a:r>
-          </a:p>
-          <a:p>
-            <a:pPr marL="457200" indent="-457200">
-              <a:buAutoNum type="arabicParenR"/>
+            <a:endParaRPr lang="en-US" sz="1800">
+              <a:ea typeface="Calibri"/>
+              <a:cs typeface="Calibri"/>
+            </a:endParaRPr>
+          </a:p>
+          <a:p>
+            <a:pPr marL="342900" indent="-342900">
+              <a:buAutoNum type="arabicPeriod"/>
             </a:pPr>
             <a:r>
-              <a:rPr lang="en-US" sz="2400" dirty="0" err="1"/>
+              <a:rPr lang="en-US" sz="1800" err="1">
+                <a:latin typeface="Calibri" panose="020F0502020204030204"/>
+                <a:ea typeface="Calibri"/>
+                <a:cs typeface="Calibri"/>
+              </a:rPr>
               <a:t>totalLine</a:t>
             </a:r>
             <a:r>
-              <a:rPr lang="en-US" sz="2400" dirty="0"/>
+              <a:rPr lang="en-US" sz="1800"/>
               <a:t> = Which is the total lines of instruction to be executed.</a:t>
             </a:r>
-          </a:p>
-          <a:p>
-            <a:pPr marL="457200" indent="-457200">
-              <a:buAutoNum type="arabicParenR"/>
+            <a:endParaRPr lang="en-US" sz="1800">
+              <a:ea typeface="Calibri"/>
+              <a:cs typeface="Calibri"/>
+            </a:endParaRPr>
+          </a:p>
+          <a:p>
+            <a:pPr marL="342900" indent="-342900">
+              <a:buAutoNum type="arabicPeriod"/>
             </a:pPr>
             <a:r>
-              <a:rPr lang="en-US" sz="2400" dirty="0" err="1"/>
+              <a:rPr lang="en-US" sz="1800" err="1"/>
               <a:t>coreNumber</a:t>
             </a:r>
             <a:r>
-              <a:rPr lang="en-US" sz="2400" dirty="0"/>
+              <a:rPr lang="en-US" sz="1800"/>
               <a:t> = Corresponds to the </a:t>
             </a:r>
             <a:r>
-              <a:rPr lang="en-US" sz="2400" dirty="0" err="1"/>
+              <a:rPr lang="en-US" sz="1800" err="1"/>
               <a:t>cpu</a:t>
             </a:r>
             <a:r>
-              <a:rPr lang="en-US" sz="2400" dirty="0"/>
+              <a:rPr lang="en-US" sz="1800"/>
               <a:t> assigned to run the process. By default, its value is -1, meaning no </a:t>
             </a:r>
             <a:r>
-              <a:rPr lang="en-US" sz="2400" dirty="0" err="1"/>
+              <a:rPr lang="en-US" sz="1800" err="1"/>
               <a:t>cpu</a:t>
             </a:r>
             <a:r>
-              <a:rPr lang="en-US" sz="2400" dirty="0"/>
+              <a:rPr lang="en-US" sz="1800"/>
               <a:t> was assigned to it yet.</a:t>
+            </a:r>
+            <a:endParaRPr lang="en-US" sz="1800">
+              <a:ea typeface="Calibri"/>
+              <a:cs typeface="Calibri"/>
+            </a:endParaRPr>
+          </a:p>
+          <a:p>
+            <a:pPr marL="342900" indent="-342900">
+              <a:buAutoNum type="arabicPeriod"/>
+            </a:pPr>
+            <a:r>
+              <a:rPr lang="en-US" sz="1800">
+                <a:ea typeface="Calibri"/>
+                <a:cs typeface="Calibri"/>
+              </a:rPr>
+              <a:t>status = Represents the status of the process. Can be "RUNNING", "WAITING", or "COMPLETED"</a:t>
+            </a:r>
+          </a:p>
+          <a:p>
+            <a:pPr marL="342900" indent="-342900">
+              <a:buAutoNum type="arabicPeriod"/>
+            </a:pPr>
+            <a:r>
+              <a:rPr lang="en-US" sz="1800" err="1">
+                <a:ea typeface="Calibri"/>
+                <a:cs typeface="Calibri"/>
+              </a:rPr>
+              <a:t>TotalMemory</a:t>
+            </a:r>
+            <a:r>
+              <a:rPr lang="en-US" sz="1800">
+                <a:ea typeface="Calibri"/>
+                <a:cs typeface="Calibri"/>
+              </a:rPr>
+              <a:t> = Represents the total used memory needed or consumed by the process. </a:t>
             </a:r>
           </a:p>
           <a:p>
             <a:pPr marL="0" indent="0">
               <a:buNone/>
             </a:pPr>
-            <a:endParaRPr lang="en-US" sz="2000" dirty="0"/>
+            <a:endParaRPr lang="en-US" sz="2400">
+              <a:ea typeface="Calibri"/>
+              <a:cs typeface="Calibri"/>
+            </a:endParaRPr>
+          </a:p>
+          <a:p>
+            <a:pPr marL="457200" indent="-457200">
+              <a:buAutoNum type="arabicPeriod"/>
+            </a:pPr>
+            <a:endParaRPr lang="en-US" sz="2000">
+              <a:ea typeface="Calibri" panose="020F0502020204030204"/>
+              <a:cs typeface="Calibri" panose="020F0502020204030204"/>
+            </a:endParaRPr>
           </a:p>
         </p:txBody>
       </p:sp>
@@ -9719,7 +7529,7 @@
           <a:p>
             <a:fld id="{FF00C4FC-38D3-4854-AF00-0F78321D5711}" type="slidenum">
               <a:rPr lang="en-US" smtClean="0"/>
-              <a:t>7</a:t>
+              <a:t>5</a:t>
             </a:fld>
             <a:endParaRPr lang="en-US"/>
           </a:p>
@@ -9727,10 +7537,10 @@
       </p:sp>
       <p:pic>
         <p:nvPicPr>
-          <p:cNvPr id="6" name="Picture 5" descr="A computer screen shot of a code&#10;&#10;Description automatically generated">
-            <a:extLst>
-              <a:ext uri="{FF2B5EF4-FFF2-40B4-BE49-F238E27FC236}">
-                <a16:creationId xmlns:a16="http://schemas.microsoft.com/office/drawing/2014/main" id="{68B700E8-5BA8-A8E0-F33B-A833DB7E3894}"/>
+          <p:cNvPr id="7" name="Picture 6">
+            <a:extLst>
+              <a:ext uri="{FF2B5EF4-FFF2-40B4-BE49-F238E27FC236}">
+                <a16:creationId xmlns:a16="http://schemas.microsoft.com/office/drawing/2014/main" id="{0EE2CB31-4A87-E778-FC39-A3511CA68EC8}"/>
               </a:ext>
             </a:extLst>
           </p:cNvPr>
@@ -9740,20 +7550,15 @@
           <p:nvPr/>
         </p:nvPicPr>
         <p:blipFill>
-          <a:blip r:embed="rId2">
-            <a:extLst>
-              <a:ext uri="{28A0092B-C50C-407E-A947-70E740481C1C}">
-                <a14:useLocalDpi xmlns:a14="http://schemas.microsoft.com/office/drawing/2010/main" val="0"/>
-              </a:ext>
-            </a:extLst>
-          </a:blip>
-          <a:srcRect l="203" r="17062"/>
-          <a:stretch/>
+          <a:blip r:embed="rId2"/>
+          <a:stretch>
+            <a:fillRect/>
+          </a:stretch>
         </p:blipFill>
         <p:spPr>
           <a:xfrm>
-            <a:off x="6486179" y="768094"/>
-            <a:ext cx="5447071" cy="4036013"/>
+            <a:off x="7239348" y="522288"/>
+            <a:ext cx="4010585" cy="5239481"/>
           </a:xfrm>
           <a:prstGeom prst="rect">
             <a:avLst/>
@@ -9773,7 +7578,7 @@
 </p:sld>
 </file>
 
-<file path=ppt/slides/slide8.xml><?xml version="1.0" encoding="utf-8"?>
+<file path=ppt/slides/slide6.xml><?xml version="1.0" encoding="utf-8"?>
 <p:sld xmlns:a="http://schemas.openxmlformats.org/drawingml/2006/main" xmlns:r="http://schemas.openxmlformats.org/officeDocument/2006/relationships" xmlns:p="http://schemas.openxmlformats.org/presentationml/2006/main">
   <p:cSld>
     <p:spTree>
@@ -9926,7 +7731,7 @@
           <a:p>
             <a:fld id="{FF00C4FC-38D3-4854-AF00-0F78321D5711}" type="slidenum">
               <a:rPr lang="en-US" smtClean="0"/>
-              <a:t>8</a:t>
+              <a:t>6</a:t>
             </a:fld>
             <a:endParaRPr lang="en-US"/>
           </a:p>
@@ -10017,7 +7822,7 @@
 </p:sld>
 </file>
 
-<file path=ppt/slides/slide9.xml><?xml version="1.0" encoding="utf-8"?>
+<file path=ppt/slides/slide7.xml><?xml version="1.0" encoding="utf-8"?>
 <p:sld xmlns:a="http://schemas.openxmlformats.org/drawingml/2006/main" xmlns:r="http://schemas.openxmlformats.org/officeDocument/2006/relationships" xmlns:p="http://schemas.openxmlformats.org/presentationml/2006/main">
   <p:cSld>
     <p:spTree>
@@ -10229,7 +8034,7 @@
           <a:p>
             <a:fld id="{FF00C4FC-38D3-4854-AF00-0F78321D5711}" type="slidenum">
               <a:rPr lang="en-US" smtClean="0"/>
-              <a:t>9</a:t>
+              <a:t>7</a:t>
             </a:fld>
             <a:endParaRPr lang="en-US"/>
           </a:p>
@@ -10275,6 +8080,574 @@
     <p:extLst>
       <p:ext uri="{BB962C8B-B14F-4D97-AF65-F5344CB8AC3E}">
         <p14:creationId xmlns:p14="http://schemas.microsoft.com/office/powerpoint/2010/main" val="1694699740"/>
+      </p:ext>
+    </p:extLst>
+  </p:cSld>
+  <p:clrMapOvr>
+    <a:masterClrMapping/>
+  </p:clrMapOvr>
+</p:sld>
+</file>
+
+<file path=ppt/slides/slide8.xml><?xml version="1.0" encoding="utf-8"?>
+<p:sld xmlns:a="http://schemas.openxmlformats.org/drawingml/2006/main" xmlns:r="http://schemas.openxmlformats.org/officeDocument/2006/relationships" xmlns:p="http://schemas.openxmlformats.org/presentationml/2006/main">
+  <p:cSld>
+    <p:spTree>
+      <p:nvGrpSpPr>
+        <p:cNvPr id="1" name="">
+          <a:extLst>
+            <a:ext uri="{FF2B5EF4-FFF2-40B4-BE49-F238E27FC236}">
+              <a16:creationId xmlns:a16="http://schemas.microsoft.com/office/drawing/2014/main" id="{471B8880-B380-0E16-EE04-EBCAF6DBFED0}"/>
+            </a:ext>
+          </a:extLst>
+        </p:cNvPr>
+        <p:cNvGrpSpPr/>
+        <p:nvPr/>
+      </p:nvGrpSpPr>
+      <p:grpSpPr>
+        <a:xfrm>
+          <a:off x="0" y="0"/>
+          <a:ext cx="0" cy="0"/>
+          <a:chOff x="0" y="0"/>
+          <a:chExt cx="0" cy="0"/>
+        </a:xfrm>
+      </p:grpSpPr>
+      <p:sp>
+        <p:nvSpPr>
+          <p:cNvPr id="2" name="Title 1">
+            <a:extLst>
+              <a:ext uri="{FF2B5EF4-FFF2-40B4-BE49-F238E27FC236}">
+                <a16:creationId xmlns:a16="http://schemas.microsoft.com/office/drawing/2014/main" id="{F5A7E0BD-CCC9-B6F8-0722-B1C21ADC53E0}"/>
+              </a:ext>
+            </a:extLst>
+          </p:cNvPr>
+          <p:cNvSpPr>
+            <a:spLocks noGrp="1"/>
+          </p:cNvSpPr>
+          <p:nvPr>
+            <p:ph type="title" idx="4294967295"/>
+          </p:nvPr>
+        </p:nvSpPr>
+        <p:spPr>
+          <a:xfrm>
+            <a:off x="258750" y="176213"/>
+            <a:ext cx="10639437" cy="692150"/>
+          </a:xfrm>
+        </p:spPr>
+        <p:txBody>
+          <a:bodyPr anchor="t">
+            <a:normAutofit fontScale="90000"/>
+          </a:bodyPr>
+          <a:lstStyle/>
+          <a:p>
+            <a:r>
+              <a:rPr lang="en-US" dirty="0"/>
+              <a:t>Scheduler Implementation</a:t>
+            </a:r>
+          </a:p>
+        </p:txBody>
+      </p:sp>
+      <p:sp>
+        <p:nvSpPr>
+          <p:cNvPr id="4" name="Content Placeholder 2">
+            <a:extLst>
+              <a:ext uri="{FF2B5EF4-FFF2-40B4-BE49-F238E27FC236}">
+                <a16:creationId xmlns:a16="http://schemas.microsoft.com/office/drawing/2014/main" id="{CF09A2AE-017E-69CD-B369-AC8DE01E2D35}"/>
+              </a:ext>
+            </a:extLst>
+          </p:cNvPr>
+          <p:cNvSpPr>
+            <a:spLocks noGrp="1"/>
+          </p:cNvSpPr>
+          <p:nvPr>
+            <p:ph idx="4294967295"/>
+          </p:nvPr>
+        </p:nvSpPr>
+        <p:spPr>
+          <a:xfrm>
+            <a:off x="217088" y="868363"/>
+            <a:ext cx="6567169" cy="5137150"/>
+          </a:xfrm>
+        </p:spPr>
+        <p:txBody>
+          <a:bodyPr>
+            <a:normAutofit/>
+          </a:bodyPr>
+          <a:lstStyle/>
+          <a:p>
+            <a:pPr>
+              <a:buFont typeface="Arial" panose="020B0604020202020204" pitchFamily="34" charset="0"/>
+              <a:buChar char="•"/>
+            </a:pPr>
+            <a:r>
+              <a:rPr lang="en-US" sz="2400" dirty="0"/>
+              <a:t>The scheduler is initialized by the </a:t>
+            </a:r>
+            <a:r>
+              <a:rPr lang="en-US" sz="2400" dirty="0" err="1"/>
+              <a:t>CliManager</a:t>
+            </a:r>
+            <a:r>
+              <a:rPr lang="en-US" sz="2400" dirty="0"/>
+              <a:t> class upon entering the “initialize” command. It then calls the scheduler constructor which reads the configuration file which will be used in setting the fields of the scheduler class.</a:t>
+            </a:r>
+          </a:p>
+          <a:p>
+            <a:pPr>
+              <a:buFont typeface="Arial" panose="020B0604020202020204" pitchFamily="34" charset="0"/>
+              <a:buChar char="•"/>
+            </a:pPr>
+            <a:r>
+              <a:rPr lang="en-US" sz="2400" dirty="0"/>
+              <a:t>Once the user inputs the command “scheduler-start”, the </a:t>
+            </a:r>
+            <a:r>
+              <a:rPr lang="en-US" sz="2400" dirty="0" err="1"/>
+              <a:t>CliManager</a:t>
+            </a:r>
+            <a:r>
+              <a:rPr lang="en-US" sz="2400" dirty="0"/>
+              <a:t> class will call the </a:t>
+            </a:r>
+            <a:r>
+              <a:rPr lang="en-US" sz="2400" dirty="0" err="1"/>
+              <a:t>startScheduler</a:t>
+            </a:r>
+            <a:r>
+              <a:rPr lang="en-US" sz="2400" dirty="0"/>
+              <a:t> method which will initialize the threads and other necessary fields for the scheduler.</a:t>
+            </a:r>
+          </a:p>
+          <a:p>
+            <a:pPr>
+              <a:buFont typeface="Arial" panose="020B0604020202020204" pitchFamily="34" charset="0"/>
+              <a:buChar char="•"/>
+            </a:pPr>
+            <a:r>
+              <a:rPr lang="en-US" sz="2400" dirty="0"/>
+              <a:t>The threads that were created will then call the </a:t>
+            </a:r>
+            <a:r>
+              <a:rPr lang="en-US" sz="2400" dirty="0" err="1"/>
+              <a:t>fcfs</a:t>
+            </a:r>
+            <a:r>
+              <a:rPr lang="en-US" sz="2400" dirty="0"/>
+              <a:t> or </a:t>
+            </a:r>
+            <a:r>
+              <a:rPr lang="en-US" sz="2400" dirty="0" err="1"/>
+              <a:t>roundRobin</a:t>
+            </a:r>
+            <a:r>
+              <a:rPr lang="en-US" sz="2400" dirty="0"/>
+              <a:t> method depending on the settings of the configuration file.</a:t>
+            </a:r>
+          </a:p>
+        </p:txBody>
+      </p:sp>
+      <p:sp>
+        <p:nvSpPr>
+          <p:cNvPr id="5" name="Slide Number Placeholder 4">
+            <a:extLst>
+              <a:ext uri="{FF2B5EF4-FFF2-40B4-BE49-F238E27FC236}">
+                <a16:creationId xmlns:a16="http://schemas.microsoft.com/office/drawing/2014/main" id="{FC8119B2-3F0B-5AB7-D680-9C7535A49C99}"/>
+              </a:ext>
+            </a:extLst>
+          </p:cNvPr>
+          <p:cNvSpPr>
+            <a:spLocks noGrp="1"/>
+          </p:cNvSpPr>
+          <p:nvPr>
+            <p:ph type="sldNum" sz="quarter" idx="12"/>
+          </p:nvPr>
+        </p:nvSpPr>
+        <p:spPr/>
+        <p:txBody>
+          <a:bodyPr/>
+          <a:lstStyle/>
+          <a:p>
+            <a:fld id="{FF00C4FC-38D3-4854-AF00-0F78321D5711}" type="slidenum">
+              <a:rPr lang="en-US" smtClean="0"/>
+              <a:t>8</a:t>
+            </a:fld>
+            <a:endParaRPr lang="en-US"/>
+          </a:p>
+        </p:txBody>
+      </p:sp>
+      <p:pic>
+        <p:nvPicPr>
+          <p:cNvPr id="7" name="Picture 6" descr="A computer screen shot of a program code&#10;&#10;Description automatically generated">
+            <a:extLst>
+              <a:ext uri="{FF2B5EF4-FFF2-40B4-BE49-F238E27FC236}">
+                <a16:creationId xmlns:a16="http://schemas.microsoft.com/office/drawing/2014/main" id="{1DF94C94-AB8A-091B-AB34-B2C32A2B7F7A}"/>
+              </a:ext>
+            </a:extLst>
+          </p:cNvPr>
+          <p:cNvPicPr>
+            <a:picLocks noChangeAspect="1"/>
+          </p:cNvPicPr>
+          <p:nvPr/>
+        </p:nvPicPr>
+        <p:blipFill>
+          <a:blip r:embed="rId2">
+            <a:extLst>
+              <a:ext uri="{28A0092B-C50C-407E-A947-70E740481C1C}">
+                <a14:useLocalDpi xmlns:a14="http://schemas.microsoft.com/office/drawing/2010/main" val="0"/>
+              </a:ext>
+            </a:extLst>
+          </a:blip>
+          <a:stretch>
+            <a:fillRect/>
+          </a:stretch>
+        </p:blipFill>
+        <p:spPr>
+          <a:xfrm>
+            <a:off x="6896928" y="344128"/>
+            <a:ext cx="4880669" cy="3193235"/>
+          </a:xfrm>
+          <a:prstGeom prst="rect">
+            <a:avLst/>
+          </a:prstGeom>
+        </p:spPr>
+      </p:pic>
+      <p:pic>
+        <p:nvPicPr>
+          <p:cNvPr id="9" name="Picture 8" descr="A computer screen with text&#10;&#10;Description automatically generated">
+            <a:extLst>
+              <a:ext uri="{FF2B5EF4-FFF2-40B4-BE49-F238E27FC236}">
+                <a16:creationId xmlns:a16="http://schemas.microsoft.com/office/drawing/2014/main" id="{BE4C48F8-0E41-E940-8F86-42C5F4C95F0E}"/>
+              </a:ext>
+            </a:extLst>
+          </p:cNvPr>
+          <p:cNvPicPr>
+            <a:picLocks noChangeAspect="1"/>
+          </p:cNvPicPr>
+          <p:nvPr/>
+        </p:nvPicPr>
+        <p:blipFill>
+          <a:blip r:embed="rId3">
+            <a:extLst>
+              <a:ext uri="{28A0092B-C50C-407E-A947-70E740481C1C}">
+                <a14:useLocalDpi xmlns:a14="http://schemas.microsoft.com/office/drawing/2010/main" val="0"/>
+              </a:ext>
+            </a:extLst>
+          </a:blip>
+          <a:stretch>
+            <a:fillRect/>
+          </a:stretch>
+        </p:blipFill>
+        <p:spPr>
+          <a:xfrm>
+            <a:off x="6961240" y="3722693"/>
+            <a:ext cx="4345562" cy="2227404"/>
+          </a:xfrm>
+          <a:prstGeom prst="rect">
+            <a:avLst/>
+          </a:prstGeom>
+        </p:spPr>
+      </p:pic>
+    </p:spTree>
+    <p:extLst>
+      <p:ext uri="{BB962C8B-B14F-4D97-AF65-F5344CB8AC3E}">
+        <p14:creationId xmlns:p14="http://schemas.microsoft.com/office/powerpoint/2010/main" val="184164588"/>
+      </p:ext>
+    </p:extLst>
+  </p:cSld>
+  <p:clrMapOvr>
+    <a:masterClrMapping/>
+  </p:clrMapOvr>
+</p:sld>
+</file>
+
+<file path=ppt/slides/slide9.xml><?xml version="1.0" encoding="utf-8"?>
+<p:sld xmlns:a="http://schemas.openxmlformats.org/drawingml/2006/main" xmlns:r="http://schemas.openxmlformats.org/officeDocument/2006/relationships" xmlns:p="http://schemas.openxmlformats.org/presentationml/2006/main">
+  <p:cSld>
+    <p:spTree>
+      <p:nvGrpSpPr>
+        <p:cNvPr id="1" name="">
+          <a:extLst>
+            <a:ext uri="{FF2B5EF4-FFF2-40B4-BE49-F238E27FC236}">
+              <a16:creationId xmlns:a16="http://schemas.microsoft.com/office/drawing/2014/main" id="{FA2D44F6-D5D7-EB3B-4096-886551E85B10}"/>
+            </a:ext>
+          </a:extLst>
+        </p:cNvPr>
+        <p:cNvGrpSpPr/>
+        <p:nvPr/>
+      </p:nvGrpSpPr>
+      <p:grpSpPr>
+        <a:xfrm>
+          <a:off x="0" y="0"/>
+          <a:ext cx="0" cy="0"/>
+          <a:chOff x="0" y="0"/>
+          <a:chExt cx="0" cy="0"/>
+        </a:xfrm>
+      </p:grpSpPr>
+      <p:sp>
+        <p:nvSpPr>
+          <p:cNvPr id="2" name="Title 1">
+            <a:extLst>
+              <a:ext uri="{FF2B5EF4-FFF2-40B4-BE49-F238E27FC236}">
+                <a16:creationId xmlns:a16="http://schemas.microsoft.com/office/drawing/2014/main" id="{6D2EA4D4-CA70-3645-889B-BC28BFDB3794}"/>
+              </a:ext>
+            </a:extLst>
+          </p:cNvPr>
+          <p:cNvSpPr>
+            <a:spLocks noGrp="1"/>
+          </p:cNvSpPr>
+          <p:nvPr>
+            <p:ph type="title" idx="4294967295"/>
+          </p:nvPr>
+        </p:nvSpPr>
+        <p:spPr>
+          <a:xfrm>
+            <a:off x="258750" y="176213"/>
+            <a:ext cx="10639437" cy="692150"/>
+          </a:xfrm>
+        </p:spPr>
+        <p:txBody>
+          <a:bodyPr anchor="t">
+            <a:normAutofit fontScale="90000"/>
+          </a:bodyPr>
+          <a:lstStyle/>
+          <a:p>
+            <a:r>
+              <a:rPr lang="en-US" dirty="0"/>
+              <a:t>Scheduler Implementation</a:t>
+            </a:r>
+          </a:p>
+        </p:txBody>
+      </p:sp>
+      <p:sp>
+        <p:nvSpPr>
+          <p:cNvPr id="4" name="Content Placeholder 2">
+            <a:extLst>
+              <a:ext uri="{FF2B5EF4-FFF2-40B4-BE49-F238E27FC236}">
+                <a16:creationId xmlns:a16="http://schemas.microsoft.com/office/drawing/2014/main" id="{29A79C3C-7935-BF55-A3F2-B0ADB03DA485}"/>
+              </a:ext>
+            </a:extLst>
+          </p:cNvPr>
+          <p:cNvSpPr>
+            <a:spLocks noGrp="1"/>
+          </p:cNvSpPr>
+          <p:nvPr>
+            <p:ph idx="4294967295"/>
+          </p:nvPr>
+        </p:nvSpPr>
+        <p:spPr>
+          <a:xfrm>
+            <a:off x="217088" y="868363"/>
+            <a:ext cx="6567169" cy="5137150"/>
+          </a:xfrm>
+        </p:spPr>
+        <p:txBody>
+          <a:bodyPr>
+            <a:normAutofit/>
+          </a:bodyPr>
+          <a:lstStyle/>
+          <a:p>
+            <a:pPr>
+              <a:buFont typeface="Arial" panose="020B0604020202020204" pitchFamily="34" charset="0"/>
+              <a:buChar char="•"/>
+            </a:pPr>
+            <a:r>
+              <a:rPr lang="en-US" sz="2400" dirty="0"/>
+              <a:t>The </a:t>
+            </a:r>
+            <a:r>
+              <a:rPr lang="en-US" sz="2400" dirty="0" err="1"/>
+              <a:t>cpuClock</a:t>
+            </a:r>
+            <a:r>
+              <a:rPr lang="en-US" sz="2400" dirty="0"/>
+              <a:t> method is implemented as a separate thread from the </a:t>
+            </a:r>
+            <a:r>
+              <a:rPr lang="en-US" sz="2400" dirty="0" err="1"/>
+              <a:t>fcfs</a:t>
+            </a:r>
+            <a:r>
+              <a:rPr lang="en-US" sz="2400" dirty="0"/>
+              <a:t> and </a:t>
+            </a:r>
+            <a:r>
+              <a:rPr lang="en-US" sz="2400" dirty="0" err="1"/>
+              <a:t>roundRobin</a:t>
+            </a:r>
+            <a:r>
+              <a:rPr lang="en-US" sz="2400" dirty="0"/>
+              <a:t> method as it will run independently to determine when a new process will be created and when an instruction will be executed by the schedulers.</a:t>
+            </a:r>
+          </a:p>
+          <a:p>
+            <a:pPr>
+              <a:buFont typeface="Arial" panose="020B0604020202020204" pitchFamily="34" charset="0"/>
+              <a:buChar char="•"/>
+            </a:pPr>
+            <a:r>
+              <a:rPr lang="en-US" sz="2400" dirty="0"/>
+              <a:t>The condition variable cv2 is used to notify the schedulers that an instruction should be executed in that </a:t>
+            </a:r>
+            <a:r>
+              <a:rPr lang="en-US" sz="2400" dirty="0" err="1"/>
+              <a:t>cpu</a:t>
+            </a:r>
+            <a:r>
+              <a:rPr lang="en-US" sz="2400" dirty="0"/>
+              <a:t> cycle.</a:t>
+            </a:r>
+          </a:p>
+          <a:p>
+            <a:pPr>
+              <a:buFont typeface="Arial" panose="020B0604020202020204" pitchFamily="34" charset="0"/>
+              <a:buChar char="•"/>
+            </a:pPr>
+            <a:r>
+              <a:rPr lang="en-US" sz="2400" dirty="0"/>
+              <a:t>The </a:t>
+            </a:r>
+            <a:r>
+              <a:rPr lang="en-US" sz="2400" dirty="0" err="1"/>
+              <a:t>createProcess</a:t>
+            </a:r>
+            <a:r>
+              <a:rPr lang="en-US" sz="2400" dirty="0"/>
+              <a:t> method is called by the </a:t>
+            </a:r>
+            <a:r>
+              <a:rPr lang="en-US" sz="2400" dirty="0" err="1"/>
+              <a:t>cpuClock</a:t>
+            </a:r>
+            <a:r>
+              <a:rPr lang="en-US" sz="2400" dirty="0"/>
+              <a:t> and </a:t>
+            </a:r>
+            <a:r>
+              <a:rPr lang="en-US" sz="2400" dirty="0" err="1"/>
+              <a:t>CliManager</a:t>
+            </a:r>
+            <a:r>
+              <a:rPr lang="en-US" sz="2400" dirty="0"/>
+              <a:t> class when a new process will be created.</a:t>
+            </a:r>
+          </a:p>
+          <a:p>
+            <a:pPr>
+              <a:buFont typeface="Arial" panose="020B0604020202020204" pitchFamily="34" charset="0"/>
+              <a:buChar char="•"/>
+            </a:pPr>
+            <a:r>
+              <a:rPr lang="en-US" sz="2400" dirty="0"/>
+              <a:t>To resolve the consumer-producer problem, the condition variable cv is used to notify the schedulers that a process has been created.</a:t>
+            </a:r>
+          </a:p>
+        </p:txBody>
+      </p:sp>
+      <p:sp>
+        <p:nvSpPr>
+          <p:cNvPr id="5" name="Slide Number Placeholder 4">
+            <a:extLst>
+              <a:ext uri="{FF2B5EF4-FFF2-40B4-BE49-F238E27FC236}">
+                <a16:creationId xmlns:a16="http://schemas.microsoft.com/office/drawing/2014/main" id="{10AD0233-6DD9-8117-431D-7443660C6E81}"/>
+              </a:ext>
+            </a:extLst>
+          </p:cNvPr>
+          <p:cNvSpPr>
+            <a:spLocks noGrp="1"/>
+          </p:cNvSpPr>
+          <p:nvPr>
+            <p:ph type="sldNum" sz="quarter" idx="12"/>
+          </p:nvPr>
+        </p:nvSpPr>
+        <p:spPr/>
+        <p:txBody>
+          <a:bodyPr/>
+          <a:lstStyle/>
+          <a:p>
+            <a:fld id="{FF00C4FC-38D3-4854-AF00-0F78321D5711}" type="slidenum">
+              <a:rPr lang="en-US" smtClean="0"/>
+              <a:t>9</a:t>
+            </a:fld>
+            <a:endParaRPr lang="en-US"/>
+          </a:p>
+        </p:txBody>
+      </p:sp>
+      <p:pic>
+        <p:nvPicPr>
+          <p:cNvPr id="6" name="Picture 5">
+            <a:extLst>
+              <a:ext uri="{FF2B5EF4-FFF2-40B4-BE49-F238E27FC236}">
+                <a16:creationId xmlns:a16="http://schemas.microsoft.com/office/drawing/2014/main" id="{4544DF88-E1AF-04F1-F422-A583E7E06BEF}"/>
+              </a:ext>
+            </a:extLst>
+          </p:cNvPr>
+          <p:cNvPicPr>
+            <a:picLocks noChangeAspect="1"/>
+          </p:cNvPicPr>
+          <p:nvPr/>
+        </p:nvPicPr>
+        <p:blipFill>
+          <a:blip r:embed="rId2">
+            <a:extLst>
+              <a:ext uri="{28A0092B-C50C-407E-A947-70E740481C1C}">
+                <a14:useLocalDpi xmlns:a14="http://schemas.microsoft.com/office/drawing/2010/main" val="0"/>
+              </a:ext>
+            </a:extLst>
+          </a:blip>
+          <a:stretch>
+            <a:fillRect/>
+          </a:stretch>
+        </p:blipFill>
+        <p:spPr>
+          <a:xfrm>
+            <a:off x="7046243" y="397087"/>
+            <a:ext cx="4887007" cy="2838846"/>
+          </a:xfrm>
+          <a:prstGeom prst="rect">
+            <a:avLst/>
+          </a:prstGeom>
+        </p:spPr>
+      </p:pic>
+      <p:pic>
+        <p:nvPicPr>
+          <p:cNvPr id="10" name="Picture 9" descr="A screen shot of a computer&#10;&#10;Description automatically generated">
+            <a:extLst>
+              <a:ext uri="{FF2B5EF4-FFF2-40B4-BE49-F238E27FC236}">
+                <a16:creationId xmlns:a16="http://schemas.microsoft.com/office/drawing/2014/main" id="{B2EB8224-5C7B-6A6D-E598-9C576D964DB1}"/>
+              </a:ext>
+            </a:extLst>
+          </p:cNvPr>
+          <p:cNvPicPr>
+            <a:picLocks noChangeAspect="1"/>
+          </p:cNvPicPr>
+          <p:nvPr/>
+        </p:nvPicPr>
+        <p:blipFill>
+          <a:blip r:embed="rId3">
+            <a:extLst>
+              <a:ext uri="{28A0092B-C50C-407E-A947-70E740481C1C}">
+                <a14:useLocalDpi xmlns:a14="http://schemas.microsoft.com/office/drawing/2010/main" val="0"/>
+              </a:ext>
+            </a:extLst>
+          </a:blip>
+          <a:stretch>
+            <a:fillRect/>
+          </a:stretch>
+        </p:blipFill>
+        <p:spPr>
+          <a:xfrm>
+            <a:off x="6894135" y="4680155"/>
+            <a:ext cx="5191222" cy="1048732"/>
+          </a:xfrm>
+          <a:prstGeom prst="rect">
+            <a:avLst/>
+          </a:prstGeom>
+        </p:spPr>
+      </p:pic>
+    </p:spTree>
+    <p:extLst>
+      <p:ext uri="{BB962C8B-B14F-4D97-AF65-F5344CB8AC3E}">
+        <p14:creationId xmlns:p14="http://schemas.microsoft.com/office/powerpoint/2010/main" val="2916203173"/>
       </p:ext>
     </p:extLst>
   </p:cSld>
@@ -10872,4 +9245,249 @@
     </a:ext>
   </a:extLst>
 </a:theme>
+</file>
+
+<file path=customXml/item1.xml><?xml version="1.0" encoding="utf-8"?>
+<ct:contentTypeSchema xmlns:ct="http://schemas.microsoft.com/office/2006/metadata/contentType" xmlns:ma="http://schemas.microsoft.com/office/2006/metadata/properties/metaAttributes" ct:_="" ma:_="" ma:contentTypeName="Document" ma:contentTypeID="0x010100AB7B759DABC9D140A9A73CEB9433B1D8" ma:contentTypeVersion="11" ma:contentTypeDescription="Create a new document." ma:contentTypeScope="" ma:versionID="1e2e93c228ecaa72372f8494a2b8deb7">
+  <xsd:schema xmlns:xsd="http://www.w3.org/2001/XMLSchema" xmlns:xs="http://www.w3.org/2001/XMLSchema" xmlns:p="http://schemas.microsoft.com/office/2006/metadata/properties" xmlns:ns3="970d745f-bebc-4faa-ac0a-ef6049a1141c" targetNamespace="http://schemas.microsoft.com/office/2006/metadata/properties" ma:root="true" ma:fieldsID="48ecf2fa9f223b06f84b9533c10b307a" ns3:_="">
+    <xsd:import namespace="970d745f-bebc-4faa-ac0a-ef6049a1141c"/>
+    <xsd:element name="properties">
+      <xsd:complexType>
+        <xsd:sequence>
+          <xsd:element name="documentManagement">
+            <xsd:complexType>
+              <xsd:all>
+                <xsd:element ref="ns3:_activity" minOccurs="0"/>
+                <xsd:element ref="ns3:MediaServiceMetadata" minOccurs="0"/>
+                <xsd:element ref="ns3:MediaServiceFastMetadata" minOccurs="0"/>
+                <xsd:element ref="ns3:MediaServiceSearchProperties" minOccurs="0"/>
+                <xsd:element ref="ns3:MediaServiceDateTaken" minOccurs="0"/>
+                <xsd:element ref="ns3:MediaServiceObjectDetectorVersions" minOccurs="0"/>
+                <xsd:element ref="ns3:MediaServiceSystemTags" minOccurs="0"/>
+                <xsd:element ref="ns3:MediaServiceLocation" minOccurs="0"/>
+                <xsd:element ref="ns3:MediaServiceGenerationTime" minOccurs="0"/>
+                <xsd:element ref="ns3:MediaServiceEventHashCode" minOccurs="0"/>
+                <xsd:element ref="ns3:MediaLengthInSeconds" minOccurs="0"/>
+              </xsd:all>
+            </xsd:complexType>
+          </xsd:element>
+        </xsd:sequence>
+      </xsd:complexType>
+    </xsd:element>
+  </xsd:schema>
+  <xsd:schema xmlns:xsd="http://www.w3.org/2001/XMLSchema" xmlns:xs="http://www.w3.org/2001/XMLSchema" xmlns:dms="http://schemas.microsoft.com/office/2006/documentManagement/types" xmlns:pc="http://schemas.microsoft.com/office/infopath/2007/PartnerControls" targetNamespace="970d745f-bebc-4faa-ac0a-ef6049a1141c" elementFormDefault="qualified">
+    <xsd:import namespace="http://schemas.microsoft.com/office/2006/documentManagement/types"/>
+    <xsd:import namespace="http://schemas.microsoft.com/office/infopath/2007/PartnerControls"/>
+    <xsd:element name="_activity" ma:index="8" nillable="true" ma:displayName="_activity" ma:hidden="true" ma:internalName="_activity">
+      <xsd:simpleType>
+        <xsd:restriction base="dms:Note"/>
+      </xsd:simpleType>
+    </xsd:element>
+    <xsd:element name="MediaServiceMetadata" ma:index="9" nillable="true" ma:displayName="MediaServiceMetadata" ma:hidden="true" ma:internalName="MediaServiceMetadata" ma:readOnly="true">
+      <xsd:simpleType>
+        <xsd:restriction base="dms:Note"/>
+      </xsd:simpleType>
+    </xsd:element>
+    <xsd:element name="MediaServiceFastMetadata" ma:index="10" nillable="true" ma:displayName="MediaServiceFastMetadata" ma:hidden="true" ma:internalName="MediaServiceFastMetadata" ma:readOnly="true">
+      <xsd:simpleType>
+        <xsd:restriction base="dms:Note"/>
+      </xsd:simpleType>
+    </xsd:element>
+    <xsd:element name="MediaServiceSearchProperties" ma:index="11" nillable="true" ma:displayName="MediaServiceSearchProperties" ma:hidden="true" ma:internalName="MediaServiceSearchProperties" ma:readOnly="true">
+      <xsd:simpleType>
+        <xsd:restriction base="dms:Note"/>
+      </xsd:simpleType>
+    </xsd:element>
+    <xsd:element name="MediaServiceDateTaken" ma:index="12" nillable="true" ma:displayName="MediaServiceDateTaken" ma:hidden="true" ma:indexed="true" ma:internalName="MediaServiceDateTaken" ma:readOnly="true">
+      <xsd:simpleType>
+        <xsd:restriction base="dms:Text"/>
+      </xsd:simpleType>
+    </xsd:element>
+    <xsd:element name="MediaServiceObjectDetectorVersions" ma:index="13" nillable="true" ma:displayName="MediaServiceObjectDetectorVersions" ma:hidden="true" ma:indexed="true" ma:internalName="MediaServiceObjectDetectorVersions" ma:readOnly="true">
+      <xsd:simpleType>
+        <xsd:restriction base="dms:Text"/>
+      </xsd:simpleType>
+    </xsd:element>
+    <xsd:element name="MediaServiceSystemTags" ma:index="14" nillable="true" ma:displayName="MediaServiceSystemTags" ma:hidden="true" ma:internalName="MediaServiceSystemTags" ma:readOnly="true">
+      <xsd:simpleType>
+        <xsd:restriction base="dms:Note"/>
+      </xsd:simpleType>
+    </xsd:element>
+    <xsd:element name="MediaServiceLocation" ma:index="15" nillable="true" ma:displayName="Location" ma:indexed="true" ma:internalName="MediaServiceLocation" ma:readOnly="true">
+      <xsd:simpleType>
+        <xsd:restriction base="dms:Text"/>
+      </xsd:simpleType>
+    </xsd:element>
+    <xsd:element name="MediaServiceGenerationTime" ma:index="16" nillable="true" ma:displayName="MediaServiceGenerationTime" ma:hidden="true" ma:internalName="MediaServiceGenerationTime" ma:readOnly="true">
+      <xsd:simpleType>
+        <xsd:restriction base="dms:Text"/>
+      </xsd:simpleType>
+    </xsd:element>
+    <xsd:element name="MediaServiceEventHashCode" ma:index="17" nillable="true" ma:displayName="MediaServiceEventHashCode" ma:hidden="true" ma:internalName="MediaServiceEventHashCode" ma:readOnly="true">
+      <xsd:simpleType>
+        <xsd:restriction base="dms:Text"/>
+      </xsd:simpleType>
+    </xsd:element>
+    <xsd:element name="MediaLengthInSeconds" ma:index="18" nillable="true" ma:displayName="MediaLengthInSeconds" ma:hidden="true" ma:internalName="MediaLengthInSeconds" ma:readOnly="true">
+      <xsd:simpleType>
+        <xsd:restriction base="dms:Unknown"/>
+      </xsd:simpleType>
+    </xsd:element>
+  </xsd:schema>
+  <xsd:schema xmlns="http://schemas.openxmlformats.org/package/2006/metadata/core-properties" xmlns:xsd="http://www.w3.org/2001/XMLSchema" xmlns:xsi="http://www.w3.org/2001/XMLSchema-instance" xmlns:dc="http://purl.org/dc/elements/1.1/" xmlns:dcterms="http://purl.org/dc/terms/" xmlns:odoc="http://schemas.microsoft.com/internal/obd" targetNamespace="http://schemas.openxmlformats.org/package/2006/metadata/core-properties" elementFormDefault="qualified" attributeFormDefault="unqualified" blockDefault="#all">
+    <xsd:import namespace="http://purl.org/dc/elements/1.1/" schemaLocation="http://dublincore.org/schemas/xmls/qdc/2003/04/02/dc.xsd"/>
+    <xsd:import namespace="http://purl.org/dc/terms/" schemaLocation="http://dublincore.org/schemas/xmls/qdc/2003/04/02/dcterms.xsd"/>
+    <xsd:element name="coreProperties" type="CT_coreProperties"/>
+    <xsd:complexType name="CT_coreProperties">
+      <xsd:all>
+        <xsd:element ref="dc:creator" minOccurs="0" maxOccurs="1"/>
+        <xsd:element ref="dcterms:created" minOccurs="0" maxOccurs="1"/>
+        <xsd:element ref="dc:identifier" minOccurs="0" maxOccurs="1"/>
+        <xsd:element name="contentType" minOccurs="0" maxOccurs="1" type="xsd:string" ma:index="0" ma:displayName="Content Type"/>
+        <xsd:element ref="dc:title" minOccurs="0" maxOccurs="1" ma:index="4" ma:displayName="Title"/>
+        <xsd:element ref="dc:subject" minOccurs="0" maxOccurs="1"/>
+        <xsd:element ref="dc:description" minOccurs="0" maxOccurs="1"/>
+        <xsd:element name="keywords" minOccurs="0" maxOccurs="1" type="xsd:string"/>
+        <xsd:element ref="dc:language" minOccurs="0" maxOccurs="1"/>
+        <xsd:element name="category" minOccurs="0" maxOccurs="1" type="xsd:string"/>
+        <xsd:element name="version" minOccurs="0" maxOccurs="1" type="xsd:string"/>
+        <xsd:element name="revision" minOccurs="0" maxOccurs="1" type="xsd:string">
+          <xsd:annotation>
+            <xsd:documentation>
+                        This value indicates the number of saves or revisions. The application is responsible for updating this value after each revision.
+                    </xsd:documentation>
+          </xsd:annotation>
+        </xsd:element>
+        <xsd:element name="lastModifiedBy" minOccurs="0" maxOccurs="1" type="xsd:string"/>
+        <xsd:element ref="dcterms:modified" minOccurs="0" maxOccurs="1"/>
+        <xsd:element name="contentStatus" minOccurs="0" maxOccurs="1" type="xsd:string"/>
+      </xsd:all>
+    </xsd:complexType>
+  </xsd:schema>
+  <xs:schema xmlns:pc="http://schemas.microsoft.com/office/infopath/2007/PartnerControls" xmlns:xs="http://www.w3.org/2001/XMLSchema" targetNamespace="http://schemas.microsoft.com/office/infopath/2007/PartnerControls" elementFormDefault="qualified" attributeFormDefault="unqualified">
+    <xs:element name="Person">
+      <xs:complexType>
+        <xs:sequence>
+          <xs:element ref="pc:DisplayName" minOccurs="0"/>
+          <xs:element ref="pc:AccountId" minOccurs="0"/>
+          <xs:element ref="pc:AccountType" minOccurs="0"/>
+        </xs:sequence>
+      </xs:complexType>
+    </xs:element>
+    <xs:element name="DisplayName" type="xs:string"/>
+    <xs:element name="AccountId" type="xs:string"/>
+    <xs:element name="AccountType" type="xs:string"/>
+    <xs:element name="BDCAssociatedEntity">
+      <xs:complexType>
+        <xs:sequence>
+          <xs:element ref="pc:BDCEntity" minOccurs="0" maxOccurs="unbounded"/>
+        </xs:sequence>
+        <xs:attribute ref="pc:EntityNamespace"/>
+        <xs:attribute ref="pc:EntityName"/>
+        <xs:attribute ref="pc:SystemInstanceName"/>
+        <xs:attribute ref="pc:AssociationName"/>
+      </xs:complexType>
+    </xs:element>
+    <xs:attribute name="EntityNamespace" type="xs:string"/>
+    <xs:attribute name="EntityName" type="xs:string"/>
+    <xs:attribute name="SystemInstanceName" type="xs:string"/>
+    <xs:attribute name="AssociationName" type="xs:string"/>
+    <xs:element name="BDCEntity">
+      <xs:complexType>
+        <xs:sequence>
+          <xs:element ref="pc:EntityDisplayName" minOccurs="0"/>
+          <xs:element ref="pc:EntityInstanceReference" minOccurs="0"/>
+          <xs:element ref="pc:EntityId1" minOccurs="0"/>
+          <xs:element ref="pc:EntityId2" minOccurs="0"/>
+          <xs:element ref="pc:EntityId3" minOccurs="0"/>
+          <xs:element ref="pc:EntityId4" minOccurs="0"/>
+          <xs:element ref="pc:EntityId5" minOccurs="0"/>
+        </xs:sequence>
+      </xs:complexType>
+    </xs:element>
+    <xs:element name="EntityDisplayName" type="xs:string"/>
+    <xs:element name="EntityInstanceReference" type="xs:string"/>
+    <xs:element name="EntityId1" type="xs:string"/>
+    <xs:element name="EntityId2" type="xs:string"/>
+    <xs:element name="EntityId3" type="xs:string"/>
+    <xs:element name="EntityId4" type="xs:string"/>
+    <xs:element name="EntityId5" type="xs:string"/>
+    <xs:element name="Terms">
+      <xs:complexType>
+        <xs:sequence>
+          <xs:element ref="pc:TermInfo" minOccurs="0" maxOccurs="unbounded"/>
+        </xs:sequence>
+      </xs:complexType>
+    </xs:element>
+    <xs:element name="TermInfo">
+      <xs:complexType>
+        <xs:sequence>
+          <xs:element ref="pc:TermName" minOccurs="0"/>
+          <xs:element ref="pc:TermId" minOccurs="0"/>
+        </xs:sequence>
+      </xs:complexType>
+    </xs:element>
+    <xs:element name="TermName" type="xs:string"/>
+    <xs:element name="TermId" type="xs:string"/>
+  </xs:schema>
+</ct:contentTypeSchema>
+</file>
+
+<file path=customXml/item2.xml><?xml version="1.0" encoding="utf-8"?>
+<?mso-contentType ?>
+<FormTemplates xmlns="http://schemas.microsoft.com/sharepoint/v3/contenttype/forms">
+  <Display>DocumentLibraryForm</Display>
+  <Edit>DocumentLibraryForm</Edit>
+  <New>DocumentLibraryForm</New>
+</FormTemplates>
+</file>
+
+<file path=customXml/item3.xml><?xml version="1.0" encoding="utf-8"?>
+<p:properties xmlns:p="http://schemas.microsoft.com/office/2006/metadata/properties" xmlns:xsi="http://www.w3.org/2001/XMLSchema-instance" xmlns:pc="http://schemas.microsoft.com/office/infopath/2007/PartnerControls">
+  <documentManagement>
+    <_activity xmlns="970d745f-bebc-4faa-ac0a-ef6049a1141c" xsi:nil="true"/>
+  </documentManagement>
+</p:properties>
+</file>
+
+<file path=customXml/itemProps1.xml><?xml version="1.0" encoding="utf-8"?>
+<ds:datastoreItem xmlns:ds="http://schemas.openxmlformats.org/officeDocument/2006/customXml" ds:itemID="{CCC12C5A-1C08-4296-906E-BDB790F7EA69}">
+  <ds:schemaRefs>
+    <ds:schemaRef ds:uri="http://schemas.microsoft.com/office/2006/metadata/contentType"/>
+    <ds:schemaRef ds:uri="http://schemas.microsoft.com/office/2006/metadata/properties/metaAttributes"/>
+    <ds:schemaRef ds:uri="http://www.w3.org/2001/XMLSchema"/>
+    <ds:schemaRef ds:uri="http://schemas.microsoft.com/office/2006/metadata/properties"/>
+    <ds:schemaRef ds:uri="970d745f-bebc-4faa-ac0a-ef6049a1141c"/>
+    <ds:schemaRef ds:uri="http://schemas.microsoft.com/office/2006/documentManagement/types"/>
+    <ds:schemaRef ds:uri="http://schemas.microsoft.com/office/infopath/2007/PartnerControls"/>
+    <ds:schemaRef ds:uri="http://schemas.openxmlformats.org/package/2006/metadata/core-properties"/>
+    <ds:schemaRef ds:uri="http://purl.org/dc/elements/1.1/"/>
+    <ds:schemaRef ds:uri="http://purl.org/dc/terms/"/>
+    <ds:schemaRef ds:uri="http://schemas.microsoft.com/internal/obd"/>
+  </ds:schemaRefs>
+</ds:datastoreItem>
+</file>
+
+<file path=customXml/itemProps2.xml><?xml version="1.0" encoding="utf-8"?>
+<ds:datastoreItem xmlns:ds="http://schemas.openxmlformats.org/officeDocument/2006/customXml" ds:itemID="{DCD3BFAF-1453-4483-9B96-144C9471946A}">
+  <ds:schemaRefs>
+    <ds:schemaRef ds:uri="http://schemas.microsoft.com/sharepoint/v3/contenttype/forms"/>
+  </ds:schemaRefs>
+</ds:datastoreItem>
+</file>
+
+<file path=customXml/itemProps3.xml><?xml version="1.0" encoding="utf-8"?>
+<ds:datastoreItem xmlns:ds="http://schemas.openxmlformats.org/officeDocument/2006/customXml" ds:itemID="{C3DC3CC4-67DD-460D-B979-B451C7752C10}">
+  <ds:schemaRefs>
+    <ds:schemaRef ds:uri="http://purl.org/dc/terms/"/>
+    <ds:schemaRef ds:uri="http://schemas.openxmlformats.org/package/2006/metadata/core-properties"/>
+    <ds:schemaRef ds:uri="http://schemas.microsoft.com/office/2006/documentManagement/types"/>
+    <ds:schemaRef ds:uri="http://schemas.microsoft.com/office/infopath/2007/PartnerControls"/>
+    <ds:schemaRef ds:uri="http://purl.org/dc/elements/1.1/"/>
+    <ds:schemaRef ds:uri="http://schemas.microsoft.com/office/2006/metadata/properties"/>
+    <ds:schemaRef ds:uri="970d745f-bebc-4faa-ac0a-ef6049a1141c"/>
+    <ds:schemaRef ds:uri="http://www.w3.org/XML/1998/namespace"/>
+    <ds:schemaRef ds:uri="http://purl.org/dc/dcmitype/"/>
+  </ds:schemaRefs>
+</ds:datastoreItem>
 </file>